--- a/Indradhanu - PCCOE Grand Challenge 2026.pptx
+++ b/Indradhanu - PCCOE Grand Challenge 2026.pptx
@@ -4,6 +4,9 @@
   <p:sldMasterIdLst>
     <p:sldMasterId id="2147483648" r:id="rId1"/>
   </p:sldMasterIdLst>
+  <p:notesMasterIdLst>
+    <p:notesMasterId r:id="rId10"/>
+  </p:notesMasterIdLst>
   <p:sldIdLst>
     <p:sldId id="256" r:id="rId2"/>
     <p:sldId id="257" r:id="rId3"/>
@@ -14,9 +17,6 @@
     <p:sldId id="262" r:id="rId8"/>
     <p:sldId id="263" r:id="rId9"/>
   </p:sldIdLst>
-  <p:notesMasterIdLst>
-    <p:notesMasterId r:id="rId10"/>
-  </p:notesMasterIdLst>
   <p:sldSz cx="12192000" cy="6858000"/>
   <p:notesSz cx="6858000" cy="12192000"/>
   <p:defaultTextStyle>
@@ -111,6 +111,11 @@
       </a:defRPr>
     </a:lvl9pPr>
   </p:defaultTextStyle>
+  <p:extLst>
+    <p:ext uri="{EFAFB233-063F-42B5-8137-9DF3F51BA10A}">
+      <p15:sldGuideLst xmlns:p15="http://schemas.microsoft.com/office/powerpoint/2012/main"/>
+    </p:ext>
+  </p:extLst>
 </p:presentation>
 </file>
 
@@ -136,234 +141,10 @@
           <a:chExt cx="0" cy="0"/>
         </a:xfrm>
       </p:grpSpPr>
-      <p:sp>
-        <p:nvSpPr>
-          <p:cNvPr id="2" name="Header Placeholder 1"/>
-          <p:cNvSpPr>
-            <a:spLocks noGrp="1"/>
-          </p:cNvSpPr>
-          <p:nvPr>
-            <p:ph type="hdr" sz="quarter"/>
-          </p:nvPr>
-        </p:nvSpPr>
-        <p:spPr>
-          <a:xfrm>
-            <a:off x="0" y="0"/>
-            <a:ext cx="2971800" cy="458788"/>
-          </a:xfrm>
-          <a:prstGeom prst="rect">
-            <a:avLst/>
-          </a:prstGeom>
-        </p:spPr>
-        <p:txBody>
-          <a:bodyPr vert="horz" lIns="91440" tIns="45720" rIns="91440" bIns="45720" rtlCol="0"/>
-          <a:lstStyle>
-            <a:lvl1pPr algn="l">
-              <a:defRPr sz="1200"/>
-            </a:lvl1pPr>
-          </a:lstStyle>
-          <a:p>
-            <a:endParaRPr lang="en-US"/>
-          </a:p>
-        </p:txBody>
-      </p:sp>
-      <p:sp>
-        <p:nvSpPr>
-          <p:cNvPr id="3" name="Date Placeholder 2"/>
-          <p:cNvSpPr>
-            <a:spLocks noGrp="1"/>
-          </p:cNvSpPr>
-          <p:nvPr>
-            <p:ph type="dt" idx="1"/>
-          </p:nvPr>
-        </p:nvSpPr>
-        <p:spPr>
-          <a:xfrm>
-            <a:off x="3884613" y="0"/>
-            <a:ext cx="2971800" cy="458788"/>
-          </a:xfrm>
-          <a:prstGeom prst="rect">
-            <a:avLst/>
-          </a:prstGeom>
-        </p:spPr>
-        <p:txBody>
-          <a:bodyPr vert="horz" lIns="91440" tIns="45720" rIns="91440" bIns="45720" rtlCol="0"/>
-          <a:lstStyle>
-            <a:lvl1pPr algn="r">
-              <a:defRPr sz="1200"/>
-            </a:lvl1pPr>
-          </a:lstStyle>
-          <a:p>
-            <a:fld id="{5282F153-3F37-0F45-9E97-73ACFA13230C}" type="datetimeFigureOut">
-              <a:rPr lang="en-US"/>
-              <a:t>7/23/19</a:t>
-            </a:fld>
-            <a:endParaRPr lang="en-US"/>
-          </a:p>
-        </p:txBody>
-      </p:sp>
-      <p:sp>
-        <p:nvSpPr>
-          <p:cNvPr id="4" name="Slide Image Placeholder 3"/>
-          <p:cNvSpPr>
-            <a:spLocks noGrp="1" noRot="1" noChangeAspect="1"/>
-          </p:cNvSpPr>
-          <p:nvPr>
-            <p:ph type="sldImg" idx="2"/>
-          </p:nvPr>
-        </p:nvSpPr>
-        <p:spPr>
-          <a:xfrm>
-            <a:off x="685800" y="1143000"/>
-            <a:ext cx="5486400" cy="3086100"/>
-          </a:xfrm>
-          <a:prstGeom prst="rect">
-            <a:avLst/>
-          </a:prstGeom>
-          <a:noFill/>
-          <a:ln w="12700">
-            <a:solidFill>
-              <a:prstClr val="black"/>
-            </a:solidFill>
-          </a:ln>
-        </p:spPr>
-        <p:txBody>
-          <a:bodyPr vert="horz" lIns="91440" tIns="45720" rIns="91440" bIns="45720" rtlCol="0" anchor="ctr"/>
-          <a:lstStyle/>
-          <a:p>
-            <a:endParaRPr lang="en-US"/>
-          </a:p>
-        </p:txBody>
-      </p:sp>
-      <p:sp>
-        <p:nvSpPr>
-          <p:cNvPr id="5" name="Notes Placeholder 4"/>
-          <p:cNvSpPr>
-            <a:spLocks noGrp="1"/>
-          </p:cNvSpPr>
-          <p:nvPr>
-            <p:ph type="body" sz="quarter" idx="3"/>
-          </p:nvPr>
-        </p:nvSpPr>
-        <p:spPr>
-          <a:xfrm>
-            <a:off x="685800" y="4400550"/>
-            <a:ext cx="5486400" cy="3600450"/>
-          </a:xfrm>
-          <a:prstGeom prst="rect">
-            <a:avLst/>
-          </a:prstGeom>
-        </p:spPr>
-        <p:txBody>
-          <a:bodyPr vert="horz" lIns="91440" tIns="45720" rIns="91440" bIns="45720" rtlCol="0"/>
-          <a:lstStyle/>
-          <a:p>
-            <a:pPr lvl="0"/>
-            <a:r>
-              <a:rPr lang="en-US"/>
-              <a:t>Click to edit Master text styles</a:t>
-            </a:r>
-          </a:p>
-          <a:p>
-            <a:pPr lvl="1"/>
-            <a:r>
-              <a:rPr lang="en-US"/>
-              <a:t>Second level</a:t>
-            </a:r>
-          </a:p>
-          <a:p>
-            <a:pPr lvl="2"/>
-            <a:r>
-              <a:rPr lang="en-US"/>
-              <a:t>Third level</a:t>
-            </a:r>
-          </a:p>
-          <a:p>
-            <a:pPr lvl="3"/>
-            <a:r>
-              <a:rPr lang="en-US"/>
-              <a:t>Fourth level</a:t>
-            </a:r>
-          </a:p>
-          <a:p>
-            <a:pPr lvl="4"/>
-            <a:r>
-              <a:rPr lang="en-US"/>
-              <a:t>Fifth level</a:t>
-            </a:r>
-          </a:p>
-        </p:txBody>
-      </p:sp>
-      <p:sp>
-        <p:nvSpPr>
-          <p:cNvPr id="6" name="Footer Placeholder 5"/>
-          <p:cNvSpPr>
-            <a:spLocks noGrp="1"/>
-          </p:cNvSpPr>
-          <p:nvPr>
-            <p:ph type="ftr" sz="quarter" idx="4"/>
-          </p:nvPr>
-        </p:nvSpPr>
-        <p:spPr>
-          <a:xfrm>
-            <a:off x="0" y="8685213"/>
-            <a:ext cx="2971800" cy="458787"/>
-          </a:xfrm>
-          <a:prstGeom prst="rect">
-            <a:avLst/>
-          </a:prstGeom>
-        </p:spPr>
-        <p:txBody>
-          <a:bodyPr vert="horz" lIns="91440" tIns="45720" rIns="91440" bIns="45720" rtlCol="0" anchor="b"/>
-          <a:lstStyle>
-            <a:lvl1pPr algn="l">
-              <a:defRPr sz="1200"/>
-            </a:lvl1pPr>
-          </a:lstStyle>
-          <a:p>
-            <a:endParaRPr lang="en-US"/>
-          </a:p>
-        </p:txBody>
-      </p:sp>
-      <p:sp>
-        <p:nvSpPr>
-          <p:cNvPr id="7" name="Slide Number Placeholder 6"/>
-          <p:cNvSpPr>
-            <a:spLocks noGrp="1"/>
-          </p:cNvSpPr>
-          <p:nvPr>
-            <p:ph type="sldNum" sz="quarter" idx="5"/>
-          </p:nvPr>
-        </p:nvSpPr>
-        <p:spPr>
-          <a:xfrm>
-            <a:off x="3884613" y="8685213"/>
-            <a:ext cx="2971800" cy="458787"/>
-          </a:xfrm>
-          <a:prstGeom prst="rect">
-            <a:avLst/>
-          </a:prstGeom>
-        </p:spPr>
-        <p:txBody>
-          <a:bodyPr vert="horz" lIns="91440" tIns="45720" rIns="91440" bIns="45720" rtlCol="0" anchor="b"/>
-          <a:lstStyle>
-            <a:lvl1pPr algn="r">
-              <a:defRPr sz="1200"/>
-            </a:lvl1pPr>
-          </a:lstStyle>
-          <a:p>
-            <a:fld id="{CE5E9CC1-C706-0F49-92D6-E571CC5EEA8F}" type="slidenum">
-              <a:rPr lang="en-US"/>
-              <a:t>‹#›</a:t>
-            </a:fld>
-            <a:endParaRPr lang="en-US"/>
-          </a:p>
-        </p:txBody>
-      </p:sp>
     </p:spTree>
     <p:extLst>
       <p:ext uri="{BB962C8B-B14F-4D97-AF65-F5344CB8AC3E}">
-        <p14:creationId xmlns:p14="http://schemas.microsoft.com/office/powerpoint/2010/main" val="1024086991"/>
+        <p14:creationId xmlns:p14="http://schemas.microsoft.com/office/powerpoint/2010/main" val="3775608502"/>
       </p:ext>
     </p:extLst>
   </p:cSld>
@@ -511,7 +292,6 @@
               <a:rPr lang="en-US" dirty="0"/>
               <a:t>Indradhanu is a hazard-agnostic agentic AI platform for climate disaster early warning and response. Theme AI for Climate Change. Domain: Disaster Resilience, Public Health and Community Well-being. Topics: Early Warning Systems and Disaster Forecasting and Response. Pilot city Pune, India. Team: Ayush Pathak, Tushar Singh, Shreeviraj Matale, Satyam Srivastava, third year undergraduate, Vishwakarma Institute of Technology, Pune. Technology stack: FastAPI, React with Vite, shadcn/ui, Mapbox GL, LangGraph, LangChain, Supabase Postgres with PostGIS, Google Gemini, AWS Bedrock.</a:t>
             </a:r>
-            <a:endParaRPr lang="en-US" dirty="0"/>
           </a:p>
         </p:txBody>
       </p:sp>
@@ -599,7 +379,6 @@
               <a:rPr lang="en-US" dirty="0"/>
               <a:t>Outline: Problem Statement and Idea, Objectives, Proposed Solution and Architecture, Unique Features and Innovation, Expected Outcomes, Conclusion.</a:t>
             </a:r>
-            <a:endParaRPr lang="en-US" dirty="0"/>
           </a:p>
         </p:txBody>
       </p:sp>
@@ -687,7 +466,6 @@
               <a:rPr lang="en-US" dirty="0"/>
               <a:t>Problem statement. India has credible forecasting from IMD, CWC, CPCB and NDMA but lacks the operational decision layer. Four gaps: warnings stop at district granularity, hazard and exposure data are siloed, response coordination is manual and undocumented, and each hazard is rebuilt as a separate system. Real-world relevance: Pune floods of 25 July and 4 August 2024, 45000 cusecs discharged from Khadakwasla dam, Army requisitioned. Idea: a hazard-agnostic agentic AI platform producing ranked, policy-cited, ward-level action plans.</a:t>
             </a:r>
-            <a:endParaRPr lang="en-US" dirty="0"/>
           </a:p>
         </p:txBody>
       </p:sp>
@@ -775,7 +553,6 @@
               <a:rPr lang="en-US" dirty="0"/>
               <a:t>Objectives: hyperlocal multi-hazard forecasting at ward and 250 metre grid resolution; decisions grounded in retrieved NDMA and municipal standard operating procedures; constrained optimisation for resource allocation and citizen evacuation routing. Impact: lead time, efficiency, accountability, sustainability. Beneficiaries: residents, municipal disaster cells, ward officers, field teams, transport fire and ambulance services, district administration.</a:t>
             </a:r>
-            <a:endParaRPr lang="en-US" dirty="0"/>
           </a:p>
         </p:txBody>
       </p:sp>
@@ -863,7 +640,6 @@
               <a:rPr lang="en-US" dirty="0"/>
               <a:t>Architecture in five layers. Layer 1 data ingestion: Open-Meteo forecast and GloFAS flood API, IMD warnings, CPCB and CAMS air quality, CWC reservoir levels, NASA FIRMS fire, USGS seismic, GDACS, joined against static exposure geography in Supabase PostGIS. Layer 2 hazard adapters implement one common contract - signal, score, exposure join, impact, action policy - so flood, heatwave, air quality, wildfire and seismic share one codebase. Layer 3 LangGraph multi-agent orchestrator over LangChain tools: Hazard Analyst, Impact and Exposure, Allocation Planner using Google OR-Tools CP-SAT over OSRM travel times, and Guidance Agent. Layer 4 policy-grounded human in the loop gate using retrieval over NDMA standard operating procedures, the municipal disaster management plan and the delegation of authority matrix. Layer 5 three interfaces: Citizen Portal, Administration Command Console, Field and Service Operator Portal. Backend FastAPI, frontend React with Vite, shadcn/ui, Mapbox GL, Framer Motion and GSAP. Database Supabase Postgres with PostGIS. Large language model Google Gemini in development, AWS Bedrock in production. Adapters are stateless and horizontally scalable.</a:t>
             </a:r>
-            <a:endParaRPr lang="en-US" dirty="0"/>
           </a:p>
         </p:txBody>
       </p:sp>
@@ -951,7 +727,6 @@
               <a:rPr lang="en-US" dirty="0"/>
               <a:t>Innovation. A single hazard-agnostic adapter contract instead of one system per disaster type. Retrieval-grounded decisions that cite the NDMA or municipal standard operating procedure clause authorising each action. Agentic AI paired with constrained optimisation: LangGraph agents propose, Google OR-Tools CP-SAT allocates. Replay Mode backtesting against the July 2024 Pune flood using reanalysis data. A closed loop across citizen, administration and field operator interfaces, with computer-vision classification, duplicate clustering, proof-of-closure and officer override captured as training signal.</a:t>
             </a:r>
-            <a:endParaRPr lang="en-US" dirty="0"/>
           </a:p>
         </p:txBody>
       </p:sp>
@@ -1039,7 +814,6 @@
               <a:rPr lang="en-US" dirty="0"/>
               <a:t>Expected outcomes. Deliverables: a deployed platform with three interfaces, a multi-hazard machine learning risk engine, a policy-grounded agentic dispatch planner, and a Pune reference geospatial dataset. Short-term figures are stated as targets to be validated, not measured results. Long-term: additional hazard adapters, multi-city tenancy under a state disaster management authority, and longitudinal risk data for climate-resilient urban planning. Scaling a new city requires only ward geometry, a digital elevation model and an exposure layer.</a:t>
             </a:r>
-            <a:endParaRPr lang="en-US" dirty="0"/>
           </a:p>
         </p:txBody>
       </p:sp>
@@ -1127,7 +901,6 @@
               <a:rPr lang="en-US" dirty="0"/>
               <a:t>Conclusion. Indradhanu is the missing operational layer between India's climate data and administrative action. It should be selected because it targets the real gap rather than the headline, it is buildable on open APIs available today, it is provable outside the monsoon through Replay Mode, and one architecture generalises across every climate disaster type.</a:t>
             </a:r>
-            <a:endParaRPr lang="en-US" dirty="0"/>
           </a:p>
         </p:txBody>
       </p:sp>
@@ -1200,6 +973,11 @@
 <file path=ppt/slideMasters/slideMaster1.xml><?xml version="1.0" encoding="utf-8"?>
 <p:sldMaster xmlns:a="http://schemas.openxmlformats.org/drawingml/2006/main" xmlns:r="http://schemas.openxmlformats.org/officeDocument/2006/relationships" xmlns:p="http://schemas.openxmlformats.org/presentationml/2006/main">
   <p:cSld>
+    <p:bg>
+      <p:bgRef idx="1001">
+        <a:schemeClr val="bg1"/>
+      </p:bgRef>
+    </p:bg>
     <p:spTree>
       <p:nvGrpSpPr>
         <p:cNvPr id="1" name=""/>
@@ -1512,11 +1290,11 @@
           <a:bodyPr wrap="square" lIns="0" tIns="0" rIns="0" bIns="0" rtlCol="0" anchor="ctr"/>
           <a:lstStyle/>
           <a:p>
-            <a:pPr indent="0" marL="0">
-              <a:buNone/>
-            </a:pPr>
-            <a:r>
-              <a:rPr lang="en-US" sz="1100" b="1" spc="240" kern="0" dirty="0">
+            <a:pPr marL="0" indent="0">
+              <a:buNone/>
+            </a:pPr>
+            <a:r>
+              <a:rPr lang="en-US" sz="1100" b="1" kern="0" spc="240" dirty="0">
                 <a:solidFill>
                   <a:srgbClr val="6E8194"/>
                 </a:solidFill>
@@ -1551,7 +1329,7 @@
           <a:bodyPr wrap="square" lIns="0" tIns="0" rIns="0" bIns="0" rtlCol="0" anchor="ctr"/>
           <a:lstStyle/>
           <a:p>
-            <a:pPr indent="0" marL="0">
+            <a:pPr marL="0" indent="0">
               <a:buNone/>
             </a:pPr>
             <a:r>
@@ -1590,7 +1368,7 @@
           <a:bodyPr wrap="square" lIns="0" tIns="0" rIns="0" bIns="0" rtlCol="0" anchor="ctr"/>
           <a:lstStyle/>
           <a:p>
-            <a:pPr indent="0" marL="0">
+            <a:pPr marL="0" indent="0">
               <a:buNone/>
             </a:pPr>
             <a:r>
@@ -1616,27 +1394,86 @@
         </p:nvSpPr>
         <p:spPr>
           <a:xfrm>
-            <a:off x="640080" y="2194560"/>
-            <a:ext cx="8778240" cy="694944"/>
-          </a:xfrm>
-          <a:prstGeom prst="rect">
-            <a:avLst/>
-          </a:prstGeom>
-          <a:noFill/>
-          <a:ln/>
-        </p:spPr>
-        <p:txBody>
-          <a:bodyPr wrap="square" lIns="0" tIns="0" rIns="0" bIns="0" rtlCol="0" anchor="ctr"/>
-          <a:lstStyle/>
-          <a:p>
-            <a:pPr indent="0" marL="0">
+            <a:off x="640080" y="2139696"/>
+            <a:ext cx="8778240" cy="731520"/>
+          </a:xfrm>
+          <a:prstGeom prst="rect">
+            <a:avLst/>
+          </a:prstGeom>
+          <a:noFill/>
+          <a:ln/>
+        </p:spPr>
+        <p:txBody>
+          <a:bodyPr wrap="square" lIns="0" tIns="0" rIns="0" bIns="0" rtlCol="0" anchor="ctr"/>
+          <a:lstStyle/>
+          <a:p>
+            <a:pPr marL="0" indent="0">
               <a:lnSpc>
-                <a:spcPts val="2400"/>
+                <a:spcPts val="2900"/>
               </a:lnSpc>
               <a:buNone/>
             </a:pPr>
             <a:r>
-              <a:rPr lang="en-US" sz="1550" dirty="0">
+              <a:rPr lang="en-US" sz="2100" b="1" dirty="0">
+                <a:solidFill>
+                  <a:srgbClr val="11253C"/>
+                </a:solidFill>
+                <a:latin typeface="Cambria" pitchFamily="34" charset="0"/>
+                <a:ea typeface="Cambria" pitchFamily="34" charset="-122"/>
+                <a:cs typeface="Cambria" pitchFamily="34" charset="-120"/>
+              </a:rPr>
+              <a:t>Forecasts tell us what will happen.</a:t>
+            </a:r>
+            <a:endParaRPr lang="en-US" sz="2100" dirty="0"/>
+          </a:p>
+          <a:p>
+            <a:pPr marL="0" indent="0">
+              <a:lnSpc>
+                <a:spcPts val="2900"/>
+              </a:lnSpc>
+              <a:buNone/>
+            </a:pPr>
+            <a:r>
+              <a:rPr lang="en-US" sz="2100" b="1" dirty="0">
+                <a:solidFill>
+                  <a:srgbClr val="11253C"/>
+                </a:solidFill>
+                <a:latin typeface="Cambria" pitchFamily="34" charset="0"/>
+                <a:ea typeface="Cambria" pitchFamily="34" charset="-122"/>
+                <a:cs typeface="Cambria" pitchFamily="34" charset="-120"/>
+              </a:rPr>
+              <a:t>Indradhanu tells everyone what to do next.</a:t>
+            </a:r>
+            <a:endParaRPr lang="en-US" sz="2100" dirty="0"/>
+          </a:p>
+        </p:txBody>
+      </p:sp>
+      <p:sp>
+        <p:nvSpPr>
+          <p:cNvPr id="6" name="Text 4"/>
+          <p:cNvSpPr txBox="1"/>
+          <p:nvPr/>
+        </p:nvSpPr>
+        <p:spPr>
+          <a:xfrm>
+            <a:off x="640080" y="2889504"/>
+            <a:ext cx="8778240" cy="274320"/>
+          </a:xfrm>
+          <a:prstGeom prst="rect">
+            <a:avLst/>
+          </a:prstGeom>
+          <a:noFill/>
+          <a:ln/>
+        </p:spPr>
+        <p:txBody>
+          <a:bodyPr wrap="square" lIns="0" tIns="0" rIns="0" bIns="0" rtlCol="0" anchor="ctr"/>
+          <a:lstStyle/>
+          <a:p>
+            <a:pPr marL="0" indent="0">
+              <a:buNone/>
+            </a:pPr>
+            <a:r>
+              <a:rPr lang="en-US" sz="1350" dirty="0">
                 <a:solidFill>
                   <a:srgbClr val="3D5468"/>
                 </a:solidFill>
@@ -1644,21 +1481,21 @@
                 <a:ea typeface="Calibri" pitchFamily="34" charset="-122"/>
                 <a:cs typeface="Calibri" pitchFamily="34" charset="-120"/>
               </a:rPr>
-              <a:t>A hazard-agnostic agentic AI platform that turns any disaster forecast into a ward-level action plan, an optimised deployment order, and a household-level instruction.</a:t>
-            </a:r>
-            <a:endParaRPr lang="en-US" sz="1550" dirty="0"/>
-          </a:p>
-        </p:txBody>
-      </p:sp>
-      <p:sp>
-        <p:nvSpPr>
-          <p:cNvPr id="6" name="Shape 4"/>
+              <a:t>A hazard-agnostic agentic AI platform: forecast → ward → household → response team.</a:t>
+            </a:r>
+            <a:endParaRPr lang="en-US" sz="1350" dirty="0"/>
+          </a:p>
+        </p:txBody>
+      </p:sp>
+      <p:sp>
+        <p:nvSpPr>
+          <p:cNvPr id="7" name="Shape 5"/>
           <p:cNvSpPr/>
           <p:nvPr/>
         </p:nvSpPr>
         <p:spPr>
           <a:xfrm>
-            <a:off x="640080" y="3072384"/>
+            <a:off x="640080" y="3291840"/>
             <a:ext cx="137160" cy="137160"/>
           </a:xfrm>
           <a:prstGeom prst="ellipse">
@@ -1677,13 +1514,13 @@
       </p:sp>
       <p:sp>
         <p:nvSpPr>
-          <p:cNvPr id="7" name="Text 5"/>
-          <p:cNvSpPr txBox="1"/>
-          <p:nvPr/>
-        </p:nvSpPr>
-        <p:spPr>
-          <a:xfrm>
-            <a:off x="859536" y="2999232"/>
+          <p:cNvPr id="8" name="Text 6"/>
+          <p:cNvSpPr txBox="1"/>
+          <p:nvPr/>
+        </p:nvSpPr>
+        <p:spPr>
+          <a:xfrm>
+            <a:off x="859536" y="3218688"/>
             <a:ext cx="1463040" cy="274320"/>
           </a:xfrm>
           <a:prstGeom prst="rect">
@@ -1696,7 +1533,7 @@
           <a:bodyPr wrap="square" lIns="0" tIns="0" rIns="0" bIns="0" rtlCol="0" anchor="ctr"/>
           <a:lstStyle/>
           <a:p>
-            <a:pPr indent="0" marL="0">
+            <a:pPr marL="0" indent="0">
               <a:buNone/>
             </a:pPr>
             <a:r>
@@ -1716,13 +1553,13 @@
       </p:sp>
       <p:sp>
         <p:nvSpPr>
-          <p:cNvPr id="8" name="Shape 6"/>
+          <p:cNvPr id="9" name="Shape 7"/>
           <p:cNvSpPr/>
           <p:nvPr/>
         </p:nvSpPr>
         <p:spPr>
           <a:xfrm>
-            <a:off x="1938528" y="3072384"/>
+            <a:off x="1938528" y="3291840"/>
             <a:ext cx="137160" cy="137160"/>
           </a:xfrm>
           <a:prstGeom prst="ellipse">
@@ -1741,13 +1578,13 @@
       </p:sp>
       <p:sp>
         <p:nvSpPr>
-          <p:cNvPr id="9" name="Text 7"/>
-          <p:cNvSpPr txBox="1"/>
-          <p:nvPr/>
-        </p:nvSpPr>
-        <p:spPr>
-          <a:xfrm>
-            <a:off x="2157984" y="2999232"/>
+          <p:cNvPr id="10" name="Text 8"/>
+          <p:cNvSpPr txBox="1"/>
+          <p:nvPr/>
+        </p:nvSpPr>
+        <p:spPr>
+          <a:xfrm>
+            <a:off x="2157984" y="3218688"/>
             <a:ext cx="1463040" cy="274320"/>
           </a:xfrm>
           <a:prstGeom prst="rect">
@@ -1760,7 +1597,7 @@
           <a:bodyPr wrap="square" lIns="0" tIns="0" rIns="0" bIns="0" rtlCol="0" anchor="ctr"/>
           <a:lstStyle/>
           <a:p>
-            <a:pPr indent="0" marL="0">
+            <a:pPr marL="0" indent="0">
               <a:buNone/>
             </a:pPr>
             <a:r>
@@ -1780,13 +1617,13 @@
       </p:sp>
       <p:sp>
         <p:nvSpPr>
-          <p:cNvPr id="10" name="Shape 8"/>
+          <p:cNvPr id="11" name="Shape 9"/>
           <p:cNvSpPr/>
           <p:nvPr/>
         </p:nvSpPr>
         <p:spPr>
           <a:xfrm>
-            <a:off x="3511296" y="3072384"/>
+            <a:off x="3511296" y="3291840"/>
             <a:ext cx="137160" cy="137160"/>
           </a:xfrm>
           <a:prstGeom prst="ellipse">
@@ -1805,13 +1642,13 @@
       </p:sp>
       <p:sp>
         <p:nvSpPr>
-          <p:cNvPr id="11" name="Text 9"/>
-          <p:cNvSpPr txBox="1"/>
-          <p:nvPr/>
-        </p:nvSpPr>
-        <p:spPr>
-          <a:xfrm>
-            <a:off x="3730752" y="2999232"/>
+          <p:cNvPr id="12" name="Text 10"/>
+          <p:cNvSpPr txBox="1"/>
+          <p:nvPr/>
+        </p:nvSpPr>
+        <p:spPr>
+          <a:xfrm>
+            <a:off x="3730752" y="3218688"/>
             <a:ext cx="1463040" cy="274320"/>
           </a:xfrm>
           <a:prstGeom prst="rect">
@@ -1824,7 +1661,7 @@
           <a:bodyPr wrap="square" lIns="0" tIns="0" rIns="0" bIns="0" rtlCol="0" anchor="ctr"/>
           <a:lstStyle/>
           <a:p>
-            <a:pPr indent="0" marL="0">
+            <a:pPr marL="0" indent="0">
               <a:buNone/>
             </a:pPr>
             <a:r>
@@ -1844,13 +1681,13 @@
       </p:sp>
       <p:sp>
         <p:nvSpPr>
-          <p:cNvPr id="12" name="Shape 10"/>
+          <p:cNvPr id="13" name="Shape 11"/>
           <p:cNvSpPr/>
           <p:nvPr/>
         </p:nvSpPr>
         <p:spPr>
           <a:xfrm>
-            <a:off x="5084064" y="3072384"/>
+            <a:off x="5084064" y="3291840"/>
             <a:ext cx="137160" cy="137160"/>
           </a:xfrm>
           <a:prstGeom prst="ellipse">
@@ -1869,13 +1706,13 @@
       </p:sp>
       <p:sp>
         <p:nvSpPr>
-          <p:cNvPr id="13" name="Text 11"/>
-          <p:cNvSpPr txBox="1"/>
-          <p:nvPr/>
-        </p:nvSpPr>
-        <p:spPr>
-          <a:xfrm>
-            <a:off x="5303520" y="2999232"/>
+          <p:cNvPr id="14" name="Text 12"/>
+          <p:cNvSpPr txBox="1"/>
+          <p:nvPr/>
+        </p:nvSpPr>
+        <p:spPr>
+          <a:xfrm>
+            <a:off x="5303520" y="3218688"/>
             <a:ext cx="1463040" cy="274320"/>
           </a:xfrm>
           <a:prstGeom prst="rect">
@@ -1888,7 +1725,7 @@
           <a:bodyPr wrap="square" lIns="0" tIns="0" rIns="0" bIns="0" rtlCol="0" anchor="ctr"/>
           <a:lstStyle/>
           <a:p>
-            <a:pPr indent="0" marL="0">
+            <a:pPr marL="0" indent="0">
               <a:buNone/>
             </a:pPr>
             <a:r>
@@ -1908,13 +1745,13 @@
       </p:sp>
       <p:sp>
         <p:nvSpPr>
-          <p:cNvPr id="14" name="Shape 12"/>
+          <p:cNvPr id="15" name="Shape 13"/>
           <p:cNvSpPr/>
           <p:nvPr/>
         </p:nvSpPr>
         <p:spPr>
           <a:xfrm>
-            <a:off x="6656832" y="3072384"/>
+            <a:off x="6656832" y="3291840"/>
             <a:ext cx="137160" cy="137160"/>
           </a:xfrm>
           <a:prstGeom prst="ellipse">
@@ -1933,13 +1770,13 @@
       </p:sp>
       <p:sp>
         <p:nvSpPr>
-          <p:cNvPr id="15" name="Text 13"/>
-          <p:cNvSpPr txBox="1"/>
-          <p:nvPr/>
-        </p:nvSpPr>
-        <p:spPr>
-          <a:xfrm>
-            <a:off x="6876288" y="2999232"/>
+          <p:cNvPr id="16" name="Text 14"/>
+          <p:cNvSpPr txBox="1"/>
+          <p:nvPr/>
+        </p:nvSpPr>
+        <p:spPr>
+          <a:xfrm>
+            <a:off x="6876288" y="3218688"/>
             <a:ext cx="1463040" cy="274320"/>
           </a:xfrm>
           <a:prstGeom prst="rect">
@@ -1952,7 +1789,7 @@
           <a:bodyPr wrap="square" lIns="0" tIns="0" rIns="0" bIns="0" rtlCol="0" anchor="ctr"/>
           <a:lstStyle/>
           <a:p>
-            <a:pPr indent="0" marL="0">
+            <a:pPr marL="0" indent="0">
               <a:buNone/>
             </a:pPr>
             <a:r>
@@ -1972,7 +1809,7 @@
       </p:sp>
       <p:sp>
         <p:nvSpPr>
-          <p:cNvPr id="16" name="Shape 14"/>
+          <p:cNvPr id="17" name="Shape 15"/>
           <p:cNvSpPr/>
           <p:nvPr/>
         </p:nvSpPr>
@@ -1997,7 +1834,7 @@
       </p:sp>
       <p:sp>
         <p:nvSpPr>
-          <p:cNvPr id="17" name="Text 15"/>
+          <p:cNvPr id="18" name="Text 16"/>
           <p:cNvSpPr txBox="1"/>
           <p:nvPr/>
         </p:nvSpPr>
@@ -2016,11 +1853,11 @@
           <a:bodyPr wrap="square" lIns="0" tIns="0" rIns="0" bIns="0" rtlCol="0" anchor="ctr"/>
           <a:lstStyle/>
           <a:p>
-            <a:pPr indent="0" marL="0">
-              <a:buNone/>
-            </a:pPr>
-            <a:r>
-              <a:rPr lang="en-US" sz="950" b="1" spc="160" kern="0" dirty="0">
+            <a:pPr marL="0" indent="0">
+              <a:buNone/>
+            </a:pPr>
+            <a:r>
+              <a:rPr lang="en-US" sz="950" b="1" kern="0" spc="160" dirty="0">
                 <a:solidFill>
                   <a:srgbClr val="6E8194"/>
                 </a:solidFill>
@@ -2036,7 +1873,7 @@
       </p:sp>
       <p:sp>
         <p:nvSpPr>
-          <p:cNvPr id="18" name="Text 16"/>
+          <p:cNvPr id="19" name="Text 17"/>
           <p:cNvSpPr txBox="1"/>
           <p:nvPr/>
         </p:nvSpPr>
@@ -2055,7 +1892,7 @@
           <a:bodyPr wrap="square" lIns="0" tIns="0" rIns="0" bIns="0" rtlCol="0" anchor="ctr"/>
           <a:lstStyle/>
           <a:p>
-            <a:pPr indent="0" marL="0">
+            <a:pPr marL="0" indent="0">
               <a:lnSpc>
                 <a:spcPts val="1800"/>
               </a:lnSpc>
@@ -2075,7 +1912,7 @@
             <a:endParaRPr lang="en-US" sz="1250" dirty="0"/>
           </a:p>
           <a:p>
-            <a:pPr indent="0" marL="0">
+            <a:pPr marL="0" indent="0">
               <a:lnSpc>
                 <a:spcPts val="1800"/>
               </a:lnSpc>
@@ -2098,7 +1935,7 @@
       </p:sp>
       <p:sp>
         <p:nvSpPr>
-          <p:cNvPr id="19" name="Shape 17"/>
+          <p:cNvPr id="20" name="Shape 18"/>
           <p:cNvSpPr/>
           <p:nvPr/>
         </p:nvSpPr>
@@ -2123,7 +1960,7 @@
       </p:sp>
       <p:sp>
         <p:nvSpPr>
-          <p:cNvPr id="20" name="Text 18"/>
+          <p:cNvPr id="21" name="Text 19"/>
           <p:cNvSpPr txBox="1"/>
           <p:nvPr/>
         </p:nvSpPr>
@@ -2142,11 +1979,11 @@
           <a:bodyPr wrap="square" lIns="0" tIns="0" rIns="0" bIns="0" rtlCol="0" anchor="ctr"/>
           <a:lstStyle/>
           <a:p>
-            <a:pPr indent="0" marL="0">
-              <a:buNone/>
-            </a:pPr>
-            <a:r>
-              <a:rPr lang="en-US" sz="950" b="1" spc="160" kern="0" dirty="0">
+            <a:pPr marL="0" indent="0">
+              <a:buNone/>
+            </a:pPr>
+            <a:r>
+              <a:rPr lang="en-US" sz="950" b="1" kern="0" spc="160" dirty="0">
                 <a:solidFill>
                   <a:srgbClr val="6E8194"/>
                 </a:solidFill>
@@ -2162,7 +1999,7 @@
       </p:sp>
       <p:sp>
         <p:nvSpPr>
-          <p:cNvPr id="21" name="Text 19"/>
+          <p:cNvPr id="22" name="Text 20"/>
           <p:cNvSpPr txBox="1"/>
           <p:nvPr/>
         </p:nvSpPr>
@@ -2181,7 +2018,7 @@
           <a:bodyPr wrap="square" lIns="0" tIns="0" rIns="0" bIns="0" rtlCol="0" anchor="ctr"/>
           <a:lstStyle/>
           <a:p>
-            <a:pPr indent="0" marL="0">
+            <a:pPr marL="0" indent="0">
               <a:lnSpc>
                 <a:spcPts val="1800"/>
               </a:lnSpc>
@@ -2201,7 +2038,7 @@
             <a:endParaRPr lang="en-US" sz="1250" dirty="0"/>
           </a:p>
           <a:p>
-            <a:pPr indent="0" marL="0">
+            <a:pPr marL="0" indent="0">
               <a:lnSpc>
                 <a:spcPts val="1800"/>
               </a:lnSpc>
@@ -2224,7 +2061,7 @@
       </p:sp>
       <p:sp>
         <p:nvSpPr>
-          <p:cNvPr id="22" name="Shape 20"/>
+          <p:cNvPr id="23" name="Shape 21"/>
           <p:cNvSpPr/>
           <p:nvPr/>
         </p:nvSpPr>
@@ -2249,7 +2086,7 @@
       </p:sp>
       <p:sp>
         <p:nvSpPr>
-          <p:cNvPr id="23" name="Text 21"/>
+          <p:cNvPr id="24" name="Text 22"/>
           <p:cNvSpPr txBox="1"/>
           <p:nvPr/>
         </p:nvSpPr>
@@ -2268,11 +2105,11 @@
           <a:bodyPr wrap="square" lIns="0" tIns="0" rIns="0" bIns="0" rtlCol="0" anchor="ctr"/>
           <a:lstStyle/>
           <a:p>
-            <a:pPr indent="0" marL="0">
-              <a:buNone/>
-            </a:pPr>
-            <a:r>
-              <a:rPr lang="en-US" sz="950" b="1" spc="160" kern="0" dirty="0">
+            <a:pPr marL="0" indent="0">
+              <a:buNone/>
+            </a:pPr>
+            <a:r>
+              <a:rPr lang="en-US" sz="950" b="1" kern="0" spc="160" dirty="0">
                 <a:solidFill>
                   <a:srgbClr val="6E8194"/>
                 </a:solidFill>
@@ -2288,7 +2125,7 @@
       </p:sp>
       <p:sp>
         <p:nvSpPr>
-          <p:cNvPr id="24" name="Text 22"/>
+          <p:cNvPr id="25" name="Text 23"/>
           <p:cNvSpPr txBox="1"/>
           <p:nvPr/>
         </p:nvSpPr>
@@ -2307,7 +2144,7 @@
           <a:bodyPr wrap="square" lIns="0" tIns="0" rIns="0" bIns="0" rtlCol="0" anchor="ctr"/>
           <a:lstStyle/>
           <a:p>
-            <a:pPr indent="0" marL="0">
+            <a:pPr marL="0" indent="0">
               <a:lnSpc>
                 <a:spcPts val="1800"/>
               </a:lnSpc>
@@ -2327,7 +2164,7 @@
             <a:endParaRPr lang="en-US" sz="1250" dirty="0"/>
           </a:p>
           <a:p>
-            <a:pPr indent="0" marL="0">
+            <a:pPr marL="0" indent="0">
               <a:lnSpc>
                 <a:spcPts val="1800"/>
               </a:lnSpc>
@@ -2350,7 +2187,7 @@
       </p:sp>
       <p:sp>
         <p:nvSpPr>
-          <p:cNvPr id="25" name="Shape 23"/>
+          <p:cNvPr id="26" name="Shape 24"/>
           <p:cNvSpPr/>
           <p:nvPr/>
         </p:nvSpPr>
@@ -2375,7 +2212,7 @@
       </p:sp>
       <p:sp>
         <p:nvSpPr>
-          <p:cNvPr id="26" name="Text 24"/>
+          <p:cNvPr id="27" name="Text 25"/>
           <p:cNvSpPr txBox="1"/>
           <p:nvPr/>
         </p:nvSpPr>
@@ -2394,11 +2231,11 @@
           <a:bodyPr wrap="square" lIns="0" tIns="0" rIns="0" bIns="0" rtlCol="0" anchor="ctr"/>
           <a:lstStyle/>
           <a:p>
-            <a:pPr indent="0" marL="0">
-              <a:buNone/>
-            </a:pPr>
-            <a:r>
-              <a:rPr lang="en-US" sz="950" b="1" spc="160" kern="0" dirty="0">
+            <a:pPr marL="0" indent="0">
+              <a:buNone/>
+            </a:pPr>
+            <a:r>
+              <a:rPr lang="en-US" sz="950" b="1" kern="0" spc="160" dirty="0">
                 <a:solidFill>
                   <a:srgbClr val="6E8194"/>
                 </a:solidFill>
@@ -2414,7 +2251,7 @@
       </p:sp>
       <p:sp>
         <p:nvSpPr>
-          <p:cNvPr id="27" name="Text 25"/>
+          <p:cNvPr id="28" name="Text 26"/>
           <p:cNvSpPr txBox="1"/>
           <p:nvPr/>
         </p:nvSpPr>
@@ -2433,7 +2270,7 @@
           <a:bodyPr wrap="square" lIns="0" tIns="0" rIns="0" bIns="0" rtlCol="0" anchor="ctr"/>
           <a:lstStyle/>
           <a:p>
-            <a:pPr indent="0" marL="0">
+            <a:pPr marL="0" indent="0">
               <a:buNone/>
             </a:pPr>
             <a:r>
@@ -2447,9 +2284,6 @@
               </a:rPr>
               <a:t>Ayush Pathak</a:t>
             </a:r>
-            <a:pPr indent="0" marL="0">
-              <a:buNone/>
-            </a:pPr>
             <a:r>
               <a:rPr lang="en-US" sz="1200" dirty="0">
                 <a:solidFill>
@@ -2467,7 +2301,7 @@
       </p:sp>
       <p:sp>
         <p:nvSpPr>
-          <p:cNvPr id="28" name="Text 26"/>
+          <p:cNvPr id="29" name="Text 27"/>
           <p:cNvSpPr txBox="1"/>
           <p:nvPr/>
         </p:nvSpPr>
@@ -2486,7 +2320,7 @@
           <a:bodyPr wrap="square" lIns="0" tIns="0" rIns="0" bIns="0" rtlCol="0" anchor="ctr"/>
           <a:lstStyle/>
           <a:p>
-            <a:pPr indent="0" marL="0">
+            <a:pPr marL="0" indent="0">
               <a:buNone/>
             </a:pPr>
             <a:r>
@@ -2500,9 +2334,6 @@
               </a:rPr>
               <a:t>Tushar Singh</a:t>
             </a:r>
-            <a:pPr indent="0" marL="0">
-              <a:buNone/>
-            </a:pPr>
             <a:r>
               <a:rPr lang="en-US" sz="1200" dirty="0">
                 <a:solidFill>
@@ -2520,7 +2351,7 @@
       </p:sp>
       <p:sp>
         <p:nvSpPr>
-          <p:cNvPr id="29" name="Text 27"/>
+          <p:cNvPr id="30" name="Text 28"/>
           <p:cNvSpPr txBox="1"/>
           <p:nvPr/>
         </p:nvSpPr>
@@ -2539,7 +2370,7 @@
           <a:bodyPr wrap="square" lIns="0" tIns="0" rIns="0" bIns="0" rtlCol="0" anchor="ctr"/>
           <a:lstStyle/>
           <a:p>
-            <a:pPr indent="0" marL="0">
+            <a:pPr marL="0" indent="0">
               <a:buNone/>
             </a:pPr>
             <a:r>
@@ -2553,9 +2384,6 @@
               </a:rPr>
               <a:t>Shreeviraj Matale</a:t>
             </a:r>
-            <a:pPr indent="0" marL="0">
-              <a:buNone/>
-            </a:pPr>
             <a:r>
               <a:rPr lang="en-US" sz="1200" dirty="0">
                 <a:solidFill>
@@ -2573,7 +2401,7 @@
       </p:sp>
       <p:sp>
         <p:nvSpPr>
-          <p:cNvPr id="30" name="Text 28"/>
+          <p:cNvPr id="31" name="Text 29"/>
           <p:cNvSpPr txBox="1"/>
           <p:nvPr/>
         </p:nvSpPr>
@@ -2592,7 +2420,7 @@
           <a:bodyPr wrap="square" lIns="0" tIns="0" rIns="0" bIns="0" rtlCol="0" anchor="ctr"/>
           <a:lstStyle/>
           <a:p>
-            <a:pPr indent="0" marL="0">
+            <a:pPr marL="0" indent="0">
               <a:buNone/>
             </a:pPr>
             <a:r>
@@ -2606,9 +2434,6 @@
               </a:rPr>
               <a:t>Satyam Srivastava</a:t>
             </a:r>
-            <a:pPr indent="0" marL="0">
-              <a:buNone/>
-            </a:pPr>
             <a:r>
               <a:rPr lang="en-US" sz="1200" dirty="0">
                 <a:solidFill>
@@ -2670,11 +2495,11 @@
           <a:bodyPr wrap="square" lIns="0" tIns="0" rIns="0" bIns="0" rtlCol="0" anchor="ctr"/>
           <a:lstStyle/>
           <a:p>
-            <a:pPr algn="l" indent="0" marL="0">
-              <a:buNone/>
-            </a:pPr>
-            <a:r>
-              <a:rPr lang="en-US" sz="1050" b="1" spc="220" kern="0" dirty="0">
+            <a:pPr marL="0" indent="0" algn="l">
+              <a:buNone/>
+            </a:pPr>
+            <a:r>
+              <a:rPr lang="en-US" sz="1050" b="1" kern="0" spc="220" dirty="0">
                 <a:solidFill>
                   <a:srgbClr val="6E8194"/>
                 </a:solidFill>
@@ -2709,7 +2534,7 @@
           <a:bodyPr wrap="square" lIns="0" tIns="0" rIns="0" bIns="0" rtlCol="0" anchor="ctr"/>
           <a:lstStyle/>
           <a:p>
-            <a:pPr algn="l" indent="0" marL="0">
+            <a:pPr marL="0" indent="0" algn="l">
               <a:buNone/>
             </a:pPr>
             <a:r>
@@ -2773,7 +2598,7 @@
           <a:bodyPr wrap="square" lIns="0" tIns="0" rIns="0" bIns="0" rtlCol="0" anchor="ctr"/>
           <a:lstStyle/>
           <a:p>
-            <a:pPr algn="ctr" indent="0" marL="0">
+            <a:pPr marL="0" indent="0" algn="ctr">
               <a:buNone/>
             </a:pPr>
             <a:r>
@@ -2812,7 +2637,7 @@
           <a:bodyPr wrap="square" lIns="0" tIns="0" rIns="0" bIns="0" rtlCol="0" anchor="ctr"/>
           <a:lstStyle/>
           <a:p>
-            <a:pPr indent="0" marL="0">
+            <a:pPr marL="0" indent="0">
               <a:buNone/>
             </a:pPr>
             <a:r>
@@ -2851,7 +2676,7 @@
           <a:bodyPr wrap="square" lIns="0" tIns="0" rIns="0" bIns="0" rtlCol="0" anchor="ctr"/>
           <a:lstStyle/>
           <a:p>
-            <a:pPr indent="0" marL="0">
+            <a:pPr marL="0" indent="0">
               <a:buNone/>
             </a:pPr>
             <a:r>
@@ -2938,7 +2763,7 @@
           <a:bodyPr wrap="square" lIns="0" tIns="0" rIns="0" bIns="0" rtlCol="0" anchor="ctr"/>
           <a:lstStyle/>
           <a:p>
-            <a:pPr algn="ctr" indent="0" marL="0">
+            <a:pPr marL="0" indent="0" algn="ctr">
               <a:buNone/>
             </a:pPr>
             <a:r>
@@ -2977,7 +2802,7 @@
           <a:bodyPr wrap="square" lIns="0" tIns="0" rIns="0" bIns="0" rtlCol="0" anchor="ctr"/>
           <a:lstStyle/>
           <a:p>
-            <a:pPr indent="0" marL="0">
+            <a:pPr marL="0" indent="0">
               <a:buNone/>
             </a:pPr>
             <a:r>
@@ -3016,7 +2841,7 @@
           <a:bodyPr wrap="square" lIns="0" tIns="0" rIns="0" bIns="0" rtlCol="0" anchor="ctr"/>
           <a:lstStyle/>
           <a:p>
-            <a:pPr indent="0" marL="0">
+            <a:pPr marL="0" indent="0">
               <a:buNone/>
             </a:pPr>
             <a:r>
@@ -3103,7 +2928,7 @@
           <a:bodyPr wrap="square" lIns="0" tIns="0" rIns="0" bIns="0" rtlCol="0" anchor="ctr"/>
           <a:lstStyle/>
           <a:p>
-            <a:pPr algn="ctr" indent="0" marL="0">
+            <a:pPr marL="0" indent="0" algn="ctr">
               <a:buNone/>
             </a:pPr>
             <a:r>
@@ -3142,7 +2967,7 @@
           <a:bodyPr wrap="square" lIns="0" tIns="0" rIns="0" bIns="0" rtlCol="0" anchor="ctr"/>
           <a:lstStyle/>
           <a:p>
-            <a:pPr indent="0" marL="0">
+            <a:pPr marL="0" indent="0">
               <a:buNone/>
             </a:pPr>
             <a:r>
@@ -3181,7 +3006,7 @@
           <a:bodyPr wrap="square" lIns="0" tIns="0" rIns="0" bIns="0" rtlCol="0" anchor="ctr"/>
           <a:lstStyle/>
           <a:p>
-            <a:pPr indent="0" marL="0">
+            <a:pPr marL="0" indent="0">
               <a:buNone/>
             </a:pPr>
             <a:r>
@@ -3268,7 +3093,7 @@
           <a:bodyPr wrap="square" lIns="0" tIns="0" rIns="0" bIns="0" rtlCol="0" anchor="ctr"/>
           <a:lstStyle/>
           <a:p>
-            <a:pPr algn="ctr" indent="0" marL="0">
+            <a:pPr marL="0" indent="0" algn="ctr">
               <a:buNone/>
             </a:pPr>
             <a:r>
@@ -3307,7 +3132,7 @@
           <a:bodyPr wrap="square" lIns="0" tIns="0" rIns="0" bIns="0" rtlCol="0" anchor="ctr"/>
           <a:lstStyle/>
           <a:p>
-            <a:pPr indent="0" marL="0">
+            <a:pPr marL="0" indent="0">
               <a:buNone/>
             </a:pPr>
             <a:r>
@@ -3346,7 +3171,7 @@
           <a:bodyPr wrap="square" lIns="0" tIns="0" rIns="0" bIns="0" rtlCol="0" anchor="ctr"/>
           <a:lstStyle/>
           <a:p>
-            <a:pPr indent="0" marL="0">
+            <a:pPr marL="0" indent="0">
               <a:buNone/>
             </a:pPr>
             <a:r>
@@ -3433,7 +3258,7 @@
           <a:bodyPr wrap="square" lIns="0" tIns="0" rIns="0" bIns="0" rtlCol="0" anchor="ctr"/>
           <a:lstStyle/>
           <a:p>
-            <a:pPr algn="ctr" indent="0" marL="0">
+            <a:pPr marL="0" indent="0" algn="ctr">
               <a:buNone/>
             </a:pPr>
             <a:r>
@@ -3472,7 +3297,7 @@
           <a:bodyPr wrap="square" lIns="0" tIns="0" rIns="0" bIns="0" rtlCol="0" anchor="ctr"/>
           <a:lstStyle/>
           <a:p>
-            <a:pPr indent="0" marL="0">
+            <a:pPr marL="0" indent="0">
               <a:buNone/>
             </a:pPr>
             <a:r>
@@ -3511,7 +3336,7 @@
           <a:bodyPr wrap="square" lIns="0" tIns="0" rIns="0" bIns="0" rtlCol="0" anchor="ctr"/>
           <a:lstStyle/>
           <a:p>
-            <a:pPr indent="0" marL="0">
+            <a:pPr marL="0" indent="0">
               <a:buNone/>
             </a:pPr>
             <a:r>
@@ -3598,7 +3423,7 @@
           <a:bodyPr wrap="square" lIns="0" tIns="0" rIns="0" bIns="0" rtlCol="0" anchor="ctr"/>
           <a:lstStyle/>
           <a:p>
-            <a:pPr algn="ctr" indent="0" marL="0">
+            <a:pPr marL="0" indent="0" algn="ctr">
               <a:buNone/>
             </a:pPr>
             <a:r>
@@ -3637,7 +3462,7 @@
           <a:bodyPr wrap="square" lIns="0" tIns="0" rIns="0" bIns="0" rtlCol="0" anchor="ctr"/>
           <a:lstStyle/>
           <a:p>
-            <a:pPr indent="0" marL="0">
+            <a:pPr marL="0" indent="0">
               <a:buNone/>
             </a:pPr>
             <a:r>
@@ -3676,7 +3501,7 @@
           <a:bodyPr wrap="square" lIns="0" tIns="0" rIns="0" bIns="0" rtlCol="0" anchor="ctr"/>
           <a:lstStyle/>
           <a:p>
-            <a:pPr indent="0" marL="0">
+            <a:pPr marL="0" indent="0">
               <a:buNone/>
             </a:pPr>
             <a:r>
@@ -3738,7 +3563,7 @@
           <a:bodyPr wrap="square" lIns="0" tIns="0" rIns="0" bIns="0" rtlCol="0" anchor="ctr"/>
           <a:lstStyle/>
           <a:p>
-            <a:pPr indent="0" marL="0">
+            <a:pPr marL="0" indent="0">
               <a:buNone/>
             </a:pPr>
             <a:r>
@@ -3752,9 +3577,6 @@
               </a:rPr>
               <a:t>Pilot deployment:  </a:t>
             </a:r>
-            <a:pPr indent="0" marL="0">
-              <a:buNone/>
-            </a:pPr>
             <a:r>
               <a:rPr lang="en-US" sz="1200" dirty="0">
                 <a:solidFill>
@@ -3766,9 +3588,6 @@
               </a:rPr>
               <a:t>Pune Municipal Corporation   ·   </a:t>
             </a:r>
-            <a:pPr indent="0" marL="0">
-              <a:buNone/>
-            </a:pPr>
             <a:r>
               <a:rPr lang="en-US" sz="1200" b="1" dirty="0">
                 <a:solidFill>
@@ -3780,9 +3599,6 @@
               </a:rPr>
               <a:t>Hazards live at launch:  </a:t>
             </a:r>
-            <a:pPr indent="0" marL="0">
-              <a:buNone/>
-            </a:pPr>
             <a:r>
               <a:rPr lang="en-US" sz="1200" dirty="0">
                 <a:solidFill>
@@ -3844,11 +3660,11 @@
           <a:bodyPr wrap="square" lIns="0" tIns="0" rIns="0" bIns="0" rtlCol="0" anchor="ctr"/>
           <a:lstStyle/>
           <a:p>
-            <a:pPr algn="l" indent="0" marL="0">
-              <a:buNone/>
-            </a:pPr>
-            <a:r>
-              <a:rPr lang="en-US" sz="1050" b="1" spc="220" kern="0" dirty="0">
+            <a:pPr marL="0" indent="0" algn="l">
+              <a:buNone/>
+            </a:pPr>
+            <a:r>
+              <a:rPr lang="en-US" sz="1050" b="1" kern="0" spc="220" dirty="0">
                 <a:solidFill>
                   <a:srgbClr val="6E8194"/>
                 </a:solidFill>
@@ -3883,7 +3699,7 @@
           <a:bodyPr wrap="square" lIns="0" tIns="0" rIns="0" bIns="0" rtlCol="0" anchor="ctr"/>
           <a:lstStyle/>
           <a:p>
-            <a:pPr algn="l" indent="0" marL="0">
+            <a:pPr marL="0" indent="0" algn="l">
               <a:buNone/>
             </a:pPr>
             <a:r>
@@ -3922,7 +3738,7 @@
           <a:bodyPr wrap="square" lIns="0" tIns="0" rIns="0" bIns="0" rtlCol="0" anchor="ctr"/>
           <a:lstStyle/>
           <a:p>
-            <a:pPr indent="0" marL="0">
+            <a:pPr marL="0" indent="0">
               <a:lnSpc>
                 <a:spcPts val="3000"/>
               </a:lnSpc>
@@ -3942,7 +3758,7 @@
             <a:endParaRPr lang="en-US" sz="2100" dirty="0"/>
           </a:p>
           <a:p>
-            <a:pPr indent="0" marL="0">
+            <a:pPr marL="0" indent="0">
               <a:lnSpc>
                 <a:spcPts val="3000"/>
               </a:lnSpc>
@@ -3972,19 +3788,19 @@
         <p:spPr>
           <a:xfrm>
             <a:off x="640080" y="2670048"/>
-            <a:ext cx="5029200" cy="1371600"/>
-          </a:xfrm>
-          <a:prstGeom prst="rect">
-            <a:avLst/>
-          </a:prstGeom>
-          <a:noFill/>
-          <a:ln/>
-        </p:spPr>
-        <p:txBody>
-          <a:bodyPr wrap="square" lIns="0" tIns="0" rIns="0" bIns="0" rtlCol="0" anchor="ctr"/>
-          <a:lstStyle/>
-          <a:p>
-            <a:pPr indent="0" marL="0">
+            <a:ext cx="5029200" cy="896112"/>
+          </a:xfrm>
+          <a:prstGeom prst="rect">
+            <a:avLst/>
+          </a:prstGeom>
+          <a:noFill/>
+          <a:ln/>
+        </p:spPr>
+        <p:txBody>
+          <a:bodyPr wrap="square" lIns="0" tIns="0" rIns="0" bIns="0" rtlCol="0" anchor="ctr"/>
+          <a:lstStyle/>
+          <a:p>
+            <a:pPr marL="0" indent="0">
               <a:lnSpc>
                 <a:spcPts val="2100"/>
               </a:lnSpc>
@@ -3999,7 +3815,29 @@
                 <a:ea typeface="Calibri" pitchFamily="34" charset="-122"/>
                 <a:cs typeface="Calibri" pitchFamily="34" charset="-120"/>
               </a:rPr>
-              <a:t>IMD, CWC, CPCB and NDMA already publish credible hazard data. What is missing is the operational layer between a district-level forecast and the two decisions that actually save lives: what the administration should do in the next six hours, and what a specific household on a specific street should do right now.</a:t>
+              <a:t>At 18:00 on 25 July 2024, Khadakwasla released </a:t>
+            </a:r>
+            <a:r>
+              <a:rPr lang="en-US" sz="1350" b="1" dirty="0">
+                <a:solidFill>
+                  <a:srgbClr val="B23A24"/>
+                </a:solidFill>
+                <a:latin typeface="Calibri" pitchFamily="34" charset="0"/>
+                <a:ea typeface="Calibri" pitchFamily="34" charset="-122"/>
+                <a:cs typeface="Calibri" pitchFamily="34" charset="-120"/>
+              </a:rPr>
+              <a:t>45,000 cusecs</a:t>
+            </a:r>
+            <a:r>
+              <a:rPr lang="en-US" sz="1350" dirty="0">
+                <a:solidFill>
+                  <a:srgbClr val="3D5468"/>
+                </a:solidFill>
+                <a:latin typeface="Calibri" pitchFamily="34" charset="0"/>
+                <a:ea typeface="Calibri" pitchFamily="34" charset="-122"/>
+                <a:cs typeface="Calibri" pitchFamily="34" charset="-120"/>
+              </a:rPr>
+              <a:t> into a city that had already taken 118 mm of rain. The rainfall was forecast. The discharge was planned. Neither of them told a family on Sinhagad Road whether to leave.</a:t>
             </a:r>
             <a:endParaRPr lang="en-US" sz="1350" dirty="0"/>
           </a:p>
@@ -4013,8 +3851,8 @@
         </p:nvSpPr>
         <p:spPr>
           <a:xfrm>
-            <a:off x="640080" y="4224528"/>
-            <a:ext cx="5029200" cy="1481328"/>
+            <a:off x="640080" y="3675888"/>
+            <a:ext cx="5029200" cy="896112"/>
           </a:xfrm>
           <a:prstGeom prst="rect">
             <a:avLst/>
@@ -4038,63 +3876,169 @@
         </p:nvSpPr>
         <p:spPr>
           <a:xfrm>
-            <a:off x="932688" y="4389120"/>
-            <a:ext cx="2103120" cy="603504"/>
-          </a:xfrm>
-          <a:prstGeom prst="rect">
-            <a:avLst/>
-          </a:prstGeom>
-          <a:noFill/>
-          <a:ln/>
-        </p:spPr>
-        <p:txBody>
-          <a:bodyPr wrap="square" lIns="0" tIns="0" rIns="0" bIns="0" rtlCol="0" anchor="ctr"/>
-          <a:lstStyle/>
-          <a:p>
-            <a:pPr indent="0" marL="0">
-              <a:buNone/>
-            </a:pPr>
-            <a:r>
-              <a:rPr lang="en-US" sz="4200" b="1" dirty="0">
+            <a:off x="877824" y="3822192"/>
+            <a:ext cx="4572000" cy="201168"/>
+          </a:xfrm>
+          <a:prstGeom prst="rect">
+            <a:avLst/>
+          </a:prstGeom>
+          <a:noFill/>
+          <a:ln/>
+        </p:spPr>
+        <p:txBody>
+          <a:bodyPr wrap="square" lIns="0" tIns="0" rIns="0" bIns="0" rtlCol="0" anchor="ctr"/>
+          <a:lstStyle/>
+          <a:p>
+            <a:pPr marL="0" indent="0">
+              <a:buNone/>
+            </a:pPr>
+            <a:r>
+              <a:rPr lang="en-US" sz="900" b="1" kern="0" spc="140" dirty="0">
+                <a:solidFill>
+                  <a:srgbClr val="6E8194"/>
+                </a:solidFill>
+                <a:latin typeface="Calibri" pitchFamily="34" charset="0"/>
+                <a:ea typeface="Calibri" pitchFamily="34" charset="-122"/>
+                <a:cs typeface="Calibri" pitchFamily="34" charset="-120"/>
+              </a:rPr>
+              <a:t>WHAT A RESIDENT GETS TODAY</a:t>
+            </a:r>
+            <a:endParaRPr lang="en-US" sz="900" dirty="0"/>
+          </a:p>
+        </p:txBody>
+      </p:sp>
+      <p:sp>
+        <p:nvSpPr>
+          <p:cNvPr id="8" name="Text 6"/>
+          <p:cNvSpPr txBox="1"/>
+          <p:nvPr/>
+        </p:nvSpPr>
+        <p:spPr>
+          <a:xfrm>
+            <a:off x="877824" y="4041648"/>
+            <a:ext cx="4572000" cy="438912"/>
+          </a:xfrm>
+          <a:prstGeom prst="rect">
+            <a:avLst/>
+          </a:prstGeom>
+          <a:noFill/>
+          <a:ln/>
+        </p:spPr>
+        <p:txBody>
+          <a:bodyPr wrap="square" lIns="0" tIns="0" rIns="0" bIns="0" rtlCol="0" anchor="ctr"/>
+          <a:lstStyle/>
+          <a:p>
+            <a:pPr marL="0" indent="0">
+              <a:lnSpc>
+                <a:spcPts val="1700"/>
+              </a:lnSpc>
+              <a:buNone/>
+            </a:pPr>
+            <a:r>
+              <a:rPr lang="en-US" sz="1250" dirty="0">
+                <a:solidFill>
+                  <a:srgbClr val="11253C"/>
+                </a:solidFill>
+                <a:latin typeface="Calibri" pitchFamily="34" charset="0"/>
+                <a:ea typeface="Calibri" pitchFamily="34" charset="-122"/>
+                <a:cs typeface="Calibri" pitchFamily="34" charset="-120"/>
+              </a:rPr>
+              <a:t>“Heavy rainfall warning for Pune district. Citizens are advised to take precautions.”</a:t>
+            </a:r>
+            <a:endParaRPr lang="en-US" sz="1250" dirty="0"/>
+          </a:p>
+        </p:txBody>
+      </p:sp>
+      <p:sp>
+        <p:nvSpPr>
+          <p:cNvPr id="9" name="Shape 7"/>
+          <p:cNvSpPr/>
+          <p:nvPr/>
+        </p:nvSpPr>
+        <p:spPr>
+          <a:xfrm>
+            <a:off x="640080" y="4718304"/>
+            <a:ext cx="5029200" cy="1682496"/>
+          </a:xfrm>
+          <a:prstGeom prst="rect">
+            <a:avLst/>
+          </a:prstGeom>
+          <a:solidFill>
+            <a:srgbClr val="FFFFFF"/>
+          </a:solidFill>
+          <a:ln w="19050">
+            <a:solidFill>
+              <a:srgbClr val="B23A24"/>
+            </a:solidFill>
+            <a:prstDash val="solid"/>
+          </a:ln>
+        </p:spPr>
+      </p:sp>
+      <p:sp>
+        <p:nvSpPr>
+          <p:cNvPr id="10" name="Text 8"/>
+          <p:cNvSpPr txBox="1"/>
+          <p:nvPr/>
+        </p:nvSpPr>
+        <p:spPr>
+          <a:xfrm>
+            <a:off x="877824" y="4864608"/>
+            <a:ext cx="4572000" cy="201168"/>
+          </a:xfrm>
+          <a:prstGeom prst="rect">
+            <a:avLst/>
+          </a:prstGeom>
+          <a:noFill/>
+          <a:ln/>
+        </p:spPr>
+        <p:txBody>
+          <a:bodyPr wrap="square" lIns="0" tIns="0" rIns="0" bIns="0" rtlCol="0" anchor="ctr"/>
+          <a:lstStyle/>
+          <a:p>
+            <a:pPr marL="0" indent="0">
+              <a:buNone/>
+            </a:pPr>
+            <a:r>
+              <a:rPr lang="en-US" sz="900" b="1" kern="0" spc="140" dirty="0">
                 <a:solidFill>
                   <a:srgbClr val="B23A24"/>
                 </a:solidFill>
-                <a:latin typeface="Cambria" pitchFamily="34" charset="0"/>
-                <a:ea typeface="Cambria" pitchFamily="34" charset="-122"/>
-                <a:cs typeface="Cambria" pitchFamily="34" charset="-120"/>
-              </a:rPr>
-              <a:t>45,000</a:t>
-            </a:r>
-            <a:endParaRPr lang="en-US" sz="4200" dirty="0"/>
-          </a:p>
-        </p:txBody>
-      </p:sp>
-      <p:sp>
-        <p:nvSpPr>
-          <p:cNvPr id="8" name="Text 6"/>
-          <p:cNvSpPr txBox="1"/>
-          <p:nvPr/>
-        </p:nvSpPr>
-        <p:spPr>
-          <a:xfrm>
-            <a:off x="932688" y="4992624"/>
-            <a:ext cx="4480560" cy="274320"/>
-          </a:xfrm>
-          <a:prstGeom prst="rect">
-            <a:avLst/>
-          </a:prstGeom>
-          <a:noFill/>
-          <a:ln/>
-        </p:spPr>
-        <p:txBody>
-          <a:bodyPr wrap="square" lIns="0" tIns="0" rIns="0" bIns="0" rtlCol="0" anchor="ctr"/>
-          <a:lstStyle/>
-          <a:p>
-            <a:pPr indent="0" marL="0">
-              <a:buNone/>
-            </a:pPr>
-            <a:r>
-              <a:rPr lang="en-US" sz="1200" b="1" dirty="0">
+                <a:latin typeface="Calibri" pitchFamily="34" charset="0"/>
+                <a:ea typeface="Calibri" pitchFamily="34" charset="-122"/>
+                <a:cs typeface="Calibri" pitchFamily="34" charset="-120"/>
+              </a:rPr>
+              <a:t>WHAT INDRADHANU SENDS</a:t>
+            </a:r>
+            <a:endParaRPr lang="en-US" sz="900" dirty="0"/>
+          </a:p>
+        </p:txBody>
+      </p:sp>
+      <p:sp>
+        <p:nvSpPr>
+          <p:cNvPr id="11" name="Text 9"/>
+          <p:cNvSpPr txBox="1"/>
+          <p:nvPr/>
+        </p:nvSpPr>
+        <p:spPr>
+          <a:xfrm>
+            <a:off x="877824" y="5084064"/>
+            <a:ext cx="4572000" cy="237744"/>
+          </a:xfrm>
+          <a:prstGeom prst="rect">
+            <a:avLst/>
+          </a:prstGeom>
+          <a:noFill/>
+          <a:ln/>
+        </p:spPr>
+        <p:txBody>
+          <a:bodyPr wrap="square" lIns="0" tIns="0" rIns="0" bIns="0" rtlCol="0" anchor="ctr"/>
+          <a:lstStyle/>
+          <a:p>
+            <a:pPr marL="0" indent="0">
+              <a:buNone/>
+            </a:pPr>
+            <a:r>
+              <a:rPr lang="en-US" sz="1400" b="1" dirty="0">
                 <a:solidFill>
                   <a:srgbClr val="11253C"/>
                 </a:solidFill>
@@ -4102,37 +4046,34 @@
                 <a:ea typeface="Calibri" pitchFamily="34" charset="-122"/>
                 <a:cs typeface="Calibri" pitchFamily="34" charset="-120"/>
               </a:rPr>
-              <a:t>cusecs released from Khadakwasla, 25 July 2024</a:t>
-            </a:r>
-            <a:endParaRPr lang="en-US" sz="1200" dirty="0"/>
-          </a:p>
-        </p:txBody>
-      </p:sp>
-      <p:sp>
-        <p:nvSpPr>
-          <p:cNvPr id="9" name="Text 7"/>
-          <p:cNvSpPr txBox="1"/>
-          <p:nvPr/>
-        </p:nvSpPr>
-        <p:spPr>
-          <a:xfrm>
-            <a:off x="932688" y="5248656"/>
-            <a:ext cx="4480560" cy="384048"/>
-          </a:xfrm>
-          <a:prstGeom prst="rect">
-            <a:avLst/>
-          </a:prstGeom>
-          <a:noFill/>
-          <a:ln/>
-        </p:spPr>
-        <p:txBody>
-          <a:bodyPr wrap="square" lIns="0" tIns="0" rIns="0" bIns="0" rtlCol="0" anchor="ctr"/>
-          <a:lstStyle/>
-          <a:p>
-            <a:pPr indent="0" marL="0">
-              <a:lnSpc>
-                <a:spcPts val="1500"/>
-              </a:lnSpc>
+              <a:t>Ward 15, Vitthalwadi — HIGH RISK</a:t>
+            </a:r>
+            <a:endParaRPr lang="en-US" sz="1400" dirty="0"/>
+          </a:p>
+        </p:txBody>
+      </p:sp>
+      <p:sp>
+        <p:nvSpPr>
+          <p:cNvPr id="12" name="Text 10"/>
+          <p:cNvSpPr txBox="1"/>
+          <p:nvPr/>
+        </p:nvSpPr>
+        <p:spPr>
+          <a:xfrm>
+            <a:off x="877824" y="5321808"/>
+            <a:ext cx="4572000" cy="201168"/>
+          </a:xfrm>
+          <a:prstGeom prst="rect">
+            <a:avLst/>
+          </a:prstGeom>
+          <a:noFill/>
+          <a:ln/>
+        </p:spPr>
+        <p:txBody>
+          <a:bodyPr wrap="square" lIns="0" tIns="0" rIns="0" bIns="0" rtlCol="0" anchor="ctr"/>
+          <a:lstStyle/>
+          <a:p>
+            <a:pPr marL="0" indent="0">
               <a:buNone/>
             </a:pPr>
             <a:r>
@@ -4144,7 +4085,18 @@
                 <a:ea typeface="Calibri" pitchFamily="34" charset="-122"/>
                 <a:cs typeface="Calibri" pitchFamily="34" charset="-120"/>
               </a:rPr>
-              <a:t>The Army was requisitioned in Pune. Residents of the affected low-lying areas described it as “the same situation every year.”</a:t>
+              <a:t>Flood probability   </a:t>
+            </a:r>
+            <a:r>
+              <a:rPr lang="en-US" sz="1150" b="1" dirty="0">
+                <a:solidFill>
+                  <a:srgbClr val="11253C"/>
+                </a:solidFill>
+                <a:latin typeface="Calibri" pitchFamily="34" charset="0"/>
+                <a:ea typeface="Calibri" pitchFamily="34" charset="-122"/>
+                <a:cs typeface="Calibri" pitchFamily="34" charset="-120"/>
+              </a:rPr>
+              <a:t>86% within 1 h 12 min</a:t>
             </a:r>
             <a:endParaRPr lang="en-US" sz="1150" dirty="0"/>
           </a:p>
@@ -4152,7 +4104,196 @@
       </p:sp>
       <p:sp>
         <p:nvSpPr>
-          <p:cNvPr id="10" name="Text 8"/>
+          <p:cNvPr id="13" name="Text 11"/>
+          <p:cNvSpPr txBox="1"/>
+          <p:nvPr/>
+        </p:nvSpPr>
+        <p:spPr>
+          <a:xfrm>
+            <a:off x="877824" y="5532120"/>
+            <a:ext cx="4572000" cy="201168"/>
+          </a:xfrm>
+          <a:prstGeom prst="rect">
+            <a:avLst/>
+          </a:prstGeom>
+          <a:noFill/>
+          <a:ln/>
+        </p:spPr>
+        <p:txBody>
+          <a:bodyPr wrap="square" lIns="0" tIns="0" rIns="0" bIns="0" rtlCol="0" anchor="ctr"/>
+          <a:lstStyle/>
+          <a:p>
+            <a:pPr marL="0" indent="0">
+              <a:buNone/>
+            </a:pPr>
+            <a:r>
+              <a:rPr lang="en-US" sz="1150" dirty="0">
+                <a:solidFill>
+                  <a:srgbClr val="6E8194"/>
+                </a:solidFill>
+                <a:latin typeface="Calibri" pitchFamily="34" charset="0"/>
+                <a:ea typeface="Calibri" pitchFamily="34" charset="-122"/>
+                <a:cs typeface="Calibri" pitchFamily="34" charset="-120"/>
+              </a:rPr>
+              <a:t>Avoid   </a:t>
+            </a:r>
+            <a:r>
+              <a:rPr lang="en-US" sz="1150" b="1" dirty="0">
+                <a:solidFill>
+                  <a:srgbClr val="11253C"/>
+                </a:solidFill>
+                <a:latin typeface="Calibri" pitchFamily="34" charset="0"/>
+                <a:ea typeface="Calibri" pitchFamily="34" charset="-122"/>
+                <a:cs typeface="Calibri" pitchFamily="34" charset="-120"/>
+              </a:rPr>
+              <a:t>Vitthalwadi underpass — impassable</a:t>
+            </a:r>
+            <a:endParaRPr lang="en-US" sz="1150" dirty="0"/>
+          </a:p>
+        </p:txBody>
+      </p:sp>
+      <p:sp>
+        <p:nvSpPr>
+          <p:cNvPr id="14" name="Text 12"/>
+          <p:cNvSpPr txBox="1"/>
+          <p:nvPr/>
+        </p:nvSpPr>
+        <p:spPr>
+          <a:xfrm>
+            <a:off x="877824" y="5742432"/>
+            <a:ext cx="4572000" cy="201168"/>
+          </a:xfrm>
+          <a:prstGeom prst="rect">
+            <a:avLst/>
+          </a:prstGeom>
+          <a:noFill/>
+          <a:ln/>
+        </p:spPr>
+        <p:txBody>
+          <a:bodyPr wrap="square" lIns="0" tIns="0" rIns="0" bIns="0" rtlCol="0" anchor="ctr"/>
+          <a:lstStyle/>
+          <a:p>
+            <a:pPr marL="0" indent="0">
+              <a:buNone/>
+            </a:pPr>
+            <a:r>
+              <a:rPr lang="en-US" sz="1150" dirty="0">
+                <a:solidFill>
+                  <a:srgbClr val="6E8194"/>
+                </a:solidFill>
+                <a:latin typeface="Calibri" pitchFamily="34" charset="0"/>
+                <a:ea typeface="Calibri" pitchFamily="34" charset="-122"/>
+                <a:cs typeface="Calibri" pitchFamily="34" charset="-120"/>
+              </a:rPr>
+              <a:t>Go to   </a:t>
+            </a:r>
+            <a:r>
+              <a:rPr lang="en-US" sz="1150" b="1" dirty="0">
+                <a:solidFill>
+                  <a:srgbClr val="11253C"/>
+                </a:solidFill>
+                <a:latin typeface="Calibri" pitchFamily="34" charset="0"/>
+                <a:ea typeface="Calibri" pitchFamily="34" charset="-122"/>
+                <a:cs typeface="Calibri" pitchFamily="34" charset="-120"/>
+              </a:rPr>
+              <a:t>Sinhagad Road Municipal Hall, 1.4 km</a:t>
+            </a:r>
+            <a:endParaRPr lang="en-US" sz="1150" dirty="0"/>
+          </a:p>
+        </p:txBody>
+      </p:sp>
+      <p:sp>
+        <p:nvSpPr>
+          <p:cNvPr id="15" name="Text 13"/>
+          <p:cNvSpPr txBox="1"/>
+          <p:nvPr/>
+        </p:nvSpPr>
+        <p:spPr>
+          <a:xfrm>
+            <a:off x="877824" y="5952744"/>
+            <a:ext cx="4572000" cy="201168"/>
+          </a:xfrm>
+          <a:prstGeom prst="rect">
+            <a:avLst/>
+          </a:prstGeom>
+          <a:noFill/>
+          <a:ln/>
+        </p:spPr>
+        <p:txBody>
+          <a:bodyPr wrap="square" lIns="0" tIns="0" rIns="0" bIns="0" rtlCol="0" anchor="ctr"/>
+          <a:lstStyle/>
+          <a:p>
+            <a:pPr marL="0" indent="0">
+              <a:buNone/>
+            </a:pPr>
+            <a:r>
+              <a:rPr lang="en-US" sz="1150" dirty="0">
+                <a:solidFill>
+                  <a:srgbClr val="6E8194"/>
+                </a:solidFill>
+                <a:latin typeface="Calibri" pitchFamily="34" charset="0"/>
+                <a:ea typeface="Calibri" pitchFamily="34" charset="-122"/>
+                <a:cs typeface="Calibri" pitchFamily="34" charset="-120"/>
+              </a:rPr>
+              <a:t>Leave before   </a:t>
+            </a:r>
+            <a:r>
+              <a:rPr lang="en-US" sz="1150" b="1" dirty="0">
+                <a:solidFill>
+                  <a:srgbClr val="11253C"/>
+                </a:solidFill>
+                <a:latin typeface="Calibri" pitchFamily="34" charset="0"/>
+                <a:ea typeface="Calibri" pitchFamily="34" charset="-122"/>
+                <a:cs typeface="Calibri" pitchFamily="34" charset="-120"/>
+              </a:rPr>
+              <a:t>19:20</a:t>
+            </a:r>
+            <a:endParaRPr lang="en-US" sz="1150" dirty="0"/>
+          </a:p>
+        </p:txBody>
+      </p:sp>
+      <p:sp>
+        <p:nvSpPr>
+          <p:cNvPr id="16" name="Text 14"/>
+          <p:cNvSpPr txBox="1"/>
+          <p:nvPr/>
+        </p:nvSpPr>
+        <p:spPr>
+          <a:xfrm>
+            <a:off x="877824" y="6163056"/>
+            <a:ext cx="4572000" cy="201168"/>
+          </a:xfrm>
+          <a:prstGeom prst="rect">
+            <a:avLst/>
+          </a:prstGeom>
+          <a:noFill/>
+          <a:ln/>
+        </p:spPr>
+        <p:txBody>
+          <a:bodyPr wrap="square" lIns="0" tIns="0" rIns="0" bIns="0" rtlCol="0" anchor="ctr"/>
+          <a:lstStyle/>
+          <a:p>
+            <a:pPr marL="0" indent="0">
+              <a:buNone/>
+            </a:pPr>
+            <a:r>
+              <a:rPr lang="en-US" sz="1000" dirty="0">
+                <a:solidFill>
+                  <a:srgbClr val="6E8194"/>
+                </a:solidFill>
+                <a:latin typeface="Calibri" pitchFamily="34" charset="0"/>
+                <a:ea typeface="Calibri" pitchFamily="34" charset="-122"/>
+                <a:cs typeface="Calibri" pitchFamily="34" charset="-120"/>
+              </a:rPr>
+              <a:t>Marathi · Hindi · English, with voice</a:t>
+            </a:r>
+            <a:endParaRPr lang="en-US" sz="1000" dirty="0"/>
+          </a:p>
+        </p:txBody>
+      </p:sp>
+      <p:sp>
+        <p:nvSpPr>
+          <p:cNvPr id="17" name="Text 15"/>
           <p:cNvSpPr txBox="1"/>
           <p:nvPr/>
         </p:nvSpPr>
@@ -4171,11 +4312,11 @@
           <a:bodyPr wrap="square" lIns="0" tIns="0" rIns="0" bIns="0" rtlCol="0" anchor="ctr"/>
           <a:lstStyle/>
           <a:p>
-            <a:pPr indent="0" marL="0">
-              <a:buNone/>
-            </a:pPr>
-            <a:r>
-              <a:rPr lang="en-US" sz="1000" b="1" spc="160" kern="0" dirty="0">
+            <a:pPr marL="0" indent="0">
+              <a:buNone/>
+            </a:pPr>
+            <a:r>
+              <a:rPr lang="en-US" sz="1000" b="1" kern="0" spc="160" dirty="0">
                 <a:solidFill>
                   <a:srgbClr val="6E8194"/>
                 </a:solidFill>
@@ -4191,7 +4332,7 @@
       </p:sp>
       <p:sp>
         <p:nvSpPr>
-          <p:cNvPr id="11" name="Shape 9"/>
+          <p:cNvPr id="18" name="Shape 16"/>
           <p:cNvSpPr/>
           <p:nvPr/>
         </p:nvSpPr>
@@ -4216,7 +4357,7 @@
       </p:sp>
       <p:sp>
         <p:nvSpPr>
-          <p:cNvPr id="12" name="Text 10"/>
+          <p:cNvPr id="19" name="Text 17"/>
           <p:cNvSpPr txBox="1"/>
           <p:nvPr/>
         </p:nvSpPr>
@@ -4235,7 +4376,7 @@
           <a:bodyPr wrap="square" lIns="0" tIns="0" rIns="0" bIns="0" rtlCol="0" anchor="ctr"/>
           <a:lstStyle/>
           <a:p>
-            <a:pPr indent="0" marL="0">
+            <a:pPr marL="0" indent="0">
               <a:buNone/>
             </a:pPr>
             <a:r>
@@ -4255,7 +4396,7 @@
       </p:sp>
       <p:sp>
         <p:nvSpPr>
-          <p:cNvPr id="13" name="Text 11"/>
+          <p:cNvPr id="20" name="Text 18"/>
           <p:cNvSpPr txBox="1"/>
           <p:nvPr/>
         </p:nvSpPr>
@@ -4274,7 +4415,7 @@
           <a:bodyPr wrap="square" lIns="0" tIns="0" rIns="0" bIns="0" rtlCol="0" anchor="ctr"/>
           <a:lstStyle/>
           <a:p>
-            <a:pPr indent="0" marL="0">
+            <a:pPr marL="0" indent="0">
               <a:lnSpc>
                 <a:spcPts val="1700"/>
               </a:lnSpc>
@@ -4297,7 +4438,7 @@
       </p:sp>
       <p:sp>
         <p:nvSpPr>
-          <p:cNvPr id="14" name="Shape 12"/>
+          <p:cNvPr id="21" name="Shape 19"/>
           <p:cNvSpPr/>
           <p:nvPr/>
         </p:nvSpPr>
@@ -4322,7 +4463,7 @@
       </p:sp>
       <p:sp>
         <p:nvSpPr>
-          <p:cNvPr id="15" name="Text 13"/>
+          <p:cNvPr id="22" name="Text 20"/>
           <p:cNvSpPr txBox="1"/>
           <p:nvPr/>
         </p:nvSpPr>
@@ -4341,7 +4482,7 @@
           <a:bodyPr wrap="square" lIns="0" tIns="0" rIns="0" bIns="0" rtlCol="0" anchor="ctr"/>
           <a:lstStyle/>
           <a:p>
-            <a:pPr indent="0" marL="0">
+            <a:pPr marL="0" indent="0">
               <a:buNone/>
             </a:pPr>
             <a:r>
@@ -4361,7 +4502,7 @@
       </p:sp>
       <p:sp>
         <p:nvSpPr>
-          <p:cNvPr id="16" name="Text 14"/>
+          <p:cNvPr id="23" name="Text 21"/>
           <p:cNvSpPr txBox="1"/>
           <p:nvPr/>
         </p:nvSpPr>
@@ -4380,7 +4521,7 @@
           <a:bodyPr wrap="square" lIns="0" tIns="0" rIns="0" bIns="0" rtlCol="0" anchor="ctr"/>
           <a:lstStyle/>
           <a:p>
-            <a:pPr indent="0" marL="0">
+            <a:pPr marL="0" indent="0">
               <a:lnSpc>
                 <a:spcPts val="1700"/>
               </a:lnSpc>
@@ -4403,7 +4544,7 @@
       </p:sp>
       <p:sp>
         <p:nvSpPr>
-          <p:cNvPr id="17" name="Shape 15"/>
+          <p:cNvPr id="24" name="Shape 22"/>
           <p:cNvSpPr/>
           <p:nvPr/>
         </p:nvSpPr>
@@ -4428,7 +4569,7 @@
       </p:sp>
       <p:sp>
         <p:nvSpPr>
-          <p:cNvPr id="18" name="Text 16"/>
+          <p:cNvPr id="25" name="Text 23"/>
           <p:cNvSpPr txBox="1"/>
           <p:nvPr/>
         </p:nvSpPr>
@@ -4447,7 +4588,7 @@
           <a:bodyPr wrap="square" lIns="0" tIns="0" rIns="0" bIns="0" rtlCol="0" anchor="ctr"/>
           <a:lstStyle/>
           <a:p>
-            <a:pPr indent="0" marL="0">
+            <a:pPr marL="0" indent="0">
               <a:buNone/>
             </a:pPr>
             <a:r>
@@ -4467,7 +4608,7 @@
       </p:sp>
       <p:sp>
         <p:nvSpPr>
-          <p:cNvPr id="19" name="Text 17"/>
+          <p:cNvPr id="26" name="Text 24"/>
           <p:cNvSpPr txBox="1"/>
           <p:nvPr/>
         </p:nvSpPr>
@@ -4486,7 +4627,7 @@
           <a:bodyPr wrap="square" lIns="0" tIns="0" rIns="0" bIns="0" rtlCol="0" anchor="ctr"/>
           <a:lstStyle/>
           <a:p>
-            <a:pPr indent="0" marL="0">
+            <a:pPr marL="0" indent="0">
               <a:lnSpc>
                 <a:spcPts val="1700"/>
               </a:lnSpc>
@@ -4509,7 +4650,7 @@
       </p:sp>
       <p:sp>
         <p:nvSpPr>
-          <p:cNvPr id="20" name="Shape 18"/>
+          <p:cNvPr id="27" name="Shape 25"/>
           <p:cNvSpPr/>
           <p:nvPr/>
         </p:nvSpPr>
@@ -4534,7 +4675,7 @@
       </p:sp>
       <p:sp>
         <p:nvSpPr>
-          <p:cNvPr id="21" name="Text 19"/>
+          <p:cNvPr id="28" name="Text 26"/>
           <p:cNvSpPr txBox="1"/>
           <p:nvPr/>
         </p:nvSpPr>
@@ -4553,7 +4694,7 @@
           <a:bodyPr wrap="square" lIns="0" tIns="0" rIns="0" bIns="0" rtlCol="0" anchor="ctr"/>
           <a:lstStyle/>
           <a:p>
-            <a:pPr indent="0" marL="0">
+            <a:pPr marL="0" indent="0">
               <a:buNone/>
             </a:pPr>
             <a:r>
@@ -4573,7 +4714,7 @@
       </p:sp>
       <p:sp>
         <p:nvSpPr>
-          <p:cNvPr id="22" name="Text 20"/>
+          <p:cNvPr id="29" name="Text 27"/>
           <p:cNvSpPr txBox="1"/>
           <p:nvPr/>
         </p:nvSpPr>
@@ -4592,7 +4733,7 @@
           <a:bodyPr wrap="square" lIns="0" tIns="0" rIns="0" bIns="0" rtlCol="0" anchor="ctr"/>
           <a:lstStyle/>
           <a:p>
-            <a:pPr indent="0" marL="0">
+            <a:pPr marL="0" indent="0">
               <a:lnSpc>
                 <a:spcPts val="1700"/>
               </a:lnSpc>
@@ -4615,7 +4756,7 @@
       </p:sp>
       <p:sp>
         <p:nvSpPr>
-          <p:cNvPr id="23" name="Shape 21"/>
+          <p:cNvPr id="30" name="Shape 28"/>
           <p:cNvSpPr/>
           <p:nvPr/>
         </p:nvSpPr>
@@ -4640,7 +4781,7 @@
       </p:sp>
       <p:sp>
         <p:nvSpPr>
-          <p:cNvPr id="24" name="Text 22"/>
+          <p:cNvPr id="31" name="Text 29"/>
           <p:cNvSpPr txBox="1"/>
           <p:nvPr/>
         </p:nvSpPr>
@@ -4659,7 +4800,7 @@
           <a:bodyPr wrap="square" lIns="0" tIns="0" rIns="0" bIns="0" rtlCol="0" anchor="ctr"/>
           <a:lstStyle/>
           <a:p>
-            <a:pPr indent="0" marL="0">
+            <a:pPr marL="0" indent="0">
               <a:buNone/>
             </a:pPr>
             <a:r>
@@ -4673,9 +4814,6 @@
               </a:rPr>
               <a:t>Our idea:  </a:t>
             </a:r>
-            <a:pPr indent="0" marL="0">
-              <a:buNone/>
-            </a:pPr>
             <a:r>
               <a:rPr lang="en-US" sz="1250" dirty="0">
                 <a:solidFill>
@@ -4737,11 +4875,11 @@
           <a:bodyPr wrap="square" lIns="0" tIns="0" rIns="0" bIns="0" rtlCol="0" anchor="ctr"/>
           <a:lstStyle/>
           <a:p>
-            <a:pPr algn="l" indent="0" marL="0">
-              <a:buNone/>
-            </a:pPr>
-            <a:r>
-              <a:rPr lang="en-US" sz="1050" b="1" spc="220" kern="0" dirty="0">
+            <a:pPr marL="0" indent="0" algn="l">
+              <a:buNone/>
+            </a:pPr>
+            <a:r>
+              <a:rPr lang="en-US" sz="1050" b="1" kern="0" spc="220" dirty="0">
                 <a:solidFill>
                   <a:srgbClr val="6E8194"/>
                 </a:solidFill>
@@ -4776,7 +4914,7 @@
           <a:bodyPr wrap="square" lIns="0" tIns="0" rIns="0" bIns="0" rtlCol="0" anchor="ctr"/>
           <a:lstStyle/>
           <a:p>
-            <a:pPr algn="l" indent="0" marL="0">
+            <a:pPr marL="0" indent="0" algn="l">
               <a:buNone/>
             </a:pPr>
             <a:r>
@@ -4865,7 +5003,7 @@
           <a:bodyPr wrap="square" lIns="0" tIns="0" rIns="0" bIns="0" rtlCol="0" anchor="ctr"/>
           <a:lstStyle/>
           <a:p>
-            <a:pPr algn="ctr" indent="0" marL="0">
+            <a:pPr marL="0" indent="0" algn="ctr">
               <a:buNone/>
             </a:pPr>
             <a:r>
@@ -4904,7 +5042,7 @@
           <a:bodyPr wrap="square" lIns="0" tIns="0" rIns="0" bIns="0" rtlCol="0" anchor="b"/>
           <a:lstStyle/>
           <a:p>
-            <a:pPr indent="0" marL="0">
+            <a:pPr marL="0" indent="0">
               <a:lnSpc>
                 <a:spcPts val="2000"/>
               </a:lnSpc>
@@ -4946,7 +5084,7 @@
           <a:bodyPr wrap="square" lIns="0" tIns="0" rIns="0" bIns="0" rtlCol="0" anchor="ctr"/>
           <a:lstStyle/>
           <a:p>
-            <a:pPr indent="0" marL="0">
+            <a:pPr marL="0" indent="0">
               <a:lnSpc>
                 <a:spcPts val="1600"/>
               </a:lnSpc>
@@ -5038,7 +5176,7 @@
           <a:bodyPr wrap="square" lIns="0" tIns="0" rIns="0" bIns="0" rtlCol="0" anchor="ctr"/>
           <a:lstStyle/>
           <a:p>
-            <a:pPr algn="ctr" indent="0" marL="0">
+            <a:pPr marL="0" indent="0" algn="ctr">
               <a:buNone/>
             </a:pPr>
             <a:r>
@@ -5064,7 +5202,7 @@
         </p:nvSpPr>
         <p:spPr>
           <a:xfrm>
-            <a:off x="4623664" y="2304288"/>
+            <a:off x="4599432" y="2065798"/>
             <a:ext cx="2944368" cy="548640"/>
           </a:xfrm>
           <a:prstGeom prst="rect">
@@ -5077,7 +5215,7 @@
           <a:bodyPr wrap="square" lIns="0" tIns="0" rIns="0" bIns="0" rtlCol="0" anchor="b"/>
           <a:lstStyle/>
           <a:p>
-            <a:pPr indent="0" marL="0">
+            <a:pPr marL="0" indent="0">
               <a:lnSpc>
                 <a:spcPts val="2000"/>
               </a:lnSpc>
@@ -5106,7 +5244,7 @@
         </p:nvSpPr>
         <p:spPr>
           <a:xfrm>
-            <a:off x="4623664" y="2871216"/>
+            <a:off x="4599432" y="2733310"/>
             <a:ext cx="2944368" cy="603504"/>
           </a:xfrm>
           <a:prstGeom prst="rect">
@@ -5119,7 +5257,7 @@
           <a:bodyPr wrap="square" lIns="0" tIns="0" rIns="0" bIns="0" rtlCol="0" anchor="ctr"/>
           <a:lstStyle/>
           <a:p>
-            <a:pPr indent="0" marL="0">
+            <a:pPr marL="0" indent="0">
               <a:lnSpc>
                 <a:spcPts val="1600"/>
               </a:lnSpc>
@@ -5211,7 +5349,7 @@
           <a:bodyPr wrap="square" lIns="0" tIns="0" rIns="0" bIns="0" rtlCol="0" anchor="ctr"/>
           <a:lstStyle/>
           <a:p>
-            <a:pPr algn="ctr" indent="0" marL="0">
+            <a:pPr marL="0" indent="0" algn="ctr">
               <a:buNone/>
             </a:pPr>
             <a:r>
@@ -5250,7 +5388,7 @@
           <a:bodyPr wrap="square" lIns="0" tIns="0" rIns="0" bIns="0" rtlCol="0" anchor="b"/>
           <a:lstStyle/>
           <a:p>
-            <a:pPr indent="0" marL="0">
+            <a:pPr marL="0" indent="0">
               <a:lnSpc>
                 <a:spcPts val="2000"/>
               </a:lnSpc>
@@ -5292,7 +5430,7 @@
           <a:bodyPr wrap="square" lIns="0" tIns="0" rIns="0" bIns="0" rtlCol="0" anchor="ctr"/>
           <a:lstStyle/>
           <a:p>
-            <a:pPr indent="0" marL="0">
+            <a:pPr marL="0" indent="0">
               <a:lnSpc>
                 <a:spcPts val="1600"/>
               </a:lnSpc>
@@ -5334,11 +5472,11 @@
           <a:bodyPr wrap="square" lIns="0" tIns="0" rIns="0" bIns="0" rtlCol="0" anchor="ctr"/>
           <a:lstStyle/>
           <a:p>
-            <a:pPr indent="0" marL="0">
-              <a:buNone/>
-            </a:pPr>
-            <a:r>
-              <a:rPr lang="en-US" sz="1000" b="1" spc="160" kern="0" dirty="0">
+            <a:pPr marL="0" indent="0">
+              <a:buNone/>
+            </a:pPr>
+            <a:r>
+              <a:rPr lang="en-US" sz="1000" b="1" kern="0" spc="160" dirty="0">
                 <a:solidFill>
                   <a:srgbClr val="6E8194"/>
                 </a:solidFill>
@@ -5373,7 +5511,7 @@
           <a:bodyPr wrap="square" lIns="0" tIns="0" rIns="0" bIns="0" rtlCol="0" anchor="ctr"/>
           <a:lstStyle/>
           <a:p>
-            <a:pPr indent="0" marL="0">
+            <a:pPr marL="0" indent="0">
               <a:lnSpc>
                 <a:spcPts val="1650"/>
               </a:lnSpc>
@@ -5390,12 +5528,6 @@
               </a:rPr>
               <a:t>Lead time   </a:t>
             </a:r>
-            <a:pPr indent="0" marL="0">
-              <a:lnSpc>
-                <a:spcPts val="1650"/>
-              </a:lnSpc>
-              <a:buNone/>
-            </a:pPr>
             <a:r>
               <a:rPr lang="en-US" sz="1200" dirty="0">
                 <a:solidFill>
@@ -5455,7 +5587,7 @@
           <a:bodyPr wrap="square" lIns="0" tIns="0" rIns="0" bIns="0" rtlCol="0" anchor="ctr"/>
           <a:lstStyle/>
           <a:p>
-            <a:pPr indent="0" marL="0">
+            <a:pPr marL="0" indent="0">
               <a:lnSpc>
                 <a:spcPts val="1650"/>
               </a:lnSpc>
@@ -5472,12 +5604,6 @@
               </a:rPr>
               <a:t>Efficiency   </a:t>
             </a:r>
-            <a:pPr indent="0" marL="0">
-              <a:lnSpc>
-                <a:spcPts val="1650"/>
-              </a:lnSpc>
-              <a:buNone/>
-            </a:pPr>
             <a:r>
               <a:rPr lang="en-US" sz="1200" dirty="0">
                 <a:solidFill>
@@ -5537,7 +5663,7 @@
           <a:bodyPr wrap="square" lIns="0" tIns="0" rIns="0" bIns="0" rtlCol="0" anchor="ctr"/>
           <a:lstStyle/>
           <a:p>
-            <a:pPr indent="0" marL="0">
+            <a:pPr marL="0" indent="0">
               <a:lnSpc>
                 <a:spcPts val="1650"/>
               </a:lnSpc>
@@ -5554,12 +5680,6 @@
               </a:rPr>
               <a:t>Accountability   </a:t>
             </a:r>
-            <a:pPr indent="0" marL="0">
-              <a:lnSpc>
-                <a:spcPts val="1650"/>
-              </a:lnSpc>
-              <a:buNone/>
-            </a:pPr>
             <a:r>
               <a:rPr lang="en-US" sz="1200" dirty="0">
                 <a:solidFill>
@@ -5619,7 +5739,7 @@
           <a:bodyPr wrap="square" lIns="0" tIns="0" rIns="0" bIns="0" rtlCol="0" anchor="ctr"/>
           <a:lstStyle/>
           <a:p>
-            <a:pPr indent="0" marL="0">
+            <a:pPr marL="0" indent="0">
               <a:lnSpc>
                 <a:spcPts val="1650"/>
               </a:lnSpc>
@@ -5636,12 +5756,6 @@
               </a:rPr>
               <a:t>Sustainability   </a:t>
             </a:r>
-            <a:pPr indent="0" marL="0">
-              <a:lnSpc>
-                <a:spcPts val="1650"/>
-              </a:lnSpc>
-              <a:buNone/>
-            </a:pPr>
             <a:r>
               <a:rPr lang="en-US" sz="1200" dirty="0">
                 <a:solidFill>
@@ -5726,11 +5840,11 @@
           <a:bodyPr wrap="square" lIns="0" tIns="0" rIns="0" bIns="0" rtlCol="0" anchor="ctr"/>
           <a:lstStyle/>
           <a:p>
-            <a:pPr indent="0" marL="0">
-              <a:buNone/>
-            </a:pPr>
-            <a:r>
-              <a:rPr lang="en-US" sz="1000" b="1" spc="160" kern="0" dirty="0">
+            <a:pPr marL="0" indent="0">
+              <a:buNone/>
+            </a:pPr>
+            <a:r>
+              <a:rPr lang="en-US" sz="1000" b="1" kern="0" spc="160" dirty="0">
                 <a:solidFill>
                   <a:srgbClr val="6E8194"/>
                 </a:solidFill>
@@ -5790,7 +5904,7 @@
           <a:bodyPr wrap="square" lIns="0" tIns="0" rIns="0" bIns="0" rtlCol="0" anchor="ctr"/>
           <a:lstStyle/>
           <a:p>
-            <a:pPr indent="0" marL="0">
+            <a:pPr marL="0" indent="0">
               <a:buNone/>
             </a:pPr>
             <a:r>
@@ -5854,7 +5968,7 @@
           <a:bodyPr wrap="square" lIns="0" tIns="0" rIns="0" bIns="0" rtlCol="0" anchor="ctr"/>
           <a:lstStyle/>
           <a:p>
-            <a:pPr indent="0" marL="0">
+            <a:pPr marL="0" indent="0">
               <a:buNone/>
             </a:pPr>
             <a:r>
@@ -5918,7 +6032,7 @@
           <a:bodyPr wrap="square" lIns="0" tIns="0" rIns="0" bIns="0" rtlCol="0" anchor="ctr"/>
           <a:lstStyle/>
           <a:p>
-            <a:pPr indent="0" marL="0">
+            <a:pPr marL="0" indent="0">
               <a:buNone/>
             </a:pPr>
             <a:r>
@@ -5982,7 +6096,7 @@
           <a:bodyPr wrap="square" lIns="0" tIns="0" rIns="0" bIns="0" rtlCol="0" anchor="ctr"/>
           <a:lstStyle/>
           <a:p>
-            <a:pPr indent="0" marL="0">
+            <a:pPr marL="0" indent="0">
               <a:buNone/>
             </a:pPr>
             <a:r>
@@ -6046,7 +6160,7 @@
           <a:bodyPr wrap="square" lIns="0" tIns="0" rIns="0" bIns="0" rtlCol="0" anchor="ctr"/>
           <a:lstStyle/>
           <a:p>
-            <a:pPr indent="0" marL="0">
+            <a:pPr marL="0" indent="0">
               <a:buNone/>
             </a:pPr>
             <a:r>
@@ -6110,11 +6224,11 @@
           <a:bodyPr wrap="square" lIns="0" tIns="0" rIns="0" bIns="0" rtlCol="0" anchor="ctr"/>
           <a:lstStyle/>
           <a:p>
-            <a:pPr algn="l" indent="0" marL="0">
-              <a:buNone/>
-            </a:pPr>
-            <a:r>
-              <a:rPr lang="en-US" sz="1050" b="1" spc="220" kern="0" dirty="0">
+            <a:pPr marL="0" indent="0" algn="l">
+              <a:buNone/>
+            </a:pPr>
+            <a:r>
+              <a:rPr lang="en-US" sz="1050" b="1" kern="0" spc="220" dirty="0">
                 <a:solidFill>
                   <a:srgbClr val="6E8194"/>
                 </a:solidFill>
@@ -6149,7 +6263,7 @@
           <a:bodyPr wrap="square" lIns="0" tIns="0" rIns="0" bIns="0" rtlCol="0" anchor="ctr"/>
           <a:lstStyle/>
           <a:p>
-            <a:pPr algn="l" indent="0" marL="0">
+            <a:pPr marL="0" indent="0" algn="l">
               <a:buNone/>
             </a:pPr>
             <a:r>
@@ -6188,11 +6302,11 @@
           <a:bodyPr wrap="square" lIns="0" tIns="0" rIns="0" bIns="0" rtlCol="0" anchor="ctr"/>
           <a:lstStyle/>
           <a:p>
-            <a:pPr indent="0" marL="0">
-              <a:buNone/>
-            </a:pPr>
-            <a:r>
-              <a:rPr lang="en-US" sz="950" b="1" spc="140" kern="0" dirty="0">
+            <a:pPr marL="0" indent="0">
+              <a:buNone/>
+            </a:pPr>
+            <a:r>
+              <a:rPr lang="en-US" sz="950" b="1" kern="0" spc="140" dirty="0">
                 <a:solidFill>
                   <a:srgbClr val="6E8194"/>
                 </a:solidFill>
@@ -6252,7 +6366,7 @@
           <a:bodyPr wrap="square" lIns="0" tIns="0" rIns="0" bIns="0" rtlCol="0" anchor="ctr"/>
           <a:lstStyle/>
           <a:p>
-            <a:pPr algn="ctr" indent="0" marL="0">
+            <a:pPr marL="0" indent="0" algn="ctr">
               <a:lnSpc>
                 <a:spcPts val="1300"/>
               </a:lnSpc>
@@ -6272,7 +6386,7 @@
             <a:endParaRPr lang="en-US" sz="1000" dirty="0"/>
           </a:p>
           <a:p>
-            <a:pPr algn="ctr" indent="0" marL="0">
+            <a:pPr marL="0" indent="0" algn="ctr">
               <a:lnSpc>
                 <a:spcPts val="1300"/>
               </a:lnSpc>
@@ -6292,7 +6406,7 @@
             <a:endParaRPr lang="en-US" sz="1000" dirty="0"/>
           </a:p>
           <a:p>
-            <a:pPr algn="ctr" indent="0" marL="0">
+            <a:pPr marL="0" indent="0" algn="ctr">
               <a:lnSpc>
                 <a:spcPts val="1300"/>
               </a:lnSpc>
@@ -6359,7 +6473,7 @@
           <a:bodyPr wrap="square" lIns="0" tIns="0" rIns="0" bIns="0" rtlCol="0" anchor="ctr"/>
           <a:lstStyle/>
           <a:p>
-            <a:pPr algn="ctr" indent="0" marL="0">
+            <a:pPr marL="0" indent="0" algn="ctr">
               <a:lnSpc>
                 <a:spcPts val="1300"/>
               </a:lnSpc>
@@ -6379,7 +6493,7 @@
             <a:endParaRPr lang="en-US" sz="1000" dirty="0"/>
           </a:p>
           <a:p>
-            <a:pPr algn="ctr" indent="0" marL="0">
+            <a:pPr marL="0" indent="0" algn="ctr">
               <a:lnSpc>
                 <a:spcPts val="1300"/>
               </a:lnSpc>
@@ -6399,7 +6513,7 @@
             <a:endParaRPr lang="en-US" sz="1000" dirty="0"/>
           </a:p>
           <a:p>
-            <a:pPr algn="ctr" indent="0" marL="0">
+            <a:pPr marL="0" indent="0" algn="ctr">
               <a:lnSpc>
                 <a:spcPts val="1300"/>
               </a:lnSpc>
@@ -6466,7 +6580,7 @@
           <a:bodyPr wrap="square" lIns="0" tIns="0" rIns="0" bIns="0" rtlCol="0" anchor="ctr"/>
           <a:lstStyle/>
           <a:p>
-            <a:pPr algn="ctr" indent="0" marL="0">
+            <a:pPr marL="0" indent="0" algn="ctr">
               <a:lnSpc>
                 <a:spcPts val="1300"/>
               </a:lnSpc>
@@ -6486,7 +6600,7 @@
             <a:endParaRPr lang="en-US" sz="1000" dirty="0"/>
           </a:p>
           <a:p>
-            <a:pPr algn="ctr" indent="0" marL="0">
+            <a:pPr marL="0" indent="0" algn="ctr">
               <a:lnSpc>
                 <a:spcPts val="1300"/>
               </a:lnSpc>
@@ -6506,7 +6620,7 @@
             <a:endParaRPr lang="en-US" sz="1000" dirty="0"/>
           </a:p>
           <a:p>
-            <a:pPr algn="ctr" indent="0" marL="0">
+            <a:pPr marL="0" indent="0" algn="ctr">
               <a:lnSpc>
                 <a:spcPts val="1300"/>
               </a:lnSpc>
@@ -6573,7 +6687,7 @@
           <a:bodyPr wrap="square" lIns="0" tIns="0" rIns="0" bIns="0" rtlCol="0" anchor="ctr"/>
           <a:lstStyle/>
           <a:p>
-            <a:pPr algn="ctr" indent="0" marL="0">
+            <a:pPr marL="0" indent="0" algn="ctr">
               <a:lnSpc>
                 <a:spcPts val="1300"/>
               </a:lnSpc>
@@ -6593,7 +6707,7 @@
             <a:endParaRPr lang="en-US" sz="1000" dirty="0"/>
           </a:p>
           <a:p>
-            <a:pPr algn="ctr" indent="0" marL="0">
+            <a:pPr marL="0" indent="0" algn="ctr">
               <a:lnSpc>
                 <a:spcPts val="1300"/>
               </a:lnSpc>
@@ -6613,7 +6727,7 @@
             <a:endParaRPr lang="en-US" sz="1000" dirty="0"/>
           </a:p>
           <a:p>
-            <a:pPr algn="ctr" indent="0" marL="0">
+            <a:pPr marL="0" indent="0" algn="ctr">
               <a:lnSpc>
                 <a:spcPts val="1300"/>
               </a:lnSpc>
@@ -6680,7 +6794,7 @@
           <a:bodyPr wrap="square" lIns="0" tIns="0" rIns="0" bIns="0" rtlCol="0" anchor="ctr"/>
           <a:lstStyle/>
           <a:p>
-            <a:pPr algn="ctr" indent="0" marL="0">
+            <a:pPr marL="0" indent="0" algn="ctr">
               <a:lnSpc>
                 <a:spcPts val="1300"/>
               </a:lnSpc>
@@ -6700,7 +6814,7 @@
             <a:endParaRPr lang="en-US" sz="1000" dirty="0"/>
           </a:p>
           <a:p>
-            <a:pPr algn="ctr" indent="0" marL="0">
+            <a:pPr marL="0" indent="0" algn="ctr">
               <a:lnSpc>
                 <a:spcPts val="1300"/>
               </a:lnSpc>
@@ -6720,7 +6834,7 @@
             <a:endParaRPr lang="en-US" sz="1000" dirty="0"/>
           </a:p>
           <a:p>
-            <a:pPr algn="ctr" indent="0" marL="0">
+            <a:pPr marL="0" indent="0" algn="ctr">
               <a:lnSpc>
                 <a:spcPts val="1300"/>
               </a:lnSpc>
@@ -6787,11 +6901,11 @@
           <a:bodyPr wrap="square" lIns="0" tIns="0" rIns="0" bIns="0" rtlCol="0" anchor="ctr"/>
           <a:lstStyle/>
           <a:p>
-            <a:pPr indent="0" marL="0">
-              <a:buNone/>
-            </a:pPr>
-            <a:r>
-              <a:rPr lang="en-US" sz="950" b="1" spc="140" kern="0" dirty="0">
+            <a:pPr marL="0" indent="0">
+              <a:buNone/>
+            </a:pPr>
+            <a:r>
+              <a:rPr lang="en-US" sz="950" b="1" kern="0" spc="140" dirty="0">
                 <a:solidFill>
                   <a:srgbClr val="6E8194"/>
                 </a:solidFill>
@@ -6813,8 +6927,8 @@
         </p:nvSpPr>
         <p:spPr>
           <a:xfrm>
-            <a:off x="640080" y="2542032"/>
-            <a:ext cx="10911535" cy="640080"/>
+            <a:off x="640080" y="2523744"/>
+            <a:ext cx="10911535" cy="694944"/>
           </a:xfrm>
           <a:prstGeom prst="rect">
             <a:avLst/>
@@ -6838,12 +6952,272 @@
         </p:nvSpPr>
         <p:spPr>
           <a:xfrm>
-            <a:off x="777240" y="2651760"/>
-            <a:ext cx="2010400" cy="420624"/>
+            <a:off x="777240" y="2596896"/>
+            <a:ext cx="2010400" cy="530352"/>
           </a:xfrm>
           <a:prstGeom prst="roundRect">
             <a:avLst>
-              <a:gd name="adj" fmla="val 13043"/>
+              <a:gd name="adj" fmla="val 10345"/>
+            </a:avLst>
+          </a:prstGeom>
+          <a:solidFill>
+            <a:srgbClr val="FFFFFF"/>
+          </a:solidFill>
+          <a:ln w="19050">
+            <a:solidFill>
+              <a:srgbClr val="11253C"/>
+            </a:solidFill>
+            <a:prstDash val="solid"/>
+          </a:ln>
+        </p:spPr>
+      </p:sp>
+      <p:sp>
+        <p:nvSpPr>
+          <p:cNvPr id="19" name="Shape 17"/>
+          <p:cNvSpPr/>
+          <p:nvPr/>
+        </p:nvSpPr>
+        <p:spPr>
+          <a:xfrm>
+            <a:off x="923544" y="2724912"/>
+            <a:ext cx="118872" cy="118872"/>
+          </a:xfrm>
+          <a:prstGeom prst="ellipse">
+            <a:avLst/>
+          </a:prstGeom>
+          <a:solidFill>
+            <a:srgbClr val="2E7D8F"/>
+          </a:solidFill>
+          <a:ln w="12700">
+            <a:solidFill>
+              <a:srgbClr val="2E7D8F"/>
+            </a:solidFill>
+            <a:prstDash val="solid"/>
+          </a:ln>
+        </p:spPr>
+      </p:sp>
+      <p:sp>
+        <p:nvSpPr>
+          <p:cNvPr id="20" name="Text 18"/>
+          <p:cNvSpPr txBox="1"/>
+          <p:nvPr/>
+        </p:nvSpPr>
+        <p:spPr>
+          <a:xfrm>
+            <a:off x="1106424" y="2633472"/>
+            <a:ext cx="1608064" cy="219456"/>
+          </a:xfrm>
+          <a:prstGeom prst="rect">
+            <a:avLst/>
+          </a:prstGeom>
+          <a:noFill/>
+          <a:ln/>
+        </p:spPr>
+        <p:txBody>
+          <a:bodyPr wrap="square" lIns="0" tIns="0" rIns="0" bIns="0" rtlCol="0" anchor="ctr"/>
+          <a:lstStyle/>
+          <a:p>
+            <a:pPr marL="0" indent="0">
+              <a:buNone/>
+            </a:pPr>
+            <a:r>
+              <a:rPr lang="en-US" sz="1150" b="1" dirty="0">
+                <a:solidFill>
+                  <a:srgbClr val="11253C"/>
+                </a:solidFill>
+                <a:latin typeface="Calibri" pitchFamily="34" charset="0"/>
+                <a:ea typeface="Calibri" pitchFamily="34" charset="-122"/>
+                <a:cs typeface="Calibri" pitchFamily="34" charset="-120"/>
+              </a:rPr>
+              <a:t>Flood</a:t>
+            </a:r>
+            <a:endParaRPr lang="en-US" sz="1150" dirty="0"/>
+          </a:p>
+        </p:txBody>
+      </p:sp>
+      <p:sp>
+        <p:nvSpPr>
+          <p:cNvPr id="21" name="Text 19"/>
+          <p:cNvSpPr txBox="1"/>
+          <p:nvPr/>
+        </p:nvSpPr>
+        <p:spPr>
+          <a:xfrm>
+            <a:off x="1106424" y="2852928"/>
+            <a:ext cx="1608064" cy="201168"/>
+          </a:xfrm>
+          <a:prstGeom prst="rect">
+            <a:avLst/>
+          </a:prstGeom>
+          <a:noFill/>
+          <a:ln/>
+        </p:spPr>
+        <p:txBody>
+          <a:bodyPr wrap="square" lIns="0" tIns="0" rIns="0" bIns="0" rtlCol="0" anchor="ctr"/>
+          <a:lstStyle/>
+          <a:p>
+            <a:pPr marL="0" indent="0">
+              <a:buNone/>
+            </a:pPr>
+            <a:r>
+              <a:rPr lang="en-US" sz="800" b="1" kern="0" spc="40" dirty="0">
+                <a:solidFill>
+                  <a:srgbClr val="B23A24"/>
+                </a:solidFill>
+                <a:latin typeface="Calibri" pitchFamily="34" charset="0"/>
+                <a:ea typeface="Calibri" pitchFamily="34" charset="-122"/>
+                <a:cs typeface="Calibri" pitchFamily="34" charset="-120"/>
+              </a:rPr>
+              <a:t>LIVE — trained, running</a:t>
+            </a:r>
+            <a:endParaRPr lang="en-US" sz="800" dirty="0"/>
+          </a:p>
+        </p:txBody>
+      </p:sp>
+      <p:sp>
+        <p:nvSpPr>
+          <p:cNvPr id="22" name="Shape 20"/>
+          <p:cNvSpPr/>
+          <p:nvPr/>
+        </p:nvSpPr>
+        <p:spPr>
+          <a:xfrm>
+            <a:off x="2933944" y="2596896"/>
+            <a:ext cx="2010400" cy="530352"/>
+          </a:xfrm>
+          <a:prstGeom prst="roundRect">
+            <a:avLst>
+              <a:gd name="adj" fmla="val 10345"/>
+            </a:avLst>
+          </a:prstGeom>
+          <a:solidFill>
+            <a:srgbClr val="FFFFFF"/>
+          </a:solidFill>
+          <a:ln w="19050">
+            <a:solidFill>
+              <a:srgbClr val="11253C"/>
+            </a:solidFill>
+            <a:prstDash val="solid"/>
+          </a:ln>
+        </p:spPr>
+      </p:sp>
+      <p:sp>
+        <p:nvSpPr>
+          <p:cNvPr id="23" name="Shape 21"/>
+          <p:cNvSpPr/>
+          <p:nvPr/>
+        </p:nvSpPr>
+        <p:spPr>
+          <a:xfrm>
+            <a:off x="3080248" y="2724912"/>
+            <a:ext cx="118872" cy="118872"/>
+          </a:xfrm>
+          <a:prstGeom prst="ellipse">
+            <a:avLst/>
+          </a:prstGeom>
+          <a:solidFill>
+            <a:srgbClr val="B23A24"/>
+          </a:solidFill>
+          <a:ln w="12700">
+            <a:solidFill>
+              <a:srgbClr val="B23A24"/>
+            </a:solidFill>
+            <a:prstDash val="solid"/>
+          </a:ln>
+        </p:spPr>
+      </p:sp>
+      <p:sp>
+        <p:nvSpPr>
+          <p:cNvPr id="24" name="Text 22"/>
+          <p:cNvSpPr txBox="1"/>
+          <p:nvPr/>
+        </p:nvSpPr>
+        <p:spPr>
+          <a:xfrm>
+            <a:off x="3263128" y="2633472"/>
+            <a:ext cx="1608064" cy="219456"/>
+          </a:xfrm>
+          <a:prstGeom prst="rect">
+            <a:avLst/>
+          </a:prstGeom>
+          <a:noFill/>
+          <a:ln/>
+        </p:spPr>
+        <p:txBody>
+          <a:bodyPr wrap="square" lIns="0" tIns="0" rIns="0" bIns="0" rtlCol="0" anchor="ctr"/>
+          <a:lstStyle/>
+          <a:p>
+            <a:pPr marL="0" indent="0">
+              <a:buNone/>
+            </a:pPr>
+            <a:r>
+              <a:rPr lang="en-US" sz="1150" b="1" dirty="0">
+                <a:solidFill>
+                  <a:srgbClr val="11253C"/>
+                </a:solidFill>
+                <a:latin typeface="Calibri" pitchFamily="34" charset="0"/>
+                <a:ea typeface="Calibri" pitchFamily="34" charset="-122"/>
+                <a:cs typeface="Calibri" pitchFamily="34" charset="-120"/>
+              </a:rPr>
+              <a:t>Heatwave</a:t>
+            </a:r>
+            <a:endParaRPr lang="en-US" sz="1150" dirty="0"/>
+          </a:p>
+        </p:txBody>
+      </p:sp>
+      <p:sp>
+        <p:nvSpPr>
+          <p:cNvPr id="25" name="Text 23"/>
+          <p:cNvSpPr txBox="1"/>
+          <p:nvPr/>
+        </p:nvSpPr>
+        <p:spPr>
+          <a:xfrm>
+            <a:off x="3263128" y="2852928"/>
+            <a:ext cx="1608064" cy="201168"/>
+          </a:xfrm>
+          <a:prstGeom prst="rect">
+            <a:avLst/>
+          </a:prstGeom>
+          <a:noFill/>
+          <a:ln/>
+        </p:spPr>
+        <p:txBody>
+          <a:bodyPr wrap="square" lIns="0" tIns="0" rIns="0" bIns="0" rtlCol="0" anchor="ctr"/>
+          <a:lstStyle/>
+          <a:p>
+            <a:pPr marL="0" indent="0">
+              <a:buNone/>
+            </a:pPr>
+            <a:r>
+              <a:rPr lang="en-US" sz="800" b="1" kern="0" spc="40" dirty="0">
+                <a:solidFill>
+                  <a:srgbClr val="B23A24"/>
+                </a:solidFill>
+                <a:latin typeface="Calibri" pitchFamily="34" charset="0"/>
+                <a:ea typeface="Calibri" pitchFamily="34" charset="-122"/>
+                <a:cs typeface="Calibri" pitchFamily="34" charset="-120"/>
+              </a:rPr>
+              <a:t>LIVE — trained, running</a:t>
+            </a:r>
+            <a:endParaRPr lang="en-US" sz="800" dirty="0"/>
+          </a:p>
+        </p:txBody>
+      </p:sp>
+      <p:sp>
+        <p:nvSpPr>
+          <p:cNvPr id="26" name="Shape 24"/>
+          <p:cNvSpPr/>
+          <p:nvPr/>
+        </p:nvSpPr>
+        <p:spPr>
+          <a:xfrm>
+            <a:off x="5090648" y="2596896"/>
+            <a:ext cx="2010400" cy="530352"/>
+          </a:xfrm>
+          <a:prstGeom prst="roundRect">
+            <a:avLst>
+              <a:gd name="adj" fmla="val 10345"/>
             </a:avLst>
           </a:prstGeom>
           <a:solidFill>
@@ -6859,24 +7233,24 @@
       </p:sp>
       <p:sp>
         <p:nvSpPr>
-          <p:cNvPr id="19" name="Shape 17"/>
+          <p:cNvPr id="27" name="Shape 25"/>
           <p:cNvSpPr/>
           <p:nvPr/>
         </p:nvSpPr>
         <p:spPr>
           <a:xfrm>
-            <a:off x="923544" y="2807208"/>
+            <a:off x="5236952" y="2724912"/>
             <a:ext cx="118872" cy="118872"/>
           </a:xfrm>
           <a:prstGeom prst="ellipse">
             <a:avLst/>
           </a:prstGeom>
           <a:solidFill>
-            <a:srgbClr val="2E7D8F"/>
+            <a:srgbClr val="6E5596"/>
           </a:solidFill>
           <a:ln w="12700">
             <a:solidFill>
-              <a:srgbClr val="2E7D8F"/>
+              <a:srgbClr val="6E5596"/>
             </a:solidFill>
             <a:prstDash val="solid"/>
           </a:ln>
@@ -6884,26 +7258,26 @@
       </p:sp>
       <p:sp>
         <p:nvSpPr>
-          <p:cNvPr id="20" name="Text 18"/>
-          <p:cNvSpPr txBox="1"/>
-          <p:nvPr/>
-        </p:nvSpPr>
-        <p:spPr>
-          <a:xfrm>
-            <a:off x="1106424" y="2651760"/>
-            <a:ext cx="1608064" cy="420624"/>
-          </a:xfrm>
-          <a:prstGeom prst="rect">
-            <a:avLst/>
-          </a:prstGeom>
-          <a:noFill/>
-          <a:ln/>
-        </p:spPr>
-        <p:txBody>
-          <a:bodyPr wrap="square" lIns="0" tIns="0" rIns="0" bIns="0" rtlCol="0" anchor="ctr"/>
-          <a:lstStyle/>
-          <a:p>
-            <a:pPr indent="0" marL="0">
+          <p:cNvPr id="28" name="Text 26"/>
+          <p:cNvSpPr txBox="1"/>
+          <p:nvPr/>
+        </p:nvSpPr>
+        <p:spPr>
+          <a:xfrm>
+            <a:off x="5419832" y="2633472"/>
+            <a:ext cx="1608064" cy="219456"/>
+          </a:xfrm>
+          <a:prstGeom prst="rect">
+            <a:avLst/>
+          </a:prstGeom>
+          <a:noFill/>
+          <a:ln/>
+        </p:spPr>
+        <p:txBody>
+          <a:bodyPr wrap="square" lIns="0" tIns="0" rIns="0" bIns="0" rtlCol="0" anchor="ctr"/>
+          <a:lstStyle/>
+          <a:p>
+            <a:pPr marL="0" indent="0">
               <a:buNone/>
             </a:pPr>
             <a:r>
@@ -6915,7 +7289,7 @@
                 <a:ea typeface="Calibri" pitchFamily="34" charset="-122"/>
                 <a:cs typeface="Calibri" pitchFamily="34" charset="-120"/>
               </a:rPr>
-              <a:t>Flood</a:t>
+              <a:t>Air Quality</a:t>
             </a:r>
             <a:endParaRPr lang="en-US" sz="1150" dirty="0"/>
           </a:p>
@@ -6923,18 +7297,57 @@
       </p:sp>
       <p:sp>
         <p:nvSpPr>
-          <p:cNvPr id="21" name="Shape 19"/>
+          <p:cNvPr id="29" name="Text 27"/>
+          <p:cNvSpPr txBox="1"/>
+          <p:nvPr/>
+        </p:nvSpPr>
+        <p:spPr>
+          <a:xfrm>
+            <a:off x="5419832" y="2852928"/>
+            <a:ext cx="1608064" cy="201168"/>
+          </a:xfrm>
+          <a:prstGeom prst="rect">
+            <a:avLst/>
+          </a:prstGeom>
+          <a:noFill/>
+          <a:ln/>
+        </p:spPr>
+        <p:txBody>
+          <a:bodyPr wrap="square" lIns="0" tIns="0" rIns="0" bIns="0" rtlCol="0" anchor="ctr"/>
+          <a:lstStyle/>
+          <a:p>
+            <a:pPr marL="0" indent="0">
+              <a:buNone/>
+            </a:pPr>
+            <a:r>
+              <a:rPr lang="en-US" sz="800" kern="0" spc="40" dirty="0">
+                <a:solidFill>
+                  <a:srgbClr val="6E8194"/>
+                </a:solidFill>
+                <a:latin typeface="Calibri" pitchFamily="34" charset="0"/>
+                <a:ea typeface="Calibri" pitchFamily="34" charset="-122"/>
+                <a:cs typeface="Calibri" pitchFamily="34" charset="-120"/>
+              </a:rPr>
+              <a:t>REGISTERED — same interface</a:t>
+            </a:r>
+            <a:endParaRPr lang="en-US" sz="800" dirty="0"/>
+          </a:p>
+        </p:txBody>
+      </p:sp>
+      <p:sp>
+        <p:nvSpPr>
+          <p:cNvPr id="30" name="Shape 28"/>
           <p:cNvSpPr/>
           <p:nvPr/>
         </p:nvSpPr>
         <p:spPr>
           <a:xfrm>
-            <a:off x="2933944" y="2651760"/>
-            <a:ext cx="2010400" cy="420624"/>
+            <a:off x="7247352" y="2596896"/>
+            <a:ext cx="2010400" cy="530352"/>
           </a:xfrm>
           <a:prstGeom prst="roundRect">
             <a:avLst>
-              <a:gd name="adj" fmla="val 13043"/>
+              <a:gd name="adj" fmla="val 10345"/>
             </a:avLst>
           </a:prstGeom>
           <a:solidFill>
@@ -6950,24 +7363,24 @@
       </p:sp>
       <p:sp>
         <p:nvSpPr>
-          <p:cNvPr id="22" name="Shape 20"/>
+          <p:cNvPr id="31" name="Shape 29"/>
           <p:cNvSpPr/>
           <p:nvPr/>
         </p:nvSpPr>
         <p:spPr>
           <a:xfrm>
-            <a:off x="3080248" y="2807208"/>
+            <a:off x="7393656" y="2724912"/>
             <a:ext cx="118872" cy="118872"/>
           </a:xfrm>
           <a:prstGeom prst="ellipse">
             <a:avLst/>
           </a:prstGeom>
           <a:solidFill>
-            <a:srgbClr val="B23A24"/>
+            <a:srgbClr val="C97A20"/>
           </a:solidFill>
           <a:ln w="12700">
             <a:solidFill>
-              <a:srgbClr val="B23A24"/>
+              <a:srgbClr val="C97A20"/>
             </a:solidFill>
             <a:prstDash val="solid"/>
           </a:ln>
@@ -6975,26 +7388,26 @@
       </p:sp>
       <p:sp>
         <p:nvSpPr>
-          <p:cNvPr id="23" name="Text 21"/>
-          <p:cNvSpPr txBox="1"/>
-          <p:nvPr/>
-        </p:nvSpPr>
-        <p:spPr>
-          <a:xfrm>
-            <a:off x="3263128" y="2651760"/>
-            <a:ext cx="1608064" cy="420624"/>
-          </a:xfrm>
-          <a:prstGeom prst="rect">
-            <a:avLst/>
-          </a:prstGeom>
-          <a:noFill/>
-          <a:ln/>
-        </p:spPr>
-        <p:txBody>
-          <a:bodyPr wrap="square" lIns="0" tIns="0" rIns="0" bIns="0" rtlCol="0" anchor="ctr"/>
-          <a:lstStyle/>
-          <a:p>
-            <a:pPr indent="0" marL="0">
+          <p:cNvPr id="32" name="Text 30"/>
+          <p:cNvSpPr txBox="1"/>
+          <p:nvPr/>
+        </p:nvSpPr>
+        <p:spPr>
+          <a:xfrm>
+            <a:off x="7576536" y="2633472"/>
+            <a:ext cx="1608064" cy="219456"/>
+          </a:xfrm>
+          <a:prstGeom prst="rect">
+            <a:avLst/>
+          </a:prstGeom>
+          <a:noFill/>
+          <a:ln/>
+        </p:spPr>
+        <p:txBody>
+          <a:bodyPr wrap="square" lIns="0" tIns="0" rIns="0" bIns="0" rtlCol="0" anchor="ctr"/>
+          <a:lstStyle/>
+          <a:p>
+            <a:pPr marL="0" indent="0">
               <a:buNone/>
             </a:pPr>
             <a:r>
@@ -7006,7 +7419,7 @@
                 <a:ea typeface="Calibri" pitchFamily="34" charset="-122"/>
                 <a:cs typeface="Calibri" pitchFamily="34" charset="-120"/>
               </a:rPr>
-              <a:t>Heatwave</a:t>
+              <a:t>Wildfire</a:t>
             </a:r>
             <a:endParaRPr lang="en-US" sz="1150" dirty="0"/>
           </a:p>
@@ -7014,18 +7427,57 @@
       </p:sp>
       <p:sp>
         <p:nvSpPr>
-          <p:cNvPr id="24" name="Shape 22"/>
+          <p:cNvPr id="33" name="Text 31"/>
+          <p:cNvSpPr txBox="1"/>
+          <p:nvPr/>
+        </p:nvSpPr>
+        <p:spPr>
+          <a:xfrm>
+            <a:off x="7576536" y="2852928"/>
+            <a:ext cx="1608064" cy="201168"/>
+          </a:xfrm>
+          <a:prstGeom prst="rect">
+            <a:avLst/>
+          </a:prstGeom>
+          <a:noFill/>
+          <a:ln/>
+        </p:spPr>
+        <p:txBody>
+          <a:bodyPr wrap="square" lIns="0" tIns="0" rIns="0" bIns="0" rtlCol="0" anchor="ctr"/>
+          <a:lstStyle/>
+          <a:p>
+            <a:pPr marL="0" indent="0">
+              <a:buNone/>
+            </a:pPr>
+            <a:r>
+              <a:rPr lang="en-US" sz="800" kern="0" spc="40" dirty="0">
+                <a:solidFill>
+                  <a:srgbClr val="6E8194"/>
+                </a:solidFill>
+                <a:latin typeface="Calibri" pitchFamily="34" charset="0"/>
+                <a:ea typeface="Calibri" pitchFamily="34" charset="-122"/>
+                <a:cs typeface="Calibri" pitchFamily="34" charset="-120"/>
+              </a:rPr>
+              <a:t>REGISTERED — same interface</a:t>
+            </a:r>
+            <a:endParaRPr lang="en-US" sz="800" dirty="0"/>
+          </a:p>
+        </p:txBody>
+      </p:sp>
+      <p:sp>
+        <p:nvSpPr>
+          <p:cNvPr id="34" name="Shape 32"/>
           <p:cNvSpPr/>
           <p:nvPr/>
         </p:nvSpPr>
         <p:spPr>
           <a:xfrm>
-            <a:off x="5090648" y="2651760"/>
-            <a:ext cx="2010400" cy="420624"/>
+            <a:off x="9404055" y="2596896"/>
+            <a:ext cx="2010400" cy="530352"/>
           </a:xfrm>
           <a:prstGeom prst="roundRect">
             <a:avLst>
-              <a:gd name="adj" fmla="val 13043"/>
+              <a:gd name="adj" fmla="val 10345"/>
             </a:avLst>
           </a:prstGeom>
           <a:solidFill>
@@ -7041,24 +7493,24 @@
       </p:sp>
       <p:sp>
         <p:nvSpPr>
-          <p:cNvPr id="25" name="Shape 23"/>
+          <p:cNvPr id="35" name="Shape 33"/>
           <p:cNvSpPr/>
           <p:nvPr/>
         </p:nvSpPr>
         <p:spPr>
           <a:xfrm>
-            <a:off x="5236952" y="2807208"/>
+            <a:off x="9550359" y="2724912"/>
             <a:ext cx="118872" cy="118872"/>
           </a:xfrm>
           <a:prstGeom prst="ellipse">
             <a:avLst/>
           </a:prstGeom>
           <a:solidFill>
-            <a:srgbClr val="6E5596"/>
+            <a:srgbClr val="4E6B41"/>
           </a:solidFill>
           <a:ln w="12700">
             <a:solidFill>
-              <a:srgbClr val="6E5596"/>
+              <a:srgbClr val="4E6B41"/>
             </a:solidFill>
             <a:prstDash val="solid"/>
           </a:ln>
@@ -7066,26 +7518,26 @@
       </p:sp>
       <p:sp>
         <p:nvSpPr>
-          <p:cNvPr id="26" name="Text 24"/>
-          <p:cNvSpPr txBox="1"/>
-          <p:nvPr/>
-        </p:nvSpPr>
-        <p:spPr>
-          <a:xfrm>
-            <a:off x="5419832" y="2651760"/>
-            <a:ext cx="1608064" cy="420624"/>
-          </a:xfrm>
-          <a:prstGeom prst="rect">
-            <a:avLst/>
-          </a:prstGeom>
-          <a:noFill/>
-          <a:ln/>
-        </p:spPr>
-        <p:txBody>
-          <a:bodyPr wrap="square" lIns="0" tIns="0" rIns="0" bIns="0" rtlCol="0" anchor="ctr"/>
-          <a:lstStyle/>
-          <a:p>
-            <a:pPr indent="0" marL="0">
+          <p:cNvPr id="36" name="Text 34"/>
+          <p:cNvSpPr txBox="1"/>
+          <p:nvPr/>
+        </p:nvSpPr>
+        <p:spPr>
+          <a:xfrm>
+            <a:off x="9733239" y="2633472"/>
+            <a:ext cx="1608064" cy="219456"/>
+          </a:xfrm>
+          <a:prstGeom prst="rect">
+            <a:avLst/>
+          </a:prstGeom>
+          <a:noFill/>
+          <a:ln/>
+        </p:spPr>
+        <p:txBody>
+          <a:bodyPr wrap="square" lIns="0" tIns="0" rIns="0" bIns="0" rtlCol="0" anchor="ctr"/>
+          <a:lstStyle/>
+          <a:p>
+            <a:pPr marL="0" indent="0">
               <a:buNone/>
             </a:pPr>
             <a:r>
@@ -7097,7 +7549,7 @@
                 <a:ea typeface="Calibri" pitchFamily="34" charset="-122"/>
                 <a:cs typeface="Calibri" pitchFamily="34" charset="-120"/>
               </a:rPr>
-              <a:t>Air Quality</a:t>
+              <a:t>Seismic</a:t>
             </a:r>
             <a:endParaRPr lang="en-US" sz="1150" dirty="0"/>
           </a:p>
@@ -7105,19 +7557,629 @@
       </p:sp>
       <p:sp>
         <p:nvSpPr>
-          <p:cNvPr id="27" name="Shape 25"/>
+          <p:cNvPr id="37" name="Text 35"/>
+          <p:cNvSpPr txBox="1"/>
+          <p:nvPr/>
+        </p:nvSpPr>
+        <p:spPr>
+          <a:xfrm>
+            <a:off x="9733239" y="2852928"/>
+            <a:ext cx="1608064" cy="201168"/>
+          </a:xfrm>
+          <a:prstGeom prst="rect">
+            <a:avLst/>
+          </a:prstGeom>
+          <a:noFill/>
+          <a:ln/>
+        </p:spPr>
+        <p:txBody>
+          <a:bodyPr wrap="square" lIns="0" tIns="0" rIns="0" bIns="0" rtlCol="0" anchor="ctr"/>
+          <a:lstStyle/>
+          <a:p>
+            <a:pPr marL="0" indent="0">
+              <a:buNone/>
+            </a:pPr>
+            <a:r>
+              <a:rPr lang="en-US" sz="800" kern="0" spc="40" dirty="0">
+                <a:solidFill>
+                  <a:srgbClr val="6E8194"/>
+                </a:solidFill>
+                <a:latin typeface="Calibri" pitchFamily="34" charset="0"/>
+                <a:ea typeface="Calibri" pitchFamily="34" charset="-122"/>
+                <a:cs typeface="Calibri" pitchFamily="34" charset="-120"/>
+              </a:rPr>
+              <a:t>REGISTERED — same interface</a:t>
+            </a:r>
+            <a:endParaRPr lang="en-US" sz="800" dirty="0"/>
+          </a:p>
+        </p:txBody>
+      </p:sp>
+      <p:sp>
+        <p:nvSpPr>
+          <p:cNvPr id="38" name="Shape 36"/>
           <p:cNvSpPr/>
           <p:nvPr/>
         </p:nvSpPr>
         <p:spPr>
           <a:xfrm>
-            <a:off x="7247352" y="2651760"/>
-            <a:ext cx="2010400" cy="420624"/>
+            <a:off x="6013552" y="3273552"/>
+            <a:ext cx="164592" cy="137160"/>
+          </a:xfrm>
+          <a:prstGeom prst="downArrow">
+            <a:avLst/>
+          </a:prstGeom>
+          <a:solidFill>
+            <a:srgbClr val="9FAFBE"/>
+          </a:solidFill>
+          <a:ln w="12700">
+            <a:solidFill>
+              <a:srgbClr val="9FAFBE"/>
+            </a:solidFill>
+            <a:prstDash val="solid"/>
+          </a:ln>
+        </p:spPr>
+      </p:sp>
+      <p:sp>
+        <p:nvSpPr>
+          <p:cNvPr id="39" name="Text 37"/>
+          <p:cNvSpPr txBox="1"/>
+          <p:nvPr/>
+        </p:nvSpPr>
+        <p:spPr>
+          <a:xfrm>
+            <a:off x="640080" y="3438144"/>
+            <a:ext cx="8686800" cy="201168"/>
+          </a:xfrm>
+          <a:prstGeom prst="rect">
+            <a:avLst/>
+          </a:prstGeom>
+          <a:noFill/>
+          <a:ln/>
+        </p:spPr>
+        <p:txBody>
+          <a:bodyPr wrap="square" lIns="0" tIns="0" rIns="0" bIns="0" rtlCol="0" anchor="ctr"/>
+          <a:lstStyle/>
+          <a:p>
+            <a:pPr marL="0" indent="0">
+              <a:buNone/>
+            </a:pPr>
+            <a:r>
+              <a:rPr lang="en-US" sz="950" b="1" kern="0" spc="140" dirty="0">
+                <a:solidFill>
+                  <a:srgbClr val="6E8194"/>
+                </a:solidFill>
+                <a:latin typeface="Calibri" pitchFamily="34" charset="0"/>
+                <a:ea typeface="Calibri" pitchFamily="34" charset="-122"/>
+                <a:cs typeface="Calibri" pitchFamily="34" charset="-120"/>
+              </a:rPr>
+              <a:t>3   AGENT ORCHESTRATOR   —   LangGraph state machine over LangChain tools</a:t>
+            </a:r>
+            <a:endParaRPr lang="en-US" sz="950" dirty="0"/>
+          </a:p>
+        </p:txBody>
+      </p:sp>
+      <p:sp>
+        <p:nvSpPr>
+          <p:cNvPr id="40" name="Shape 38"/>
+          <p:cNvSpPr/>
+          <p:nvPr/>
+        </p:nvSpPr>
+        <p:spPr>
+          <a:xfrm>
+            <a:off x="640080" y="3657600"/>
+            <a:ext cx="10911535" cy="786384"/>
+          </a:xfrm>
+          <a:prstGeom prst="rect">
+            <a:avLst/>
+          </a:prstGeom>
+          <a:solidFill>
+            <a:srgbClr val="E8EEF3"/>
+          </a:solidFill>
+          <a:ln w="15875">
+            <a:solidFill>
+              <a:srgbClr val="9FAFBE"/>
+            </a:solidFill>
+            <a:prstDash val="solid"/>
+          </a:ln>
+        </p:spPr>
+      </p:sp>
+      <p:sp>
+        <p:nvSpPr>
+          <p:cNvPr id="41" name="Shape 39"/>
+          <p:cNvSpPr/>
+          <p:nvPr/>
+        </p:nvSpPr>
+        <p:spPr>
+          <a:xfrm>
+            <a:off x="777240" y="3758184"/>
+            <a:ext cx="2549576" cy="585216"/>
           </a:xfrm>
           <a:prstGeom prst="roundRect">
             <a:avLst>
-              <a:gd name="adj" fmla="val 13043"/>
+              <a:gd name="adj" fmla="val 9375"/>
             </a:avLst>
+          </a:prstGeom>
+          <a:solidFill>
+            <a:srgbClr val="FFFFFF"/>
+          </a:solidFill>
+          <a:ln w="9525">
+            <a:solidFill>
+              <a:srgbClr val="9FAFBE"/>
+            </a:solidFill>
+            <a:prstDash val="solid"/>
+          </a:ln>
+        </p:spPr>
+      </p:sp>
+      <p:sp>
+        <p:nvSpPr>
+          <p:cNvPr id="42" name="Text 40"/>
+          <p:cNvSpPr txBox="1"/>
+          <p:nvPr/>
+        </p:nvSpPr>
+        <p:spPr>
+          <a:xfrm>
+            <a:off x="905256" y="3794760"/>
+            <a:ext cx="2293544" cy="219456"/>
+          </a:xfrm>
+          <a:prstGeom prst="rect">
+            <a:avLst/>
+          </a:prstGeom>
+          <a:noFill/>
+          <a:ln/>
+        </p:spPr>
+        <p:txBody>
+          <a:bodyPr wrap="square" lIns="0" tIns="0" rIns="0" bIns="0" rtlCol="0" anchor="ctr"/>
+          <a:lstStyle/>
+          <a:p>
+            <a:pPr marL="0" indent="0">
+              <a:buNone/>
+            </a:pPr>
+            <a:r>
+              <a:rPr lang="en-US" sz="1150" b="1" dirty="0">
+                <a:solidFill>
+                  <a:srgbClr val="11253C"/>
+                </a:solidFill>
+                <a:latin typeface="Calibri" pitchFamily="34" charset="0"/>
+                <a:ea typeface="Calibri" pitchFamily="34" charset="-122"/>
+                <a:cs typeface="Calibri" pitchFamily="34" charset="-120"/>
+              </a:rPr>
+              <a:t>Hazard Analyst</a:t>
+            </a:r>
+            <a:endParaRPr lang="en-US" sz="1150" dirty="0"/>
+          </a:p>
+        </p:txBody>
+      </p:sp>
+      <p:sp>
+        <p:nvSpPr>
+          <p:cNvPr id="43" name="Text 41"/>
+          <p:cNvSpPr txBox="1"/>
+          <p:nvPr/>
+        </p:nvSpPr>
+        <p:spPr>
+          <a:xfrm>
+            <a:off x="905256" y="4014216"/>
+            <a:ext cx="2293544" cy="219456"/>
+          </a:xfrm>
+          <a:prstGeom prst="rect">
+            <a:avLst/>
+          </a:prstGeom>
+          <a:noFill/>
+          <a:ln/>
+        </p:spPr>
+        <p:txBody>
+          <a:bodyPr wrap="square" lIns="0" tIns="0" rIns="0" bIns="0" rtlCol="0" anchor="ctr"/>
+          <a:lstStyle/>
+          <a:p>
+            <a:pPr marL="0" indent="0">
+              <a:buNone/>
+            </a:pPr>
+            <a:r>
+              <a:rPr lang="en-US" sz="950" dirty="0">
+                <a:solidFill>
+                  <a:srgbClr val="3D5468"/>
+                </a:solidFill>
+                <a:latin typeface="Calibri" pitchFamily="34" charset="0"/>
+                <a:ea typeface="Calibri" pitchFamily="34" charset="-122"/>
+                <a:cs typeface="Calibri" pitchFamily="34" charset="-120"/>
+              </a:rPr>
+              <a:t>ML risk score per cell</a:t>
+            </a:r>
+            <a:endParaRPr lang="en-US" sz="950" dirty="0"/>
+          </a:p>
+        </p:txBody>
+      </p:sp>
+      <p:sp>
+        <p:nvSpPr>
+          <p:cNvPr id="44" name="Shape 42"/>
+          <p:cNvSpPr/>
+          <p:nvPr/>
+        </p:nvSpPr>
+        <p:spPr>
+          <a:xfrm>
+            <a:off x="3473120" y="3758184"/>
+            <a:ext cx="2549576" cy="585216"/>
+          </a:xfrm>
+          <a:prstGeom prst="roundRect">
+            <a:avLst>
+              <a:gd name="adj" fmla="val 9375"/>
+            </a:avLst>
+          </a:prstGeom>
+          <a:solidFill>
+            <a:srgbClr val="FFFFFF"/>
+          </a:solidFill>
+          <a:ln w="9525">
+            <a:solidFill>
+              <a:srgbClr val="9FAFBE"/>
+            </a:solidFill>
+            <a:prstDash val="solid"/>
+          </a:ln>
+        </p:spPr>
+      </p:sp>
+      <p:sp>
+        <p:nvSpPr>
+          <p:cNvPr id="45" name="Text 43"/>
+          <p:cNvSpPr txBox="1"/>
+          <p:nvPr/>
+        </p:nvSpPr>
+        <p:spPr>
+          <a:xfrm>
+            <a:off x="3601136" y="3794760"/>
+            <a:ext cx="2293544" cy="219456"/>
+          </a:xfrm>
+          <a:prstGeom prst="rect">
+            <a:avLst/>
+          </a:prstGeom>
+          <a:noFill/>
+          <a:ln/>
+        </p:spPr>
+        <p:txBody>
+          <a:bodyPr wrap="square" lIns="0" tIns="0" rIns="0" bIns="0" rtlCol="0" anchor="ctr"/>
+          <a:lstStyle/>
+          <a:p>
+            <a:pPr marL="0" indent="0">
+              <a:buNone/>
+            </a:pPr>
+            <a:r>
+              <a:rPr lang="en-US" sz="1150" b="1" dirty="0">
+                <a:solidFill>
+                  <a:srgbClr val="11253C"/>
+                </a:solidFill>
+                <a:latin typeface="Calibri" pitchFamily="34" charset="0"/>
+                <a:ea typeface="Calibri" pitchFamily="34" charset="-122"/>
+                <a:cs typeface="Calibri" pitchFamily="34" charset="-120"/>
+              </a:rPr>
+              <a:t>Impact &amp; Exposure</a:t>
+            </a:r>
+            <a:endParaRPr lang="en-US" sz="1150" dirty="0"/>
+          </a:p>
+        </p:txBody>
+      </p:sp>
+      <p:sp>
+        <p:nvSpPr>
+          <p:cNvPr id="46" name="Text 44"/>
+          <p:cNvSpPr txBox="1"/>
+          <p:nvPr/>
+        </p:nvSpPr>
+        <p:spPr>
+          <a:xfrm>
+            <a:off x="3601136" y="4014216"/>
+            <a:ext cx="2293544" cy="219456"/>
+          </a:xfrm>
+          <a:prstGeom prst="rect">
+            <a:avLst/>
+          </a:prstGeom>
+          <a:noFill/>
+          <a:ln/>
+        </p:spPr>
+        <p:txBody>
+          <a:bodyPr wrap="square" lIns="0" tIns="0" rIns="0" bIns="0" rtlCol="0" anchor="ctr"/>
+          <a:lstStyle/>
+          <a:p>
+            <a:pPr marL="0" indent="0">
+              <a:buNone/>
+            </a:pPr>
+            <a:r>
+              <a:rPr lang="en-US" sz="950" dirty="0">
+                <a:solidFill>
+                  <a:srgbClr val="3D5468"/>
+                </a:solidFill>
+                <a:latin typeface="Calibri" pitchFamily="34" charset="0"/>
+                <a:ea typeface="Calibri" pitchFamily="34" charset="-122"/>
+                <a:cs typeface="Calibri" pitchFamily="34" charset="-120"/>
+              </a:rPr>
+              <a:t>people, roads, lifelines</a:t>
+            </a:r>
+            <a:endParaRPr lang="en-US" sz="950" dirty="0"/>
+          </a:p>
+        </p:txBody>
+      </p:sp>
+      <p:sp>
+        <p:nvSpPr>
+          <p:cNvPr id="47" name="Shape 45"/>
+          <p:cNvSpPr/>
+          <p:nvPr/>
+        </p:nvSpPr>
+        <p:spPr>
+          <a:xfrm>
+            <a:off x="6169000" y="3758184"/>
+            <a:ext cx="2549576" cy="585216"/>
+          </a:xfrm>
+          <a:prstGeom prst="roundRect">
+            <a:avLst>
+              <a:gd name="adj" fmla="val 9375"/>
+            </a:avLst>
+          </a:prstGeom>
+          <a:solidFill>
+            <a:srgbClr val="FFFFFF"/>
+          </a:solidFill>
+          <a:ln w="9525">
+            <a:solidFill>
+              <a:srgbClr val="9FAFBE"/>
+            </a:solidFill>
+            <a:prstDash val="solid"/>
+          </a:ln>
+        </p:spPr>
+      </p:sp>
+      <p:sp>
+        <p:nvSpPr>
+          <p:cNvPr id="48" name="Text 46"/>
+          <p:cNvSpPr txBox="1"/>
+          <p:nvPr/>
+        </p:nvSpPr>
+        <p:spPr>
+          <a:xfrm>
+            <a:off x="6297016" y="3794760"/>
+            <a:ext cx="2293544" cy="219456"/>
+          </a:xfrm>
+          <a:prstGeom prst="rect">
+            <a:avLst/>
+          </a:prstGeom>
+          <a:noFill/>
+          <a:ln/>
+        </p:spPr>
+        <p:txBody>
+          <a:bodyPr wrap="square" lIns="0" tIns="0" rIns="0" bIns="0" rtlCol="0" anchor="ctr"/>
+          <a:lstStyle/>
+          <a:p>
+            <a:pPr marL="0" indent="0">
+              <a:buNone/>
+            </a:pPr>
+            <a:r>
+              <a:rPr lang="en-US" sz="1150" b="1" dirty="0">
+                <a:solidFill>
+                  <a:srgbClr val="11253C"/>
+                </a:solidFill>
+                <a:latin typeface="Calibri" pitchFamily="34" charset="0"/>
+                <a:ea typeface="Calibri" pitchFamily="34" charset="-122"/>
+                <a:cs typeface="Calibri" pitchFamily="34" charset="-120"/>
+              </a:rPr>
+              <a:t>Allocation Planner</a:t>
+            </a:r>
+            <a:endParaRPr lang="en-US" sz="1150" dirty="0"/>
+          </a:p>
+        </p:txBody>
+      </p:sp>
+      <p:sp>
+        <p:nvSpPr>
+          <p:cNvPr id="49" name="Text 47"/>
+          <p:cNvSpPr txBox="1"/>
+          <p:nvPr/>
+        </p:nvSpPr>
+        <p:spPr>
+          <a:xfrm>
+            <a:off x="6297016" y="4014216"/>
+            <a:ext cx="2293544" cy="219456"/>
+          </a:xfrm>
+          <a:prstGeom prst="rect">
+            <a:avLst/>
+          </a:prstGeom>
+          <a:noFill/>
+          <a:ln/>
+        </p:spPr>
+        <p:txBody>
+          <a:bodyPr wrap="square" lIns="0" tIns="0" rIns="0" bIns="0" rtlCol="0" anchor="ctr"/>
+          <a:lstStyle/>
+          <a:p>
+            <a:pPr marL="0" indent="0">
+              <a:buNone/>
+            </a:pPr>
+            <a:r>
+              <a:rPr lang="en-US" sz="950" dirty="0">
+                <a:solidFill>
+                  <a:srgbClr val="3D5468"/>
+                </a:solidFill>
+                <a:latin typeface="Calibri" pitchFamily="34" charset="0"/>
+                <a:ea typeface="Calibri" pitchFamily="34" charset="-122"/>
+                <a:cs typeface="Calibri" pitchFamily="34" charset="-120"/>
+              </a:rPr>
+              <a:t>OR-Tools CP-SAT + OSRM</a:t>
+            </a:r>
+            <a:endParaRPr lang="en-US" sz="950" dirty="0"/>
+          </a:p>
+        </p:txBody>
+      </p:sp>
+      <p:sp>
+        <p:nvSpPr>
+          <p:cNvPr id="50" name="Shape 48"/>
+          <p:cNvSpPr/>
+          <p:nvPr/>
+        </p:nvSpPr>
+        <p:spPr>
+          <a:xfrm>
+            <a:off x="8864879" y="3758184"/>
+            <a:ext cx="2549576" cy="585216"/>
+          </a:xfrm>
+          <a:prstGeom prst="roundRect">
+            <a:avLst>
+              <a:gd name="adj" fmla="val 9375"/>
+            </a:avLst>
+          </a:prstGeom>
+          <a:solidFill>
+            <a:srgbClr val="FFFFFF"/>
+          </a:solidFill>
+          <a:ln w="9525">
+            <a:solidFill>
+              <a:srgbClr val="9FAFBE"/>
+            </a:solidFill>
+            <a:prstDash val="solid"/>
+          </a:ln>
+        </p:spPr>
+      </p:sp>
+      <p:sp>
+        <p:nvSpPr>
+          <p:cNvPr id="51" name="Text 49"/>
+          <p:cNvSpPr txBox="1"/>
+          <p:nvPr/>
+        </p:nvSpPr>
+        <p:spPr>
+          <a:xfrm>
+            <a:off x="8992895" y="3794760"/>
+            <a:ext cx="2293544" cy="219456"/>
+          </a:xfrm>
+          <a:prstGeom prst="rect">
+            <a:avLst/>
+          </a:prstGeom>
+          <a:noFill/>
+          <a:ln/>
+        </p:spPr>
+        <p:txBody>
+          <a:bodyPr wrap="square" lIns="0" tIns="0" rIns="0" bIns="0" rtlCol="0" anchor="ctr"/>
+          <a:lstStyle/>
+          <a:p>
+            <a:pPr marL="0" indent="0">
+              <a:buNone/>
+            </a:pPr>
+            <a:r>
+              <a:rPr lang="en-US" sz="1150" b="1" dirty="0">
+                <a:solidFill>
+                  <a:srgbClr val="11253C"/>
+                </a:solidFill>
+                <a:latin typeface="Calibri" pitchFamily="34" charset="0"/>
+                <a:ea typeface="Calibri" pitchFamily="34" charset="-122"/>
+                <a:cs typeface="Calibri" pitchFamily="34" charset="-120"/>
+              </a:rPr>
+              <a:t>Guidance Agent</a:t>
+            </a:r>
+            <a:endParaRPr lang="en-US" sz="1150" dirty="0"/>
+          </a:p>
+        </p:txBody>
+      </p:sp>
+      <p:sp>
+        <p:nvSpPr>
+          <p:cNvPr id="52" name="Text 50"/>
+          <p:cNvSpPr txBox="1"/>
+          <p:nvPr/>
+        </p:nvSpPr>
+        <p:spPr>
+          <a:xfrm>
+            <a:off x="8992895" y="4014216"/>
+            <a:ext cx="2293544" cy="219456"/>
+          </a:xfrm>
+          <a:prstGeom prst="rect">
+            <a:avLst/>
+          </a:prstGeom>
+          <a:noFill/>
+          <a:ln/>
+        </p:spPr>
+        <p:txBody>
+          <a:bodyPr wrap="square" lIns="0" tIns="0" rIns="0" bIns="0" rtlCol="0" anchor="ctr"/>
+          <a:lstStyle/>
+          <a:p>
+            <a:pPr marL="0" indent="0">
+              <a:buNone/>
+            </a:pPr>
+            <a:r>
+              <a:rPr lang="en-US" sz="950" dirty="0">
+                <a:solidFill>
+                  <a:srgbClr val="3D5468"/>
+                </a:solidFill>
+                <a:latin typeface="Calibri" pitchFamily="34" charset="0"/>
+                <a:ea typeface="Calibri" pitchFamily="34" charset="-122"/>
+                <a:cs typeface="Calibri" pitchFamily="34" charset="-120"/>
+              </a:rPr>
+              <a:t>route, language, voice</a:t>
+            </a:r>
+            <a:endParaRPr lang="en-US" sz="950" dirty="0"/>
+          </a:p>
+        </p:txBody>
+      </p:sp>
+      <p:sp>
+        <p:nvSpPr>
+          <p:cNvPr id="53" name="Shape 51"/>
+          <p:cNvSpPr/>
+          <p:nvPr/>
+        </p:nvSpPr>
+        <p:spPr>
+          <a:xfrm>
+            <a:off x="6013552" y="4498848"/>
+            <a:ext cx="164592" cy="137160"/>
+          </a:xfrm>
+          <a:prstGeom prst="downArrow">
+            <a:avLst/>
+          </a:prstGeom>
+          <a:solidFill>
+            <a:srgbClr val="9FAFBE"/>
+          </a:solidFill>
+          <a:ln w="12700">
+            <a:solidFill>
+              <a:srgbClr val="9FAFBE"/>
+            </a:solidFill>
+            <a:prstDash val="solid"/>
+          </a:ln>
+        </p:spPr>
+      </p:sp>
+      <p:sp>
+        <p:nvSpPr>
+          <p:cNvPr id="54" name="Text 52"/>
+          <p:cNvSpPr txBox="1"/>
+          <p:nvPr/>
+        </p:nvSpPr>
+        <p:spPr>
+          <a:xfrm>
+            <a:off x="640080" y="4700016"/>
+            <a:ext cx="6400800" cy="201168"/>
+          </a:xfrm>
+          <a:prstGeom prst="rect">
+            <a:avLst/>
+          </a:prstGeom>
+          <a:noFill/>
+          <a:ln/>
+        </p:spPr>
+        <p:txBody>
+          <a:bodyPr wrap="square" lIns="0" tIns="0" rIns="0" bIns="0" rtlCol="0" anchor="ctr"/>
+          <a:lstStyle/>
+          <a:p>
+            <a:pPr marL="0" indent="0">
+              <a:buNone/>
+            </a:pPr>
+            <a:r>
+              <a:rPr lang="en-US" sz="950" b="1" kern="0" spc="140" dirty="0">
+                <a:solidFill>
+                  <a:srgbClr val="6E8194"/>
+                </a:solidFill>
+                <a:latin typeface="Calibri" pitchFamily="34" charset="0"/>
+                <a:ea typeface="Calibri" pitchFamily="34" charset="-122"/>
+                <a:cs typeface="Calibri" pitchFamily="34" charset="-120"/>
+              </a:rPr>
+              <a:t>4   POLICY-GROUNDED HUMAN-IN-THE-LOOP GATE</a:t>
+            </a:r>
+            <a:endParaRPr lang="en-US" sz="950" dirty="0"/>
+          </a:p>
+        </p:txBody>
+      </p:sp>
+      <p:sp>
+        <p:nvSpPr>
+          <p:cNvPr id="55" name="Shape 53"/>
+          <p:cNvSpPr/>
+          <p:nvPr/>
+        </p:nvSpPr>
+        <p:spPr>
+          <a:xfrm>
+            <a:off x="640080" y="4919472"/>
+            <a:ext cx="3931920" cy="566928"/>
+          </a:xfrm>
+          <a:prstGeom prst="rect">
+            <a:avLst/>
           </a:prstGeom>
           <a:solidFill>
             <a:srgbClr val="FFFFFF"/>
@@ -7132,86 +8194,82 @@
       </p:sp>
       <p:sp>
         <p:nvSpPr>
-          <p:cNvPr id="28" name="Shape 26"/>
+          <p:cNvPr id="56" name="Text 54"/>
+          <p:cNvSpPr txBox="1"/>
+          <p:nvPr/>
+        </p:nvSpPr>
+        <p:spPr>
+          <a:xfrm>
+            <a:off x="804672" y="4919472"/>
+            <a:ext cx="3602736" cy="566928"/>
+          </a:xfrm>
+          <a:prstGeom prst="rect">
+            <a:avLst/>
+          </a:prstGeom>
+          <a:noFill/>
+          <a:ln/>
+        </p:spPr>
+        <p:txBody>
+          <a:bodyPr wrap="square" lIns="0" tIns="0" rIns="0" bIns="0" rtlCol="0" anchor="ctr"/>
+          <a:lstStyle/>
+          <a:p>
+            <a:pPr marL="0" indent="0">
+              <a:lnSpc>
+                <a:spcPts val="1400"/>
+              </a:lnSpc>
+              <a:buNone/>
+            </a:pPr>
+            <a:r>
+              <a:rPr lang="en-US" sz="1050" b="1" dirty="0">
+                <a:solidFill>
+                  <a:srgbClr val="11253C"/>
+                </a:solidFill>
+                <a:latin typeface="Calibri" pitchFamily="34" charset="0"/>
+                <a:ea typeface="Calibri" pitchFamily="34" charset="-122"/>
+                <a:cs typeface="Calibri" pitchFamily="34" charset="-120"/>
+              </a:rPr>
+              <a:t>Policy &amp; SOP knowledge base  </a:t>
+            </a:r>
+            <a:endParaRPr lang="en-US" sz="1050" dirty="0"/>
+          </a:p>
+          <a:p>
+            <a:pPr marL="0" indent="0">
+              <a:lnSpc>
+                <a:spcPts val="1400"/>
+              </a:lnSpc>
+              <a:buNone/>
+            </a:pPr>
+            <a:r>
+              <a:rPr lang="en-US" sz="1050" dirty="0">
+                <a:solidFill>
+                  <a:srgbClr val="3D5468"/>
+                </a:solidFill>
+                <a:latin typeface="Calibri" pitchFamily="34" charset="0"/>
+                <a:ea typeface="Calibri" pitchFamily="34" charset="-122"/>
+                <a:cs typeface="Calibri" pitchFamily="34" charset="-120"/>
+              </a:rPr>
+              <a:t>NDMA SOPs · municipal DM plan · delegation matrix (RAG)</a:t>
+            </a:r>
+            <a:endParaRPr lang="en-US" sz="1050" dirty="0"/>
+          </a:p>
+        </p:txBody>
+      </p:sp>
+      <p:sp>
+        <p:nvSpPr>
+          <p:cNvPr id="57" name="Shape 55"/>
           <p:cNvSpPr/>
           <p:nvPr/>
         </p:nvSpPr>
         <p:spPr>
           <a:xfrm>
-            <a:off x="7393656" y="2807208"/>
-            <a:ext cx="118872" cy="118872"/>
-          </a:xfrm>
-          <a:prstGeom prst="ellipse">
+            <a:off x="4754880" y="4919472"/>
+            <a:ext cx="6796735" cy="566928"/>
+          </a:xfrm>
+          <a:prstGeom prst="rect">
             <a:avLst/>
           </a:prstGeom>
           <a:solidFill>
-            <a:srgbClr val="C97A20"/>
-          </a:solidFill>
-          <a:ln w="12700">
-            <a:solidFill>
-              <a:srgbClr val="C97A20"/>
-            </a:solidFill>
-            <a:prstDash val="solid"/>
-          </a:ln>
-        </p:spPr>
-      </p:sp>
-      <p:sp>
-        <p:nvSpPr>
-          <p:cNvPr id="29" name="Text 27"/>
-          <p:cNvSpPr txBox="1"/>
-          <p:nvPr/>
-        </p:nvSpPr>
-        <p:spPr>
-          <a:xfrm>
-            <a:off x="7576536" y="2651760"/>
-            <a:ext cx="1608064" cy="420624"/>
-          </a:xfrm>
-          <a:prstGeom prst="rect">
-            <a:avLst/>
-          </a:prstGeom>
-          <a:noFill/>
-          <a:ln/>
-        </p:spPr>
-        <p:txBody>
-          <a:bodyPr wrap="square" lIns="0" tIns="0" rIns="0" bIns="0" rtlCol="0" anchor="ctr"/>
-          <a:lstStyle/>
-          <a:p>
-            <a:pPr indent="0" marL="0">
-              <a:buNone/>
-            </a:pPr>
-            <a:r>
-              <a:rPr lang="en-US" sz="1150" b="1" dirty="0">
-                <a:solidFill>
-                  <a:srgbClr val="11253C"/>
-                </a:solidFill>
-                <a:latin typeface="Calibri" pitchFamily="34" charset="0"/>
-                <a:ea typeface="Calibri" pitchFamily="34" charset="-122"/>
-                <a:cs typeface="Calibri" pitchFamily="34" charset="-120"/>
-              </a:rPr>
-              <a:t>Wildfire</a:t>
-            </a:r>
-            <a:endParaRPr lang="en-US" sz="1150" dirty="0"/>
-          </a:p>
-        </p:txBody>
-      </p:sp>
-      <p:sp>
-        <p:nvSpPr>
-          <p:cNvPr id="30" name="Shape 28"/>
-          <p:cNvSpPr/>
-          <p:nvPr/>
-        </p:nvSpPr>
-        <p:spPr>
-          <a:xfrm>
-            <a:off x="9404055" y="2651760"/>
-            <a:ext cx="2010400" cy="420624"/>
-          </a:xfrm>
-          <a:prstGeom prst="roundRect">
-            <a:avLst>
-              <a:gd name="adj" fmla="val 13043"/>
-            </a:avLst>
-          </a:prstGeom>
-          <a:solidFill>
-            <a:srgbClr val="FFFFFF"/>
+            <a:srgbClr val="F3F6F9"/>
           </a:solidFill>
           <a:ln w="9525">
             <a:solidFill>
@@ -7223,77 +8281,75 @@
       </p:sp>
       <p:sp>
         <p:nvSpPr>
-          <p:cNvPr id="31" name="Shape 29"/>
+          <p:cNvPr id="58" name="Text 56"/>
+          <p:cNvSpPr txBox="1"/>
+          <p:nvPr/>
+        </p:nvSpPr>
+        <p:spPr>
+          <a:xfrm>
+            <a:off x="4919472" y="4919472"/>
+            <a:ext cx="6467551" cy="566928"/>
+          </a:xfrm>
+          <a:prstGeom prst="rect">
+            <a:avLst/>
+          </a:prstGeom>
+          <a:noFill/>
+          <a:ln/>
+        </p:spPr>
+        <p:txBody>
+          <a:bodyPr wrap="square" lIns="0" tIns="0" rIns="0" bIns="0" rtlCol="0" anchor="ctr"/>
+          <a:lstStyle/>
+          <a:p>
+            <a:pPr marL="0" indent="0">
+              <a:lnSpc>
+                <a:spcPts val="1400"/>
+              </a:lnSpc>
+              <a:buNone/>
+            </a:pPr>
+            <a:r>
+              <a:rPr lang="en-US" sz="1050" b="1" dirty="0">
+                <a:solidFill>
+                  <a:srgbClr val="11253C"/>
+                </a:solidFill>
+                <a:latin typeface="Calibri" pitchFamily="34" charset="0"/>
+                <a:ea typeface="Calibri" pitchFamily="34" charset="-122"/>
+                <a:cs typeface="Calibri" pitchFamily="34" charset="-120"/>
+              </a:rPr>
+              <a:t>Within cited authority → auto-issue</a:t>
+            </a:r>
+            <a:endParaRPr lang="en-US" sz="1050" dirty="0"/>
+          </a:p>
+          <a:p>
+            <a:pPr marL="0" indent="0">
+              <a:lnSpc>
+                <a:spcPts val="1400"/>
+              </a:lnSpc>
+              <a:buNone/>
+            </a:pPr>
+            <a:r>
+              <a:rPr lang="en-US" sz="1050" b="1" dirty="0">
+                <a:solidFill>
+                  <a:srgbClr val="B23A24"/>
+                </a:solidFill>
+                <a:latin typeface="Calibri" pitchFamily="34" charset="0"/>
+                <a:ea typeface="Calibri" pitchFamily="34" charset="-122"/>
+                <a:cs typeface="Calibri" pitchFamily="34" charset="-120"/>
+              </a:rPr>
+              <a:t>Outside authority or low confidence → officer approval, with the clause shown</a:t>
+            </a:r>
+            <a:endParaRPr lang="en-US" sz="1050" dirty="0"/>
+          </a:p>
+        </p:txBody>
+      </p:sp>
+      <p:sp>
+        <p:nvSpPr>
+          <p:cNvPr id="59" name="Shape 57"/>
           <p:cNvSpPr/>
           <p:nvPr/>
         </p:nvSpPr>
         <p:spPr>
           <a:xfrm>
-            <a:off x="9550359" y="2807208"/>
-            <a:ext cx="118872" cy="118872"/>
-          </a:xfrm>
-          <a:prstGeom prst="ellipse">
-            <a:avLst/>
-          </a:prstGeom>
-          <a:solidFill>
-            <a:srgbClr val="4E6B41"/>
-          </a:solidFill>
-          <a:ln w="12700">
-            <a:solidFill>
-              <a:srgbClr val="4E6B41"/>
-            </a:solidFill>
-            <a:prstDash val="solid"/>
-          </a:ln>
-        </p:spPr>
-      </p:sp>
-      <p:sp>
-        <p:nvSpPr>
-          <p:cNvPr id="32" name="Text 30"/>
-          <p:cNvSpPr txBox="1"/>
-          <p:nvPr/>
-        </p:nvSpPr>
-        <p:spPr>
-          <a:xfrm>
-            <a:off x="9733239" y="2651760"/>
-            <a:ext cx="1608064" cy="420624"/>
-          </a:xfrm>
-          <a:prstGeom prst="rect">
-            <a:avLst/>
-          </a:prstGeom>
-          <a:noFill/>
-          <a:ln/>
-        </p:spPr>
-        <p:txBody>
-          <a:bodyPr wrap="square" lIns="0" tIns="0" rIns="0" bIns="0" rtlCol="0" anchor="ctr"/>
-          <a:lstStyle/>
-          <a:p>
-            <a:pPr indent="0" marL="0">
-              <a:buNone/>
-            </a:pPr>
-            <a:r>
-              <a:rPr lang="en-US" sz="1150" b="1" dirty="0">
-                <a:solidFill>
-                  <a:srgbClr val="11253C"/>
-                </a:solidFill>
-                <a:latin typeface="Calibri" pitchFamily="34" charset="0"/>
-                <a:ea typeface="Calibri" pitchFamily="34" charset="-122"/>
-                <a:cs typeface="Calibri" pitchFamily="34" charset="-120"/>
-              </a:rPr>
-              <a:t>Seismic</a:t>
-            </a:r>
-            <a:endParaRPr lang="en-US" sz="1150" dirty="0"/>
-          </a:p>
-        </p:txBody>
-      </p:sp>
-      <p:sp>
-        <p:nvSpPr>
-          <p:cNvPr id="33" name="Shape 31"/>
-          <p:cNvSpPr/>
-          <p:nvPr/>
-        </p:nvSpPr>
-        <p:spPr>
-          <a:xfrm>
-            <a:off x="6013552" y="3236976"/>
+            <a:off x="6013552" y="5541264"/>
             <a:ext cx="164592" cy="137160"/>
           </a:xfrm>
           <a:prstGeom prst="downArrow">
@@ -7312,754 +8368,7 @@
       </p:sp>
       <p:sp>
         <p:nvSpPr>
-          <p:cNvPr id="34" name="Text 32"/>
-          <p:cNvSpPr txBox="1"/>
-          <p:nvPr/>
-        </p:nvSpPr>
-        <p:spPr>
-          <a:xfrm>
-            <a:off x="640080" y="3438144"/>
-            <a:ext cx="8686800" cy="201168"/>
-          </a:xfrm>
-          <a:prstGeom prst="rect">
-            <a:avLst/>
-          </a:prstGeom>
-          <a:noFill/>
-          <a:ln/>
-        </p:spPr>
-        <p:txBody>
-          <a:bodyPr wrap="square" lIns="0" tIns="0" rIns="0" bIns="0" rtlCol="0" anchor="ctr"/>
-          <a:lstStyle/>
-          <a:p>
-            <a:pPr indent="0" marL="0">
-              <a:buNone/>
-            </a:pPr>
-            <a:r>
-              <a:rPr lang="en-US" sz="950" b="1" spc="140" kern="0" dirty="0">
-                <a:solidFill>
-                  <a:srgbClr val="6E8194"/>
-                </a:solidFill>
-                <a:latin typeface="Calibri" pitchFamily="34" charset="0"/>
-                <a:ea typeface="Calibri" pitchFamily="34" charset="-122"/>
-                <a:cs typeface="Calibri" pitchFamily="34" charset="-120"/>
-              </a:rPr>
-              <a:t>3   AGENT ORCHESTRATOR   —   LangGraph state machine over LangChain tools</a:t>
-            </a:r>
-            <a:endParaRPr lang="en-US" sz="950" dirty="0"/>
-          </a:p>
-        </p:txBody>
-      </p:sp>
-      <p:sp>
-        <p:nvSpPr>
-          <p:cNvPr id="35" name="Shape 33"/>
-          <p:cNvSpPr/>
-          <p:nvPr/>
-        </p:nvSpPr>
-        <p:spPr>
-          <a:xfrm>
-            <a:off x="640080" y="3657600"/>
-            <a:ext cx="10911535" cy="786384"/>
-          </a:xfrm>
-          <a:prstGeom prst="rect">
-            <a:avLst/>
-          </a:prstGeom>
-          <a:solidFill>
-            <a:srgbClr val="E8EEF3"/>
-          </a:solidFill>
-          <a:ln w="15875">
-            <a:solidFill>
-              <a:srgbClr val="9FAFBE"/>
-            </a:solidFill>
-            <a:prstDash val="solid"/>
-          </a:ln>
-        </p:spPr>
-      </p:sp>
-      <p:sp>
-        <p:nvSpPr>
-          <p:cNvPr id="36" name="Shape 34"/>
-          <p:cNvSpPr/>
-          <p:nvPr/>
-        </p:nvSpPr>
-        <p:spPr>
-          <a:xfrm>
-            <a:off x="777240" y="3758184"/>
-            <a:ext cx="2549576" cy="585216"/>
-          </a:xfrm>
-          <a:prstGeom prst="roundRect">
-            <a:avLst>
-              <a:gd name="adj" fmla="val 9375"/>
-            </a:avLst>
-          </a:prstGeom>
-          <a:solidFill>
-            <a:srgbClr val="FFFFFF"/>
-          </a:solidFill>
-          <a:ln w="9525">
-            <a:solidFill>
-              <a:srgbClr val="9FAFBE"/>
-            </a:solidFill>
-            <a:prstDash val="solid"/>
-          </a:ln>
-        </p:spPr>
-      </p:sp>
-      <p:sp>
-        <p:nvSpPr>
-          <p:cNvPr id="37" name="Text 35"/>
-          <p:cNvSpPr txBox="1"/>
-          <p:nvPr/>
-        </p:nvSpPr>
-        <p:spPr>
-          <a:xfrm>
-            <a:off x="905256" y="3794760"/>
-            <a:ext cx="2293544" cy="219456"/>
-          </a:xfrm>
-          <a:prstGeom prst="rect">
-            <a:avLst/>
-          </a:prstGeom>
-          <a:noFill/>
-          <a:ln/>
-        </p:spPr>
-        <p:txBody>
-          <a:bodyPr wrap="square" lIns="0" tIns="0" rIns="0" bIns="0" rtlCol="0" anchor="ctr"/>
-          <a:lstStyle/>
-          <a:p>
-            <a:pPr indent="0" marL="0">
-              <a:buNone/>
-            </a:pPr>
-            <a:r>
-              <a:rPr lang="en-US" sz="1150" b="1" dirty="0">
-                <a:solidFill>
-                  <a:srgbClr val="11253C"/>
-                </a:solidFill>
-                <a:latin typeface="Calibri" pitchFamily="34" charset="0"/>
-                <a:ea typeface="Calibri" pitchFamily="34" charset="-122"/>
-                <a:cs typeface="Calibri" pitchFamily="34" charset="-120"/>
-              </a:rPr>
-              <a:t>Hazard Analyst</a:t>
-            </a:r>
-            <a:endParaRPr lang="en-US" sz="1150" dirty="0"/>
-          </a:p>
-        </p:txBody>
-      </p:sp>
-      <p:sp>
-        <p:nvSpPr>
-          <p:cNvPr id="38" name="Text 36"/>
-          <p:cNvSpPr txBox="1"/>
-          <p:nvPr/>
-        </p:nvSpPr>
-        <p:spPr>
-          <a:xfrm>
-            <a:off x="905256" y="4014216"/>
-            <a:ext cx="2293544" cy="219456"/>
-          </a:xfrm>
-          <a:prstGeom prst="rect">
-            <a:avLst/>
-          </a:prstGeom>
-          <a:noFill/>
-          <a:ln/>
-        </p:spPr>
-        <p:txBody>
-          <a:bodyPr wrap="square" lIns="0" tIns="0" rIns="0" bIns="0" rtlCol="0" anchor="ctr"/>
-          <a:lstStyle/>
-          <a:p>
-            <a:pPr indent="0" marL="0">
-              <a:buNone/>
-            </a:pPr>
-            <a:r>
-              <a:rPr lang="en-US" sz="950" dirty="0">
-                <a:solidFill>
-                  <a:srgbClr val="3D5468"/>
-                </a:solidFill>
-                <a:latin typeface="Calibri" pitchFamily="34" charset="0"/>
-                <a:ea typeface="Calibri" pitchFamily="34" charset="-122"/>
-                <a:cs typeface="Calibri" pitchFamily="34" charset="-120"/>
-              </a:rPr>
-              <a:t>ML risk score per cell</a:t>
-            </a:r>
-            <a:endParaRPr lang="en-US" sz="950" dirty="0"/>
-          </a:p>
-        </p:txBody>
-      </p:sp>
-      <p:sp>
-        <p:nvSpPr>
-          <p:cNvPr id="39" name="Shape 37"/>
-          <p:cNvSpPr/>
-          <p:nvPr/>
-        </p:nvSpPr>
-        <p:spPr>
-          <a:xfrm>
-            <a:off x="3473120" y="3758184"/>
-            <a:ext cx="2549576" cy="585216"/>
-          </a:xfrm>
-          <a:prstGeom prst="roundRect">
-            <a:avLst>
-              <a:gd name="adj" fmla="val 9375"/>
-            </a:avLst>
-          </a:prstGeom>
-          <a:solidFill>
-            <a:srgbClr val="FFFFFF"/>
-          </a:solidFill>
-          <a:ln w="9525">
-            <a:solidFill>
-              <a:srgbClr val="9FAFBE"/>
-            </a:solidFill>
-            <a:prstDash val="solid"/>
-          </a:ln>
-        </p:spPr>
-      </p:sp>
-      <p:sp>
-        <p:nvSpPr>
-          <p:cNvPr id="40" name="Text 38"/>
-          <p:cNvSpPr txBox="1"/>
-          <p:nvPr/>
-        </p:nvSpPr>
-        <p:spPr>
-          <a:xfrm>
-            <a:off x="3601136" y="3794760"/>
-            <a:ext cx="2293544" cy="219456"/>
-          </a:xfrm>
-          <a:prstGeom prst="rect">
-            <a:avLst/>
-          </a:prstGeom>
-          <a:noFill/>
-          <a:ln/>
-        </p:spPr>
-        <p:txBody>
-          <a:bodyPr wrap="square" lIns="0" tIns="0" rIns="0" bIns="0" rtlCol="0" anchor="ctr"/>
-          <a:lstStyle/>
-          <a:p>
-            <a:pPr indent="0" marL="0">
-              <a:buNone/>
-            </a:pPr>
-            <a:r>
-              <a:rPr lang="en-US" sz="1150" b="1" dirty="0">
-                <a:solidFill>
-                  <a:srgbClr val="11253C"/>
-                </a:solidFill>
-                <a:latin typeface="Calibri" pitchFamily="34" charset="0"/>
-                <a:ea typeface="Calibri" pitchFamily="34" charset="-122"/>
-                <a:cs typeface="Calibri" pitchFamily="34" charset="-120"/>
-              </a:rPr>
-              <a:t>Impact &amp; Exposure</a:t>
-            </a:r>
-            <a:endParaRPr lang="en-US" sz="1150" dirty="0"/>
-          </a:p>
-        </p:txBody>
-      </p:sp>
-      <p:sp>
-        <p:nvSpPr>
-          <p:cNvPr id="41" name="Text 39"/>
-          <p:cNvSpPr txBox="1"/>
-          <p:nvPr/>
-        </p:nvSpPr>
-        <p:spPr>
-          <a:xfrm>
-            <a:off x="3601136" y="4014216"/>
-            <a:ext cx="2293544" cy="219456"/>
-          </a:xfrm>
-          <a:prstGeom prst="rect">
-            <a:avLst/>
-          </a:prstGeom>
-          <a:noFill/>
-          <a:ln/>
-        </p:spPr>
-        <p:txBody>
-          <a:bodyPr wrap="square" lIns="0" tIns="0" rIns="0" bIns="0" rtlCol="0" anchor="ctr"/>
-          <a:lstStyle/>
-          <a:p>
-            <a:pPr indent="0" marL="0">
-              <a:buNone/>
-            </a:pPr>
-            <a:r>
-              <a:rPr lang="en-US" sz="950" dirty="0">
-                <a:solidFill>
-                  <a:srgbClr val="3D5468"/>
-                </a:solidFill>
-                <a:latin typeface="Calibri" pitchFamily="34" charset="0"/>
-                <a:ea typeface="Calibri" pitchFamily="34" charset="-122"/>
-                <a:cs typeface="Calibri" pitchFamily="34" charset="-120"/>
-              </a:rPr>
-              <a:t>people, roads, lifelines</a:t>
-            </a:r>
-            <a:endParaRPr lang="en-US" sz="950" dirty="0"/>
-          </a:p>
-        </p:txBody>
-      </p:sp>
-      <p:sp>
-        <p:nvSpPr>
-          <p:cNvPr id="42" name="Shape 40"/>
-          <p:cNvSpPr/>
-          <p:nvPr/>
-        </p:nvSpPr>
-        <p:spPr>
-          <a:xfrm>
-            <a:off x="6169000" y="3758184"/>
-            <a:ext cx="2549576" cy="585216"/>
-          </a:xfrm>
-          <a:prstGeom prst="roundRect">
-            <a:avLst>
-              <a:gd name="adj" fmla="val 9375"/>
-            </a:avLst>
-          </a:prstGeom>
-          <a:solidFill>
-            <a:srgbClr val="FFFFFF"/>
-          </a:solidFill>
-          <a:ln w="9525">
-            <a:solidFill>
-              <a:srgbClr val="9FAFBE"/>
-            </a:solidFill>
-            <a:prstDash val="solid"/>
-          </a:ln>
-        </p:spPr>
-      </p:sp>
-      <p:sp>
-        <p:nvSpPr>
-          <p:cNvPr id="43" name="Text 41"/>
-          <p:cNvSpPr txBox="1"/>
-          <p:nvPr/>
-        </p:nvSpPr>
-        <p:spPr>
-          <a:xfrm>
-            <a:off x="6297016" y="3794760"/>
-            <a:ext cx="2293544" cy="219456"/>
-          </a:xfrm>
-          <a:prstGeom prst="rect">
-            <a:avLst/>
-          </a:prstGeom>
-          <a:noFill/>
-          <a:ln/>
-        </p:spPr>
-        <p:txBody>
-          <a:bodyPr wrap="square" lIns="0" tIns="0" rIns="0" bIns="0" rtlCol="0" anchor="ctr"/>
-          <a:lstStyle/>
-          <a:p>
-            <a:pPr indent="0" marL="0">
-              <a:buNone/>
-            </a:pPr>
-            <a:r>
-              <a:rPr lang="en-US" sz="1150" b="1" dirty="0">
-                <a:solidFill>
-                  <a:srgbClr val="11253C"/>
-                </a:solidFill>
-                <a:latin typeface="Calibri" pitchFamily="34" charset="0"/>
-                <a:ea typeface="Calibri" pitchFamily="34" charset="-122"/>
-                <a:cs typeface="Calibri" pitchFamily="34" charset="-120"/>
-              </a:rPr>
-              <a:t>Allocation Planner</a:t>
-            </a:r>
-            <a:endParaRPr lang="en-US" sz="1150" dirty="0"/>
-          </a:p>
-        </p:txBody>
-      </p:sp>
-      <p:sp>
-        <p:nvSpPr>
-          <p:cNvPr id="44" name="Text 42"/>
-          <p:cNvSpPr txBox="1"/>
-          <p:nvPr/>
-        </p:nvSpPr>
-        <p:spPr>
-          <a:xfrm>
-            <a:off x="6297016" y="4014216"/>
-            <a:ext cx="2293544" cy="219456"/>
-          </a:xfrm>
-          <a:prstGeom prst="rect">
-            <a:avLst/>
-          </a:prstGeom>
-          <a:noFill/>
-          <a:ln/>
-        </p:spPr>
-        <p:txBody>
-          <a:bodyPr wrap="square" lIns="0" tIns="0" rIns="0" bIns="0" rtlCol="0" anchor="ctr"/>
-          <a:lstStyle/>
-          <a:p>
-            <a:pPr indent="0" marL="0">
-              <a:buNone/>
-            </a:pPr>
-            <a:r>
-              <a:rPr lang="en-US" sz="950" dirty="0">
-                <a:solidFill>
-                  <a:srgbClr val="3D5468"/>
-                </a:solidFill>
-                <a:latin typeface="Calibri" pitchFamily="34" charset="0"/>
-                <a:ea typeface="Calibri" pitchFamily="34" charset="-122"/>
-                <a:cs typeface="Calibri" pitchFamily="34" charset="-120"/>
-              </a:rPr>
-              <a:t>OR-Tools CP-SAT + OSRM</a:t>
-            </a:r>
-            <a:endParaRPr lang="en-US" sz="950" dirty="0"/>
-          </a:p>
-        </p:txBody>
-      </p:sp>
-      <p:sp>
-        <p:nvSpPr>
-          <p:cNvPr id="45" name="Shape 43"/>
-          <p:cNvSpPr/>
-          <p:nvPr/>
-        </p:nvSpPr>
-        <p:spPr>
-          <a:xfrm>
-            <a:off x="8864879" y="3758184"/>
-            <a:ext cx="2549576" cy="585216"/>
-          </a:xfrm>
-          <a:prstGeom prst="roundRect">
-            <a:avLst>
-              <a:gd name="adj" fmla="val 9375"/>
-            </a:avLst>
-          </a:prstGeom>
-          <a:solidFill>
-            <a:srgbClr val="FFFFFF"/>
-          </a:solidFill>
-          <a:ln w="9525">
-            <a:solidFill>
-              <a:srgbClr val="9FAFBE"/>
-            </a:solidFill>
-            <a:prstDash val="solid"/>
-          </a:ln>
-        </p:spPr>
-      </p:sp>
-      <p:sp>
-        <p:nvSpPr>
-          <p:cNvPr id="46" name="Text 44"/>
-          <p:cNvSpPr txBox="1"/>
-          <p:nvPr/>
-        </p:nvSpPr>
-        <p:spPr>
-          <a:xfrm>
-            <a:off x="8992895" y="3794760"/>
-            <a:ext cx="2293544" cy="219456"/>
-          </a:xfrm>
-          <a:prstGeom prst="rect">
-            <a:avLst/>
-          </a:prstGeom>
-          <a:noFill/>
-          <a:ln/>
-        </p:spPr>
-        <p:txBody>
-          <a:bodyPr wrap="square" lIns="0" tIns="0" rIns="0" bIns="0" rtlCol="0" anchor="ctr"/>
-          <a:lstStyle/>
-          <a:p>
-            <a:pPr indent="0" marL="0">
-              <a:buNone/>
-            </a:pPr>
-            <a:r>
-              <a:rPr lang="en-US" sz="1150" b="1" dirty="0">
-                <a:solidFill>
-                  <a:srgbClr val="11253C"/>
-                </a:solidFill>
-                <a:latin typeface="Calibri" pitchFamily="34" charset="0"/>
-                <a:ea typeface="Calibri" pitchFamily="34" charset="-122"/>
-                <a:cs typeface="Calibri" pitchFamily="34" charset="-120"/>
-              </a:rPr>
-              <a:t>Guidance Agent</a:t>
-            </a:r>
-            <a:endParaRPr lang="en-US" sz="1150" dirty="0"/>
-          </a:p>
-        </p:txBody>
-      </p:sp>
-      <p:sp>
-        <p:nvSpPr>
-          <p:cNvPr id="47" name="Text 45"/>
-          <p:cNvSpPr txBox="1"/>
-          <p:nvPr/>
-        </p:nvSpPr>
-        <p:spPr>
-          <a:xfrm>
-            <a:off x="8992895" y="4014216"/>
-            <a:ext cx="2293544" cy="219456"/>
-          </a:xfrm>
-          <a:prstGeom prst="rect">
-            <a:avLst/>
-          </a:prstGeom>
-          <a:noFill/>
-          <a:ln/>
-        </p:spPr>
-        <p:txBody>
-          <a:bodyPr wrap="square" lIns="0" tIns="0" rIns="0" bIns="0" rtlCol="0" anchor="ctr"/>
-          <a:lstStyle/>
-          <a:p>
-            <a:pPr indent="0" marL="0">
-              <a:buNone/>
-            </a:pPr>
-            <a:r>
-              <a:rPr lang="en-US" sz="950" dirty="0">
-                <a:solidFill>
-                  <a:srgbClr val="3D5468"/>
-                </a:solidFill>
-                <a:latin typeface="Calibri" pitchFamily="34" charset="0"/>
-                <a:ea typeface="Calibri" pitchFamily="34" charset="-122"/>
-                <a:cs typeface="Calibri" pitchFamily="34" charset="-120"/>
-              </a:rPr>
-              <a:t>route, language, voice</a:t>
-            </a:r>
-            <a:endParaRPr lang="en-US" sz="950" dirty="0"/>
-          </a:p>
-        </p:txBody>
-      </p:sp>
-      <p:sp>
-        <p:nvSpPr>
-          <p:cNvPr id="48" name="Shape 46"/>
-          <p:cNvSpPr/>
-          <p:nvPr/>
-        </p:nvSpPr>
-        <p:spPr>
-          <a:xfrm>
-            <a:off x="6013552" y="4498848"/>
-            <a:ext cx="164592" cy="137160"/>
-          </a:xfrm>
-          <a:prstGeom prst="downArrow">
-            <a:avLst/>
-          </a:prstGeom>
-          <a:solidFill>
-            <a:srgbClr val="9FAFBE"/>
-          </a:solidFill>
-          <a:ln w="12700">
-            <a:solidFill>
-              <a:srgbClr val="9FAFBE"/>
-            </a:solidFill>
-            <a:prstDash val="solid"/>
-          </a:ln>
-        </p:spPr>
-      </p:sp>
-      <p:sp>
-        <p:nvSpPr>
-          <p:cNvPr id="49" name="Text 47"/>
-          <p:cNvSpPr txBox="1"/>
-          <p:nvPr/>
-        </p:nvSpPr>
-        <p:spPr>
-          <a:xfrm>
-            <a:off x="640080" y="4700016"/>
-            <a:ext cx="6400800" cy="201168"/>
-          </a:xfrm>
-          <a:prstGeom prst="rect">
-            <a:avLst/>
-          </a:prstGeom>
-          <a:noFill/>
-          <a:ln/>
-        </p:spPr>
-        <p:txBody>
-          <a:bodyPr wrap="square" lIns="0" tIns="0" rIns="0" bIns="0" rtlCol="0" anchor="ctr"/>
-          <a:lstStyle/>
-          <a:p>
-            <a:pPr indent="0" marL="0">
-              <a:buNone/>
-            </a:pPr>
-            <a:r>
-              <a:rPr lang="en-US" sz="950" b="1" spc="140" kern="0" dirty="0">
-                <a:solidFill>
-                  <a:srgbClr val="6E8194"/>
-                </a:solidFill>
-                <a:latin typeface="Calibri" pitchFamily="34" charset="0"/>
-                <a:ea typeface="Calibri" pitchFamily="34" charset="-122"/>
-                <a:cs typeface="Calibri" pitchFamily="34" charset="-120"/>
-              </a:rPr>
-              <a:t>4   POLICY-GROUNDED HUMAN-IN-THE-LOOP GATE</a:t>
-            </a:r>
-            <a:endParaRPr lang="en-US" sz="950" dirty="0"/>
-          </a:p>
-        </p:txBody>
-      </p:sp>
-      <p:sp>
-        <p:nvSpPr>
-          <p:cNvPr id="50" name="Shape 48"/>
-          <p:cNvSpPr/>
-          <p:nvPr/>
-        </p:nvSpPr>
-        <p:spPr>
-          <a:xfrm>
-            <a:off x="640080" y="4919472"/>
-            <a:ext cx="3931920" cy="566928"/>
-          </a:xfrm>
-          <a:prstGeom prst="rect">
-            <a:avLst/>
-          </a:prstGeom>
-          <a:solidFill>
-            <a:srgbClr val="FFFFFF"/>
-          </a:solidFill>
-          <a:ln w="9525">
-            <a:solidFill>
-              <a:srgbClr val="CFD8E1"/>
-            </a:solidFill>
-            <a:prstDash val="solid"/>
-          </a:ln>
-        </p:spPr>
-      </p:sp>
-      <p:sp>
-        <p:nvSpPr>
-          <p:cNvPr id="51" name="Text 49"/>
-          <p:cNvSpPr txBox="1"/>
-          <p:nvPr/>
-        </p:nvSpPr>
-        <p:spPr>
-          <a:xfrm>
-            <a:off x="804672" y="4919472"/>
-            <a:ext cx="3602736" cy="566928"/>
-          </a:xfrm>
-          <a:prstGeom prst="rect">
-            <a:avLst/>
-          </a:prstGeom>
-          <a:noFill/>
-          <a:ln/>
-        </p:spPr>
-        <p:txBody>
-          <a:bodyPr wrap="square" lIns="0" tIns="0" rIns="0" bIns="0" rtlCol="0" anchor="ctr"/>
-          <a:lstStyle/>
-          <a:p>
-            <a:pPr indent="0" marL="0">
-              <a:lnSpc>
-                <a:spcPts val="1400"/>
-              </a:lnSpc>
-              <a:buNone/>
-            </a:pPr>
-            <a:r>
-              <a:rPr lang="en-US" sz="1050" b="1" dirty="0">
-                <a:solidFill>
-                  <a:srgbClr val="11253C"/>
-                </a:solidFill>
-                <a:latin typeface="Calibri" pitchFamily="34" charset="0"/>
-                <a:ea typeface="Calibri" pitchFamily="34" charset="-122"/>
-                <a:cs typeface="Calibri" pitchFamily="34" charset="-120"/>
-              </a:rPr>
-              <a:t>Policy &amp; SOP knowledge base  </a:t>
-            </a:r>
-            <a:endParaRPr lang="en-US" sz="1050" dirty="0"/>
-          </a:p>
-          <a:p>
-            <a:pPr indent="0" marL="0">
-              <a:lnSpc>
-                <a:spcPts val="1400"/>
-              </a:lnSpc>
-              <a:buNone/>
-            </a:pPr>
-            <a:r>
-              <a:rPr lang="en-US" sz="1050" dirty="0">
-                <a:solidFill>
-                  <a:srgbClr val="3D5468"/>
-                </a:solidFill>
-                <a:latin typeface="Calibri" pitchFamily="34" charset="0"/>
-                <a:ea typeface="Calibri" pitchFamily="34" charset="-122"/>
-                <a:cs typeface="Calibri" pitchFamily="34" charset="-120"/>
-              </a:rPr>
-              <a:t>NDMA SOPs · municipal DM plan · delegation matrix (RAG)</a:t>
-            </a:r>
-            <a:endParaRPr lang="en-US" sz="1050" dirty="0"/>
-          </a:p>
-        </p:txBody>
-      </p:sp>
-      <p:sp>
-        <p:nvSpPr>
-          <p:cNvPr id="52" name="Shape 50"/>
-          <p:cNvSpPr/>
-          <p:nvPr/>
-        </p:nvSpPr>
-        <p:spPr>
-          <a:xfrm>
-            <a:off x="4754880" y="4919472"/>
-            <a:ext cx="6796735" cy="566928"/>
-          </a:xfrm>
-          <a:prstGeom prst="rect">
-            <a:avLst/>
-          </a:prstGeom>
-          <a:solidFill>
-            <a:srgbClr val="F3F6F9"/>
-          </a:solidFill>
-          <a:ln w="9525">
-            <a:solidFill>
-              <a:srgbClr val="CFD8E1"/>
-            </a:solidFill>
-            <a:prstDash val="solid"/>
-          </a:ln>
-        </p:spPr>
-      </p:sp>
-      <p:sp>
-        <p:nvSpPr>
-          <p:cNvPr id="53" name="Text 51"/>
-          <p:cNvSpPr txBox="1"/>
-          <p:nvPr/>
-        </p:nvSpPr>
-        <p:spPr>
-          <a:xfrm>
-            <a:off x="4919472" y="4919472"/>
-            <a:ext cx="6467551" cy="566928"/>
-          </a:xfrm>
-          <a:prstGeom prst="rect">
-            <a:avLst/>
-          </a:prstGeom>
-          <a:noFill/>
-          <a:ln/>
-        </p:spPr>
-        <p:txBody>
-          <a:bodyPr wrap="square" lIns="0" tIns="0" rIns="0" bIns="0" rtlCol="0" anchor="ctr"/>
-          <a:lstStyle/>
-          <a:p>
-            <a:pPr indent="0" marL="0">
-              <a:lnSpc>
-                <a:spcPts val="1400"/>
-              </a:lnSpc>
-              <a:buNone/>
-            </a:pPr>
-            <a:r>
-              <a:rPr lang="en-US" sz="1050" b="1" dirty="0">
-                <a:solidFill>
-                  <a:srgbClr val="11253C"/>
-                </a:solidFill>
-                <a:latin typeface="Calibri" pitchFamily="34" charset="0"/>
-                <a:ea typeface="Calibri" pitchFamily="34" charset="-122"/>
-                <a:cs typeface="Calibri" pitchFamily="34" charset="-120"/>
-              </a:rPr>
-              <a:t>Within cited authority → auto-issue</a:t>
-            </a:r>
-            <a:endParaRPr lang="en-US" sz="1050" dirty="0"/>
-          </a:p>
-          <a:p>
-            <a:pPr indent="0" marL="0">
-              <a:lnSpc>
-                <a:spcPts val="1400"/>
-              </a:lnSpc>
-              <a:buNone/>
-            </a:pPr>
-            <a:r>
-              <a:rPr lang="en-US" sz="1050" b="1" dirty="0">
-                <a:solidFill>
-                  <a:srgbClr val="B23A24"/>
-                </a:solidFill>
-                <a:latin typeface="Calibri" pitchFamily="34" charset="0"/>
-                <a:ea typeface="Calibri" pitchFamily="34" charset="-122"/>
-                <a:cs typeface="Calibri" pitchFamily="34" charset="-120"/>
-              </a:rPr>
-              <a:t>Outside authority or low confidence → officer approval, with the clause shown</a:t>
-            </a:r>
-            <a:endParaRPr lang="en-US" sz="1050" dirty="0"/>
-          </a:p>
-        </p:txBody>
-      </p:sp>
-      <p:sp>
-        <p:nvSpPr>
-          <p:cNvPr id="54" name="Shape 52"/>
-          <p:cNvSpPr/>
-          <p:nvPr/>
-        </p:nvSpPr>
-        <p:spPr>
-          <a:xfrm>
-            <a:off x="6013552" y="5541264"/>
-            <a:ext cx="164592" cy="137160"/>
-          </a:xfrm>
-          <a:prstGeom prst="downArrow">
-            <a:avLst/>
-          </a:prstGeom>
-          <a:solidFill>
-            <a:srgbClr val="9FAFBE"/>
-          </a:solidFill>
-          <a:ln w="12700">
-            <a:solidFill>
-              <a:srgbClr val="9FAFBE"/>
-            </a:solidFill>
-            <a:prstDash val="solid"/>
-          </a:ln>
-        </p:spPr>
-      </p:sp>
-      <p:sp>
-        <p:nvSpPr>
-          <p:cNvPr id="55" name="Text 53"/>
+          <p:cNvPr id="60" name="Text 58"/>
           <p:cNvSpPr txBox="1"/>
           <p:nvPr/>
         </p:nvSpPr>
@@ -8078,11 +8387,11 @@
           <a:bodyPr wrap="square" lIns="0" tIns="0" rIns="0" bIns="0" rtlCol="0" anchor="ctr"/>
           <a:lstStyle/>
           <a:p>
-            <a:pPr indent="0" marL="0">
-              <a:buNone/>
-            </a:pPr>
-            <a:r>
-              <a:rPr lang="en-US" sz="950" b="1" spc="140" kern="0" dirty="0">
+            <a:pPr marL="0" indent="0">
+              <a:buNone/>
+            </a:pPr>
+            <a:r>
+              <a:rPr lang="en-US" sz="950" b="1" kern="0" spc="140" dirty="0">
                 <a:solidFill>
                   <a:srgbClr val="6E8194"/>
                 </a:solidFill>
@@ -8098,7 +8407,7 @@
       </p:sp>
       <p:sp>
         <p:nvSpPr>
-          <p:cNvPr id="56" name="Shape 54"/>
+          <p:cNvPr id="61" name="Shape 59"/>
           <p:cNvSpPr/>
           <p:nvPr/>
         </p:nvSpPr>
@@ -8123,7 +8432,7 @@
       </p:sp>
       <p:sp>
         <p:nvSpPr>
-          <p:cNvPr id="57" name="Text 55"/>
+          <p:cNvPr id="62" name="Text 60"/>
           <p:cNvSpPr txBox="1"/>
           <p:nvPr/>
         </p:nvSpPr>
@@ -8142,7 +8451,7 @@
           <a:bodyPr wrap="square" lIns="0" tIns="0" rIns="0" bIns="0" rtlCol="0" anchor="ctr"/>
           <a:lstStyle/>
           <a:p>
-            <a:pPr indent="0" marL="0">
+            <a:pPr marL="0" indent="0">
               <a:buNone/>
             </a:pPr>
             <a:r>
@@ -8162,7 +8471,7 @@
       </p:sp>
       <p:sp>
         <p:nvSpPr>
-          <p:cNvPr id="58" name="Text 56"/>
+          <p:cNvPr id="63" name="Text 61"/>
           <p:cNvSpPr txBox="1"/>
           <p:nvPr/>
         </p:nvSpPr>
@@ -8181,7 +8490,7 @@
           <a:bodyPr wrap="square" lIns="0" tIns="0" rIns="0" bIns="0" rtlCol="0" anchor="ctr"/>
           <a:lstStyle/>
           <a:p>
-            <a:pPr indent="0" marL="0">
+            <a:pPr marL="0" indent="0">
               <a:buNone/>
             </a:pPr>
             <a:r>
@@ -8201,7 +8510,7 @@
       </p:sp>
       <p:sp>
         <p:nvSpPr>
-          <p:cNvPr id="59" name="Shape 57"/>
+          <p:cNvPr id="64" name="Shape 62"/>
           <p:cNvSpPr/>
           <p:nvPr/>
         </p:nvSpPr>
@@ -8226,7 +8535,7 @@
       </p:sp>
       <p:sp>
         <p:nvSpPr>
-          <p:cNvPr id="60" name="Text 58"/>
+          <p:cNvPr id="65" name="Text 63"/>
           <p:cNvSpPr txBox="1"/>
           <p:nvPr/>
         </p:nvSpPr>
@@ -8245,7 +8554,7 @@
           <a:bodyPr wrap="square" lIns="0" tIns="0" rIns="0" bIns="0" rtlCol="0" anchor="ctr"/>
           <a:lstStyle/>
           <a:p>
-            <a:pPr indent="0" marL="0">
+            <a:pPr marL="0" indent="0">
               <a:buNone/>
             </a:pPr>
             <a:r>
@@ -8265,7 +8574,7 @@
       </p:sp>
       <p:sp>
         <p:nvSpPr>
-          <p:cNvPr id="61" name="Text 59"/>
+          <p:cNvPr id="66" name="Text 64"/>
           <p:cNvSpPr txBox="1"/>
           <p:nvPr/>
         </p:nvSpPr>
@@ -8284,7 +8593,7 @@
           <a:bodyPr wrap="square" lIns="0" tIns="0" rIns="0" bIns="0" rtlCol="0" anchor="ctr"/>
           <a:lstStyle/>
           <a:p>
-            <a:pPr indent="0" marL="0">
+            <a:pPr marL="0" indent="0">
               <a:buNone/>
             </a:pPr>
             <a:r>
@@ -8304,7 +8613,7 @@
       </p:sp>
       <p:sp>
         <p:nvSpPr>
-          <p:cNvPr id="62" name="Shape 60"/>
+          <p:cNvPr id="67" name="Shape 65"/>
           <p:cNvSpPr/>
           <p:nvPr/>
         </p:nvSpPr>
@@ -8329,7 +8638,7 @@
       </p:sp>
       <p:sp>
         <p:nvSpPr>
-          <p:cNvPr id="63" name="Text 61"/>
+          <p:cNvPr id="68" name="Text 66"/>
           <p:cNvSpPr txBox="1"/>
           <p:nvPr/>
         </p:nvSpPr>
@@ -8348,7 +8657,7 @@
           <a:bodyPr wrap="square" lIns="0" tIns="0" rIns="0" bIns="0" rtlCol="0" anchor="ctr"/>
           <a:lstStyle/>
           <a:p>
-            <a:pPr indent="0" marL="0">
+            <a:pPr marL="0" indent="0">
               <a:buNone/>
             </a:pPr>
             <a:r>
@@ -8368,7 +8677,7 @@
       </p:sp>
       <p:sp>
         <p:nvSpPr>
-          <p:cNvPr id="64" name="Text 62"/>
+          <p:cNvPr id="69" name="Text 67"/>
           <p:cNvSpPr txBox="1"/>
           <p:nvPr/>
         </p:nvSpPr>
@@ -8387,7 +8696,7 @@
           <a:bodyPr wrap="square" lIns="0" tIns="0" rIns="0" bIns="0" rtlCol="0" anchor="ctr"/>
           <a:lstStyle/>
           <a:p>
-            <a:pPr indent="0" marL="0">
+            <a:pPr marL="0" indent="0">
               <a:buNone/>
             </a:pPr>
             <a:r>
@@ -8451,11 +8760,11 @@
           <a:bodyPr wrap="square" lIns="0" tIns="0" rIns="0" bIns="0" rtlCol="0" anchor="ctr"/>
           <a:lstStyle/>
           <a:p>
-            <a:pPr algn="l" indent="0" marL="0">
-              <a:buNone/>
-            </a:pPr>
-            <a:r>
-              <a:rPr lang="en-US" sz="1050" b="1" spc="220" kern="0" dirty="0">
+            <a:pPr marL="0" indent="0" algn="l">
+              <a:buNone/>
+            </a:pPr>
+            <a:r>
+              <a:rPr lang="en-US" sz="1050" b="1" kern="0" spc="220" dirty="0">
                 <a:solidFill>
                   <a:srgbClr val="6E8194"/>
                 </a:solidFill>
@@ -8490,7 +8799,7 @@
           <a:bodyPr wrap="square" lIns="0" tIns="0" rIns="0" bIns="0" rtlCol="0" anchor="ctr"/>
           <a:lstStyle/>
           <a:p>
-            <a:pPr algn="l" indent="0" marL="0">
+            <a:pPr marL="0" indent="0" algn="l">
               <a:buNone/>
             </a:pPr>
             <a:r>
@@ -8579,7 +8888,7 @@
           <a:bodyPr wrap="square" lIns="0" tIns="0" rIns="0" bIns="0" rtlCol="0" anchor="ctr"/>
           <a:lstStyle/>
           <a:p>
-            <a:pPr indent="0" marL="0">
+            <a:pPr marL="0" indent="0">
               <a:buNone/>
             </a:pPr>
             <a:r>
@@ -8618,7 +8927,7 @@
           <a:bodyPr wrap="square" lIns="0" tIns="0" rIns="0" bIns="0" rtlCol="0" anchor="ctr"/>
           <a:lstStyle/>
           <a:p>
-            <a:pPr indent="0" marL="0">
+            <a:pPr marL="0" indent="0">
               <a:lnSpc>
                 <a:spcPts val="1600"/>
               </a:lnSpc>
@@ -8710,7 +9019,7 @@
           <a:bodyPr wrap="square" lIns="0" tIns="0" rIns="0" bIns="0" rtlCol="0" anchor="ctr"/>
           <a:lstStyle/>
           <a:p>
-            <a:pPr indent="0" marL="0">
+            <a:pPr marL="0" indent="0">
               <a:buNone/>
             </a:pPr>
             <a:r>
@@ -8749,7 +9058,7 @@
           <a:bodyPr wrap="square" lIns="0" tIns="0" rIns="0" bIns="0" rtlCol="0" anchor="ctr"/>
           <a:lstStyle/>
           <a:p>
-            <a:pPr indent="0" marL="0">
+            <a:pPr marL="0" indent="0">
               <a:lnSpc>
                 <a:spcPts val="1600"/>
               </a:lnSpc>
@@ -8841,7 +9150,7 @@
           <a:bodyPr wrap="square" lIns="0" tIns="0" rIns="0" bIns="0" rtlCol="0" anchor="ctr"/>
           <a:lstStyle/>
           <a:p>
-            <a:pPr indent="0" marL="0">
+            <a:pPr marL="0" indent="0">
               <a:buNone/>
             </a:pPr>
             <a:r>
@@ -8880,7 +9189,7 @@
           <a:bodyPr wrap="square" lIns="0" tIns="0" rIns="0" bIns="0" rtlCol="0" anchor="ctr"/>
           <a:lstStyle/>
           <a:p>
-            <a:pPr indent="0" marL="0">
+            <a:pPr marL="0" indent="0">
               <a:lnSpc>
                 <a:spcPts val="1600"/>
               </a:lnSpc>
@@ -8972,7 +9281,7 @@
           <a:bodyPr wrap="square" lIns="0" tIns="0" rIns="0" bIns="0" rtlCol="0" anchor="ctr"/>
           <a:lstStyle/>
           <a:p>
-            <a:pPr indent="0" marL="0">
+            <a:pPr marL="0" indent="0">
               <a:buNone/>
             </a:pPr>
             <a:r>
@@ -9011,7 +9320,7 @@
           <a:bodyPr wrap="square" lIns="0" tIns="0" rIns="0" bIns="0" rtlCol="0" anchor="ctr"/>
           <a:lstStyle/>
           <a:p>
-            <a:pPr indent="0" marL="0">
+            <a:pPr marL="0" indent="0">
               <a:lnSpc>
                 <a:spcPts val="1600"/>
               </a:lnSpc>
@@ -9040,8 +9349,8 @@
         </p:nvSpPr>
         <p:spPr>
           <a:xfrm>
-            <a:off x="640080" y="5230368"/>
-            <a:ext cx="10911535" cy="1060704"/>
+            <a:off x="640080" y="5138928"/>
+            <a:ext cx="10911535" cy="1261872"/>
           </a:xfrm>
           <a:prstGeom prst="rect">
             <a:avLst/>
@@ -9065,24 +9374,24 @@
         </p:nvSpPr>
         <p:spPr>
           <a:xfrm>
-            <a:off x="950976" y="5394960"/>
-            <a:ext cx="5486400" cy="274320"/>
-          </a:xfrm>
-          <a:prstGeom prst="rect">
-            <a:avLst/>
-          </a:prstGeom>
-          <a:noFill/>
-          <a:ln/>
-        </p:spPr>
-        <p:txBody>
-          <a:bodyPr wrap="square" lIns="0" tIns="0" rIns="0" bIns="0" rtlCol="0" anchor="ctr"/>
-          <a:lstStyle/>
-          <a:p>
-            <a:pPr indent="0" marL="0">
-              <a:buNone/>
-            </a:pPr>
-            <a:r>
-              <a:rPr lang="en-US" sz="1450" b="1" dirty="0">
+            <a:off x="914400" y="5266944"/>
+            <a:ext cx="6400800" cy="237744"/>
+          </a:xfrm>
+          <a:prstGeom prst="rect">
+            <a:avLst/>
+          </a:prstGeom>
+          <a:noFill/>
+          <a:ln/>
+        </p:spPr>
+        <p:txBody>
+          <a:bodyPr wrap="square" lIns="0" tIns="0" rIns="0" bIns="0" rtlCol="0" anchor="ctr"/>
+          <a:lstStyle/>
+          <a:p>
+            <a:pPr marL="0" indent="0">
+              <a:buNone/>
+            </a:pPr>
+            <a:r>
+              <a:rPr lang="en-US" sz="1350" b="1" dirty="0">
                 <a:solidFill>
                   <a:srgbClr val="11253C"/>
                 </a:solidFill>
@@ -9090,51 +9399,810 @@
                 <a:ea typeface="Calibri" pitchFamily="34" charset="-122"/>
                 <a:cs typeface="Calibri" pitchFamily="34" charset="-120"/>
               </a:rPr>
-              <a:t>A closed loop across all three interfaces</a:t>
-            </a:r>
-            <a:endParaRPr lang="en-US" sz="1450" dirty="0"/>
-          </a:p>
-        </p:txBody>
-      </p:sp>
-      <p:sp>
-        <p:nvSpPr>
-          <p:cNvPr id="22" name="Text 20"/>
-          <p:cNvSpPr txBox="1"/>
-          <p:nvPr/>
-        </p:nvSpPr>
-        <p:spPr>
-          <a:xfrm>
-            <a:off x="950976" y="5687568"/>
-            <a:ext cx="10289743" cy="512064"/>
-          </a:xfrm>
-          <a:prstGeom prst="rect">
-            <a:avLst/>
-          </a:prstGeom>
-          <a:noFill/>
-          <a:ln/>
-        </p:spPr>
-        <p:txBody>
-          <a:bodyPr wrap="square" lIns="0" tIns="0" rIns="0" bIns="0" rtlCol="0" anchor="ctr"/>
-          <a:lstStyle/>
-          <a:p>
-            <a:pPr indent="0" marL="0">
+              <a:t>Forecast to verified action — one closed loop</a:t>
+            </a:r>
+            <a:endParaRPr lang="en-US" sz="1350" dirty="0"/>
+          </a:p>
+        </p:txBody>
+      </p:sp>
+      <p:sp>
+        <p:nvSpPr>
+          <p:cNvPr id="22" name="Shape 20"/>
+          <p:cNvSpPr/>
+          <p:nvPr/>
+        </p:nvSpPr>
+        <p:spPr>
+          <a:xfrm>
+            <a:off x="914400" y="5614416"/>
+            <a:ext cx="1070153" cy="548640"/>
+          </a:xfrm>
+          <a:prstGeom prst="roundRect">
+            <a:avLst>
+              <a:gd name="adj" fmla="val 8333"/>
+            </a:avLst>
+          </a:prstGeom>
+          <a:solidFill>
+            <a:srgbClr val="F3F6F9"/>
+          </a:solidFill>
+          <a:ln w="9525">
+            <a:solidFill>
+              <a:srgbClr val="CFD8E1"/>
+            </a:solidFill>
+            <a:prstDash val="solid"/>
+          </a:ln>
+        </p:spPr>
+      </p:sp>
+      <p:sp>
+        <p:nvSpPr>
+          <p:cNvPr id="23" name="Text 21"/>
+          <p:cNvSpPr txBox="1"/>
+          <p:nvPr/>
+        </p:nvSpPr>
+        <p:spPr>
+          <a:xfrm>
+            <a:off x="950976" y="5614416"/>
+            <a:ext cx="997001" cy="548640"/>
+          </a:xfrm>
+          <a:prstGeom prst="rect">
+            <a:avLst/>
+          </a:prstGeom>
+          <a:noFill/>
+          <a:ln/>
+        </p:spPr>
+        <p:txBody>
+          <a:bodyPr wrap="square" lIns="0" tIns="0" rIns="0" bIns="0" rtlCol="0" anchor="ctr"/>
+          <a:lstStyle/>
+          <a:p>
+            <a:pPr marL="0" indent="0" algn="ctr">
               <a:lnSpc>
-                <a:spcPts val="1600"/>
+                <a:spcPts val="1100"/>
               </a:lnSpc>
               <a:buNone/>
             </a:pPr>
             <a:r>
-              <a:rPr lang="en-US" sz="1150" dirty="0">
-                <a:solidFill>
-                  <a:srgbClr val="3D5468"/>
-                </a:solidFill>
-                <a:latin typeface="Calibri" pitchFamily="34" charset="0"/>
-                <a:ea typeface="Calibri" pitchFamily="34" charset="-122"/>
-                <a:cs typeface="Calibri" pitchFamily="34" charset="-120"/>
-              </a:rPr>
-              <a:t>A citizen photo report is classified and geotagged by a vision model; duplicates are clustered into one confirmed incident; the planner dispatches against that cluster; the field operator closes it with proof; and the officer's approval or override is written back as a training signal. Prediction, action and outcome sit in one auditable loop.</a:t>
-            </a:r>
-            <a:endParaRPr lang="en-US" sz="1150" dirty="0"/>
+              <a:rPr lang="en-US" sz="850" dirty="0">
+                <a:solidFill>
+                  <a:srgbClr val="11253C"/>
+                </a:solidFill>
+                <a:latin typeface="Calibri" pitchFamily="34" charset="0"/>
+                <a:ea typeface="Calibri" pitchFamily="34" charset="-122"/>
+                <a:cs typeface="Calibri" pitchFamily="34" charset="-120"/>
+              </a:rPr>
+              <a:t>Forecast</a:t>
+            </a:r>
+            <a:endParaRPr lang="en-US" sz="850" dirty="0"/>
+          </a:p>
+          <a:p>
+            <a:pPr marL="0" indent="0" algn="ctr">
+              <a:lnSpc>
+                <a:spcPts val="1100"/>
+              </a:lnSpc>
+              <a:buNone/>
+            </a:pPr>
+            <a:r>
+              <a:rPr lang="en-US" sz="850" dirty="0">
+                <a:solidFill>
+                  <a:srgbClr val="11253C"/>
+                </a:solidFill>
+                <a:latin typeface="Calibri" pitchFamily="34" charset="0"/>
+                <a:ea typeface="Calibri" pitchFamily="34" charset="-122"/>
+                <a:cs typeface="Calibri" pitchFamily="34" charset="-120"/>
+              </a:rPr>
+              <a:t>ingested</a:t>
+            </a:r>
+            <a:endParaRPr lang="en-US" sz="850" dirty="0"/>
+          </a:p>
+        </p:txBody>
+      </p:sp>
+      <p:sp>
+        <p:nvSpPr>
+          <p:cNvPr id="24" name="Shape 22"/>
+          <p:cNvSpPr/>
+          <p:nvPr/>
+        </p:nvSpPr>
+        <p:spPr>
+          <a:xfrm>
+            <a:off x="2075993" y="5614416"/>
+            <a:ext cx="1070153" cy="548640"/>
+          </a:xfrm>
+          <a:prstGeom prst="roundRect">
+            <a:avLst>
+              <a:gd name="adj" fmla="val 8333"/>
+            </a:avLst>
+          </a:prstGeom>
+          <a:solidFill>
+            <a:srgbClr val="F3F6F9"/>
+          </a:solidFill>
+          <a:ln w="9525">
+            <a:solidFill>
+              <a:srgbClr val="CFD8E1"/>
+            </a:solidFill>
+            <a:prstDash val="solid"/>
+          </a:ln>
+        </p:spPr>
+      </p:sp>
+      <p:sp>
+        <p:nvSpPr>
+          <p:cNvPr id="25" name="Text 23"/>
+          <p:cNvSpPr txBox="1"/>
+          <p:nvPr/>
+        </p:nvSpPr>
+        <p:spPr>
+          <a:xfrm>
+            <a:off x="2112569" y="5614416"/>
+            <a:ext cx="997001" cy="548640"/>
+          </a:xfrm>
+          <a:prstGeom prst="rect">
+            <a:avLst/>
+          </a:prstGeom>
+          <a:noFill/>
+          <a:ln/>
+        </p:spPr>
+        <p:txBody>
+          <a:bodyPr wrap="square" lIns="0" tIns="0" rIns="0" bIns="0" rtlCol="0" anchor="ctr"/>
+          <a:lstStyle/>
+          <a:p>
+            <a:pPr marL="0" indent="0" algn="ctr">
+              <a:lnSpc>
+                <a:spcPts val="1100"/>
+              </a:lnSpc>
+              <a:buNone/>
+            </a:pPr>
+            <a:r>
+              <a:rPr lang="en-US" sz="850" dirty="0">
+                <a:solidFill>
+                  <a:srgbClr val="11253C"/>
+                </a:solidFill>
+                <a:latin typeface="Calibri" pitchFamily="34" charset="0"/>
+                <a:ea typeface="Calibri" pitchFamily="34" charset="-122"/>
+                <a:cs typeface="Calibri" pitchFamily="34" charset="-120"/>
+              </a:rPr>
+              <a:t>250 m</a:t>
+            </a:r>
+            <a:endParaRPr lang="en-US" sz="850" dirty="0"/>
+          </a:p>
+          <a:p>
+            <a:pPr marL="0" indent="0" algn="ctr">
+              <a:lnSpc>
+                <a:spcPts val="1100"/>
+              </a:lnSpc>
+              <a:buNone/>
+            </a:pPr>
+            <a:r>
+              <a:rPr lang="en-US" sz="850" dirty="0">
+                <a:solidFill>
+                  <a:srgbClr val="11253C"/>
+                </a:solidFill>
+                <a:latin typeface="Calibri" pitchFamily="34" charset="0"/>
+                <a:ea typeface="Calibri" pitchFamily="34" charset="-122"/>
+                <a:cs typeface="Calibri" pitchFamily="34" charset="-120"/>
+              </a:rPr>
+              <a:t>impact map</a:t>
+            </a:r>
+            <a:endParaRPr lang="en-US" sz="850" dirty="0"/>
+          </a:p>
+        </p:txBody>
+      </p:sp>
+      <p:sp>
+        <p:nvSpPr>
+          <p:cNvPr id="26" name="Shape 24"/>
+          <p:cNvSpPr/>
+          <p:nvPr/>
+        </p:nvSpPr>
+        <p:spPr>
+          <a:xfrm>
+            <a:off x="3237586" y="5614416"/>
+            <a:ext cx="1070153" cy="548640"/>
+          </a:xfrm>
+          <a:prstGeom prst="roundRect">
+            <a:avLst>
+              <a:gd name="adj" fmla="val 8333"/>
+            </a:avLst>
+          </a:prstGeom>
+          <a:solidFill>
+            <a:srgbClr val="F3F6F9"/>
+          </a:solidFill>
+          <a:ln w="9525">
+            <a:solidFill>
+              <a:srgbClr val="CFD8E1"/>
+            </a:solidFill>
+            <a:prstDash val="solid"/>
+          </a:ln>
+        </p:spPr>
+      </p:sp>
+      <p:sp>
+        <p:nvSpPr>
+          <p:cNvPr id="27" name="Text 25"/>
+          <p:cNvSpPr txBox="1"/>
+          <p:nvPr/>
+        </p:nvSpPr>
+        <p:spPr>
+          <a:xfrm>
+            <a:off x="3274162" y="5614416"/>
+            <a:ext cx="997001" cy="548640"/>
+          </a:xfrm>
+          <a:prstGeom prst="rect">
+            <a:avLst/>
+          </a:prstGeom>
+          <a:noFill/>
+          <a:ln/>
+        </p:spPr>
+        <p:txBody>
+          <a:bodyPr wrap="square" lIns="0" tIns="0" rIns="0" bIns="0" rtlCol="0" anchor="ctr"/>
+          <a:lstStyle/>
+          <a:p>
+            <a:pPr marL="0" indent="0" algn="ctr">
+              <a:lnSpc>
+                <a:spcPts val="1100"/>
+              </a:lnSpc>
+              <a:buNone/>
+            </a:pPr>
+            <a:r>
+              <a:rPr lang="en-US" sz="850" dirty="0">
+                <a:solidFill>
+                  <a:srgbClr val="11253C"/>
+                </a:solidFill>
+                <a:latin typeface="Calibri" pitchFamily="34" charset="0"/>
+                <a:ea typeface="Calibri" pitchFamily="34" charset="-122"/>
+                <a:cs typeface="Calibri" pitchFamily="34" charset="-120"/>
+              </a:rPr>
+              <a:t>Policy</a:t>
+            </a:r>
+            <a:endParaRPr lang="en-US" sz="850" dirty="0"/>
+          </a:p>
+          <a:p>
+            <a:pPr marL="0" indent="0" algn="ctr">
+              <a:lnSpc>
+                <a:spcPts val="1100"/>
+              </a:lnSpc>
+              <a:buNone/>
+            </a:pPr>
+            <a:r>
+              <a:rPr lang="en-US" sz="850" dirty="0">
+                <a:solidFill>
+                  <a:srgbClr val="11253C"/>
+                </a:solidFill>
+                <a:latin typeface="Calibri" pitchFamily="34" charset="0"/>
+                <a:ea typeface="Calibri" pitchFamily="34" charset="-122"/>
+                <a:cs typeface="Calibri" pitchFamily="34" charset="-120"/>
+              </a:rPr>
+              <a:t>clause checked</a:t>
+            </a:r>
+            <a:endParaRPr lang="en-US" sz="850" dirty="0"/>
+          </a:p>
+        </p:txBody>
+      </p:sp>
+      <p:sp>
+        <p:nvSpPr>
+          <p:cNvPr id="28" name="Shape 26"/>
+          <p:cNvSpPr/>
+          <p:nvPr/>
+        </p:nvSpPr>
+        <p:spPr>
+          <a:xfrm>
+            <a:off x="4399178" y="5614416"/>
+            <a:ext cx="1070153" cy="548640"/>
+          </a:xfrm>
+          <a:prstGeom prst="roundRect">
+            <a:avLst>
+              <a:gd name="adj" fmla="val 8333"/>
+            </a:avLst>
+          </a:prstGeom>
+          <a:solidFill>
+            <a:srgbClr val="F3F6F9"/>
+          </a:solidFill>
+          <a:ln w="9525">
+            <a:solidFill>
+              <a:srgbClr val="CFD8E1"/>
+            </a:solidFill>
+            <a:prstDash val="solid"/>
+          </a:ln>
+        </p:spPr>
+      </p:sp>
+      <p:sp>
+        <p:nvSpPr>
+          <p:cNvPr id="29" name="Text 27"/>
+          <p:cNvSpPr txBox="1"/>
+          <p:nvPr/>
+        </p:nvSpPr>
+        <p:spPr>
+          <a:xfrm>
+            <a:off x="4435754" y="5614416"/>
+            <a:ext cx="997001" cy="548640"/>
+          </a:xfrm>
+          <a:prstGeom prst="rect">
+            <a:avLst/>
+          </a:prstGeom>
+          <a:noFill/>
+          <a:ln/>
+        </p:spPr>
+        <p:txBody>
+          <a:bodyPr wrap="square" lIns="0" tIns="0" rIns="0" bIns="0" rtlCol="0" anchor="ctr"/>
+          <a:lstStyle/>
+          <a:p>
+            <a:pPr marL="0" indent="0" algn="ctr">
+              <a:lnSpc>
+                <a:spcPts val="1100"/>
+              </a:lnSpc>
+              <a:buNone/>
+            </a:pPr>
+            <a:r>
+              <a:rPr lang="en-US" sz="850" dirty="0">
+                <a:solidFill>
+                  <a:srgbClr val="11253C"/>
+                </a:solidFill>
+                <a:latin typeface="Calibri" pitchFamily="34" charset="0"/>
+                <a:ea typeface="Calibri" pitchFamily="34" charset="-122"/>
+                <a:cs typeface="Calibri" pitchFamily="34" charset="-120"/>
+              </a:rPr>
+              <a:t>Solver</a:t>
+            </a:r>
+            <a:endParaRPr lang="en-US" sz="850" dirty="0"/>
+          </a:p>
+          <a:p>
+            <a:pPr marL="0" indent="0" algn="ctr">
+              <a:lnSpc>
+                <a:spcPts val="1100"/>
+              </a:lnSpc>
+              <a:buNone/>
+            </a:pPr>
+            <a:r>
+              <a:rPr lang="en-US" sz="850" dirty="0">
+                <a:solidFill>
+                  <a:srgbClr val="11253C"/>
+                </a:solidFill>
+                <a:latin typeface="Calibri" pitchFamily="34" charset="0"/>
+                <a:ea typeface="Calibri" pitchFamily="34" charset="-122"/>
+                <a:cs typeface="Calibri" pitchFamily="34" charset="-120"/>
+              </a:rPr>
+              <a:t>allocates</a:t>
+            </a:r>
+            <a:endParaRPr lang="en-US" sz="850" dirty="0"/>
+          </a:p>
+        </p:txBody>
+      </p:sp>
+      <p:sp>
+        <p:nvSpPr>
+          <p:cNvPr id="30" name="Shape 28"/>
+          <p:cNvSpPr/>
+          <p:nvPr/>
+        </p:nvSpPr>
+        <p:spPr>
+          <a:xfrm>
+            <a:off x="5560771" y="5614416"/>
+            <a:ext cx="1070153" cy="548640"/>
+          </a:xfrm>
+          <a:prstGeom prst="roundRect">
+            <a:avLst>
+              <a:gd name="adj" fmla="val 8333"/>
+            </a:avLst>
+          </a:prstGeom>
+          <a:solidFill>
+            <a:srgbClr val="E8EEF3"/>
+          </a:solidFill>
+          <a:ln w="15875">
+            <a:solidFill>
+              <a:srgbClr val="B23A24"/>
+            </a:solidFill>
+            <a:prstDash val="solid"/>
+          </a:ln>
+        </p:spPr>
+      </p:sp>
+      <p:sp>
+        <p:nvSpPr>
+          <p:cNvPr id="31" name="Text 29"/>
+          <p:cNvSpPr txBox="1"/>
+          <p:nvPr/>
+        </p:nvSpPr>
+        <p:spPr>
+          <a:xfrm>
+            <a:off x="5597347" y="5614416"/>
+            <a:ext cx="997001" cy="548640"/>
+          </a:xfrm>
+          <a:prstGeom prst="rect">
+            <a:avLst/>
+          </a:prstGeom>
+          <a:noFill/>
+          <a:ln/>
+        </p:spPr>
+        <p:txBody>
+          <a:bodyPr wrap="square" lIns="0" tIns="0" rIns="0" bIns="0" rtlCol="0" anchor="ctr"/>
+          <a:lstStyle/>
+          <a:p>
+            <a:pPr marL="0" indent="0" algn="ctr">
+              <a:lnSpc>
+                <a:spcPts val="1100"/>
+              </a:lnSpc>
+              <a:buNone/>
+            </a:pPr>
+            <a:r>
+              <a:rPr lang="en-US" sz="850" b="1" dirty="0">
+                <a:solidFill>
+                  <a:srgbClr val="11253C"/>
+                </a:solidFill>
+                <a:latin typeface="Calibri" pitchFamily="34" charset="0"/>
+                <a:ea typeface="Calibri" pitchFamily="34" charset="-122"/>
+                <a:cs typeface="Calibri" pitchFamily="34" charset="-120"/>
+              </a:rPr>
+              <a:t>Officer</a:t>
+            </a:r>
+            <a:endParaRPr lang="en-US" sz="850" dirty="0"/>
+          </a:p>
+          <a:p>
+            <a:pPr marL="0" indent="0" algn="ctr">
+              <a:lnSpc>
+                <a:spcPts val="1100"/>
+              </a:lnSpc>
+              <a:buNone/>
+            </a:pPr>
+            <a:r>
+              <a:rPr lang="en-US" sz="850" b="1" dirty="0">
+                <a:solidFill>
+                  <a:srgbClr val="11253C"/>
+                </a:solidFill>
+                <a:latin typeface="Calibri" pitchFamily="34" charset="0"/>
+                <a:ea typeface="Calibri" pitchFamily="34" charset="-122"/>
+                <a:cs typeface="Calibri" pitchFamily="34" charset="-120"/>
+              </a:rPr>
+              <a:t>approves</a:t>
+            </a:r>
+            <a:endParaRPr lang="en-US" sz="850" dirty="0"/>
+          </a:p>
+        </p:txBody>
+      </p:sp>
+      <p:sp>
+        <p:nvSpPr>
+          <p:cNvPr id="32" name="Shape 30"/>
+          <p:cNvSpPr/>
+          <p:nvPr/>
+        </p:nvSpPr>
+        <p:spPr>
+          <a:xfrm>
+            <a:off x="6722364" y="5614416"/>
+            <a:ext cx="1070153" cy="548640"/>
+          </a:xfrm>
+          <a:prstGeom prst="roundRect">
+            <a:avLst>
+              <a:gd name="adj" fmla="val 8333"/>
+            </a:avLst>
+          </a:prstGeom>
+          <a:solidFill>
+            <a:srgbClr val="F3F6F9"/>
+          </a:solidFill>
+          <a:ln w="9525">
+            <a:solidFill>
+              <a:srgbClr val="CFD8E1"/>
+            </a:solidFill>
+            <a:prstDash val="solid"/>
+          </a:ln>
+        </p:spPr>
+      </p:sp>
+      <p:sp>
+        <p:nvSpPr>
+          <p:cNvPr id="33" name="Text 31"/>
+          <p:cNvSpPr txBox="1"/>
+          <p:nvPr/>
+        </p:nvSpPr>
+        <p:spPr>
+          <a:xfrm>
+            <a:off x="6758940" y="5614416"/>
+            <a:ext cx="997001" cy="548640"/>
+          </a:xfrm>
+          <a:prstGeom prst="rect">
+            <a:avLst/>
+          </a:prstGeom>
+          <a:noFill/>
+          <a:ln/>
+        </p:spPr>
+        <p:txBody>
+          <a:bodyPr wrap="square" lIns="0" tIns="0" rIns="0" bIns="0" rtlCol="0" anchor="ctr"/>
+          <a:lstStyle/>
+          <a:p>
+            <a:pPr marL="0" indent="0" algn="ctr">
+              <a:lnSpc>
+                <a:spcPts val="1100"/>
+              </a:lnSpc>
+              <a:buNone/>
+            </a:pPr>
+            <a:r>
+              <a:rPr lang="en-US" sz="850" dirty="0">
+                <a:solidFill>
+                  <a:srgbClr val="11253C"/>
+                </a:solidFill>
+                <a:latin typeface="Calibri" pitchFamily="34" charset="0"/>
+                <a:ea typeface="Calibri" pitchFamily="34" charset="-122"/>
+                <a:cs typeface="Calibri" pitchFamily="34" charset="-120"/>
+              </a:rPr>
+              <a:t>Citizens</a:t>
+            </a:r>
+            <a:endParaRPr lang="en-US" sz="850" dirty="0"/>
+          </a:p>
+          <a:p>
+            <a:pPr marL="0" indent="0" algn="ctr">
+              <a:lnSpc>
+                <a:spcPts val="1100"/>
+              </a:lnSpc>
+              <a:buNone/>
+            </a:pPr>
+            <a:r>
+              <a:rPr lang="en-US" sz="850" dirty="0">
+                <a:solidFill>
+                  <a:srgbClr val="11253C"/>
+                </a:solidFill>
+                <a:latin typeface="Calibri" pitchFamily="34" charset="0"/>
+                <a:ea typeface="Calibri" pitchFamily="34" charset="-122"/>
+                <a:cs typeface="Calibri" pitchFamily="34" charset="-120"/>
+              </a:rPr>
+              <a:t>warned</a:t>
+            </a:r>
+            <a:endParaRPr lang="en-US" sz="850" dirty="0"/>
+          </a:p>
+        </p:txBody>
+      </p:sp>
+      <p:sp>
+        <p:nvSpPr>
+          <p:cNvPr id="34" name="Shape 32"/>
+          <p:cNvSpPr/>
+          <p:nvPr/>
+        </p:nvSpPr>
+        <p:spPr>
+          <a:xfrm>
+            <a:off x="7883957" y="5614416"/>
+            <a:ext cx="1070153" cy="548640"/>
+          </a:xfrm>
+          <a:prstGeom prst="roundRect">
+            <a:avLst>
+              <a:gd name="adj" fmla="val 8333"/>
+            </a:avLst>
+          </a:prstGeom>
+          <a:solidFill>
+            <a:srgbClr val="F3F6F9"/>
+          </a:solidFill>
+          <a:ln w="9525">
+            <a:solidFill>
+              <a:srgbClr val="CFD8E1"/>
+            </a:solidFill>
+            <a:prstDash val="solid"/>
+          </a:ln>
+        </p:spPr>
+      </p:sp>
+      <p:sp>
+        <p:nvSpPr>
+          <p:cNvPr id="35" name="Text 33"/>
+          <p:cNvSpPr txBox="1"/>
+          <p:nvPr/>
+        </p:nvSpPr>
+        <p:spPr>
+          <a:xfrm>
+            <a:off x="7920533" y="5614416"/>
+            <a:ext cx="997001" cy="548640"/>
+          </a:xfrm>
+          <a:prstGeom prst="rect">
+            <a:avLst/>
+          </a:prstGeom>
+          <a:noFill/>
+          <a:ln/>
+        </p:spPr>
+        <p:txBody>
+          <a:bodyPr wrap="square" lIns="0" tIns="0" rIns="0" bIns="0" rtlCol="0" anchor="ctr"/>
+          <a:lstStyle/>
+          <a:p>
+            <a:pPr marL="0" indent="0" algn="ctr">
+              <a:lnSpc>
+                <a:spcPts val="1100"/>
+              </a:lnSpc>
+              <a:buNone/>
+            </a:pPr>
+            <a:r>
+              <a:rPr lang="en-US" sz="850" dirty="0">
+                <a:solidFill>
+                  <a:srgbClr val="11253C"/>
+                </a:solidFill>
+                <a:latin typeface="Calibri" pitchFamily="34" charset="0"/>
+                <a:ea typeface="Calibri" pitchFamily="34" charset="-122"/>
+                <a:cs typeface="Calibri" pitchFamily="34" charset="-120"/>
+              </a:rPr>
+              <a:t>Teams</a:t>
+            </a:r>
+            <a:endParaRPr lang="en-US" sz="850" dirty="0"/>
+          </a:p>
+          <a:p>
+            <a:pPr marL="0" indent="0" algn="ctr">
+              <a:lnSpc>
+                <a:spcPts val="1100"/>
+              </a:lnSpc>
+              <a:buNone/>
+            </a:pPr>
+            <a:r>
+              <a:rPr lang="en-US" sz="850" dirty="0">
+                <a:solidFill>
+                  <a:srgbClr val="11253C"/>
+                </a:solidFill>
+                <a:latin typeface="Calibri" pitchFamily="34" charset="0"/>
+                <a:ea typeface="Calibri" pitchFamily="34" charset="-122"/>
+                <a:cs typeface="Calibri" pitchFamily="34" charset="-120"/>
+              </a:rPr>
+              <a:t>dispatched</a:t>
+            </a:r>
+            <a:endParaRPr lang="en-US" sz="850" dirty="0"/>
+          </a:p>
+        </p:txBody>
+      </p:sp>
+      <p:sp>
+        <p:nvSpPr>
+          <p:cNvPr id="36" name="Shape 34"/>
+          <p:cNvSpPr/>
+          <p:nvPr/>
+        </p:nvSpPr>
+        <p:spPr>
+          <a:xfrm>
+            <a:off x="9045550" y="5614416"/>
+            <a:ext cx="1070153" cy="548640"/>
+          </a:xfrm>
+          <a:prstGeom prst="roundRect">
+            <a:avLst>
+              <a:gd name="adj" fmla="val 8333"/>
+            </a:avLst>
+          </a:prstGeom>
+          <a:solidFill>
+            <a:srgbClr val="F3F6F9"/>
+          </a:solidFill>
+          <a:ln w="9525">
+            <a:solidFill>
+              <a:srgbClr val="CFD8E1"/>
+            </a:solidFill>
+            <a:prstDash val="solid"/>
+          </a:ln>
+        </p:spPr>
+      </p:sp>
+      <p:sp>
+        <p:nvSpPr>
+          <p:cNvPr id="37" name="Text 35"/>
+          <p:cNvSpPr txBox="1"/>
+          <p:nvPr/>
+        </p:nvSpPr>
+        <p:spPr>
+          <a:xfrm>
+            <a:off x="9082126" y="5614416"/>
+            <a:ext cx="997001" cy="548640"/>
+          </a:xfrm>
+          <a:prstGeom prst="rect">
+            <a:avLst/>
+          </a:prstGeom>
+          <a:noFill/>
+          <a:ln/>
+        </p:spPr>
+        <p:txBody>
+          <a:bodyPr wrap="square" lIns="0" tIns="0" rIns="0" bIns="0" rtlCol="0" anchor="ctr"/>
+          <a:lstStyle/>
+          <a:p>
+            <a:pPr marL="0" indent="0" algn="ctr">
+              <a:lnSpc>
+                <a:spcPts val="1100"/>
+              </a:lnSpc>
+              <a:buNone/>
+            </a:pPr>
+            <a:r>
+              <a:rPr lang="en-US" sz="850" dirty="0">
+                <a:solidFill>
+                  <a:srgbClr val="11253C"/>
+                </a:solidFill>
+                <a:latin typeface="Calibri" pitchFamily="34" charset="0"/>
+                <a:ea typeface="Calibri" pitchFamily="34" charset="-122"/>
+                <a:cs typeface="Calibri" pitchFamily="34" charset="-120"/>
+              </a:rPr>
+              <a:t>Closed</a:t>
+            </a:r>
+            <a:endParaRPr lang="en-US" sz="850" dirty="0"/>
+          </a:p>
+          <a:p>
+            <a:pPr marL="0" indent="0" algn="ctr">
+              <a:lnSpc>
+                <a:spcPts val="1100"/>
+              </a:lnSpc>
+              <a:buNone/>
+            </a:pPr>
+            <a:r>
+              <a:rPr lang="en-US" sz="850" dirty="0">
+                <a:solidFill>
+                  <a:srgbClr val="11253C"/>
+                </a:solidFill>
+                <a:latin typeface="Calibri" pitchFamily="34" charset="0"/>
+                <a:ea typeface="Calibri" pitchFamily="34" charset="-122"/>
+                <a:cs typeface="Calibri" pitchFamily="34" charset="-120"/>
+              </a:rPr>
+              <a:t>with proof</a:t>
+            </a:r>
+            <a:endParaRPr lang="en-US" sz="850" dirty="0"/>
+          </a:p>
+        </p:txBody>
+      </p:sp>
+      <p:sp>
+        <p:nvSpPr>
+          <p:cNvPr id="38" name="Shape 36"/>
+          <p:cNvSpPr/>
+          <p:nvPr/>
+        </p:nvSpPr>
+        <p:spPr>
+          <a:xfrm>
+            <a:off x="10207142" y="5614416"/>
+            <a:ext cx="1070153" cy="548640"/>
+          </a:xfrm>
+          <a:prstGeom prst="roundRect">
+            <a:avLst>
+              <a:gd name="adj" fmla="val 8333"/>
+            </a:avLst>
+          </a:prstGeom>
+          <a:solidFill>
+            <a:srgbClr val="F3F6F9"/>
+          </a:solidFill>
+          <a:ln w="9525">
+            <a:solidFill>
+              <a:srgbClr val="CFD8E1"/>
+            </a:solidFill>
+            <a:prstDash val="solid"/>
+          </a:ln>
+        </p:spPr>
+      </p:sp>
+      <p:sp>
+        <p:nvSpPr>
+          <p:cNvPr id="39" name="Text 37"/>
+          <p:cNvSpPr txBox="1"/>
+          <p:nvPr/>
+        </p:nvSpPr>
+        <p:spPr>
+          <a:xfrm>
+            <a:off x="10243718" y="5614416"/>
+            <a:ext cx="997001" cy="548640"/>
+          </a:xfrm>
+          <a:prstGeom prst="rect">
+            <a:avLst/>
+          </a:prstGeom>
+          <a:noFill/>
+          <a:ln/>
+        </p:spPr>
+        <p:txBody>
+          <a:bodyPr wrap="square" lIns="0" tIns="0" rIns="0" bIns="0" rtlCol="0" anchor="ctr"/>
+          <a:lstStyle/>
+          <a:p>
+            <a:pPr marL="0" indent="0" algn="ctr">
+              <a:lnSpc>
+                <a:spcPts val="1100"/>
+              </a:lnSpc>
+              <a:buNone/>
+            </a:pPr>
+            <a:r>
+              <a:rPr lang="en-US" sz="850" dirty="0">
+                <a:solidFill>
+                  <a:srgbClr val="11253C"/>
+                </a:solidFill>
+                <a:latin typeface="Calibri" pitchFamily="34" charset="0"/>
+                <a:ea typeface="Calibri" pitchFamily="34" charset="-122"/>
+                <a:cs typeface="Calibri" pitchFamily="34" charset="-120"/>
+              </a:rPr>
+              <a:t>Override</a:t>
+            </a:r>
+            <a:endParaRPr lang="en-US" sz="850" dirty="0"/>
+          </a:p>
+          <a:p>
+            <a:pPr marL="0" indent="0" algn="ctr">
+              <a:lnSpc>
+                <a:spcPts val="1100"/>
+              </a:lnSpc>
+              <a:buNone/>
+            </a:pPr>
+            <a:r>
+              <a:rPr lang="en-US" sz="850" dirty="0">
+                <a:solidFill>
+                  <a:srgbClr val="11253C"/>
+                </a:solidFill>
+                <a:latin typeface="Calibri" pitchFamily="34" charset="0"/>
+                <a:ea typeface="Calibri" pitchFamily="34" charset="-122"/>
+                <a:cs typeface="Calibri" pitchFamily="34" charset="-120"/>
+              </a:rPr>
+              <a:t>learned from</a:t>
+            </a:r>
+            <a:endParaRPr lang="en-US" sz="850" dirty="0"/>
           </a:p>
         </p:txBody>
       </p:sp>
@@ -9184,11 +10252,11 @@
           <a:bodyPr wrap="square" lIns="0" tIns="0" rIns="0" bIns="0" rtlCol="0" anchor="ctr"/>
           <a:lstStyle/>
           <a:p>
-            <a:pPr algn="l" indent="0" marL="0">
-              <a:buNone/>
-            </a:pPr>
-            <a:r>
-              <a:rPr lang="en-US" sz="1050" b="1" spc="220" kern="0" dirty="0">
+            <a:pPr marL="0" indent="0" algn="l">
+              <a:buNone/>
+            </a:pPr>
+            <a:r>
+              <a:rPr lang="en-US" sz="1050" b="1" kern="0" spc="220" dirty="0">
                 <a:solidFill>
                   <a:srgbClr val="6E8194"/>
                 </a:solidFill>
@@ -9223,7 +10291,7 @@
           <a:bodyPr wrap="square" lIns="0" tIns="0" rIns="0" bIns="0" rtlCol="0" anchor="ctr"/>
           <a:lstStyle/>
           <a:p>
-            <a:pPr algn="l" indent="0" marL="0">
+            <a:pPr marL="0" indent="0" algn="l">
               <a:buNone/>
             </a:pPr>
             <a:r>
@@ -9262,11 +10330,11 @@
           <a:bodyPr wrap="square" lIns="0" tIns="0" rIns="0" bIns="0" rtlCol="0" anchor="ctr"/>
           <a:lstStyle/>
           <a:p>
-            <a:pPr indent="0" marL="0">
-              <a:buNone/>
-            </a:pPr>
-            <a:r>
-              <a:rPr lang="en-US" sz="1000" b="1" spc="160" kern="0" dirty="0">
+            <a:pPr marL="0" indent="0">
+              <a:buNone/>
+            </a:pPr>
+            <a:r>
+              <a:rPr lang="en-US" sz="1000" b="1" kern="0" spc="160" dirty="0">
                 <a:solidFill>
                   <a:srgbClr val="6E8194"/>
                 </a:solidFill>
@@ -9326,7 +10394,7 @@
           <a:bodyPr wrap="square" lIns="0" tIns="0" rIns="0" bIns="0" rtlCol="0" anchor="ctr"/>
           <a:lstStyle/>
           <a:p>
-            <a:pPr algn="ctr" indent="0" marL="0">
+            <a:pPr marL="0" indent="0" algn="ctr">
               <a:buNone/>
             </a:pPr>
             <a:r>
@@ -9365,7 +10433,7 @@
           <a:bodyPr wrap="square" lIns="0" tIns="0" rIns="0" bIns="0" rtlCol="0" anchor="ctr"/>
           <a:lstStyle/>
           <a:p>
-            <a:pPr indent="0" marL="0">
+            <a:pPr marL="0" indent="0">
               <a:buNone/>
             </a:pPr>
             <a:r>
@@ -9404,7 +10472,7 @@
           <a:bodyPr wrap="square" lIns="0" tIns="0" rIns="0" bIns="0" rtlCol="0" anchor="ctr"/>
           <a:lstStyle/>
           <a:p>
-            <a:pPr indent="0" marL="0">
+            <a:pPr marL="0" indent="0">
               <a:lnSpc>
                 <a:spcPts val="1600"/>
               </a:lnSpc>
@@ -9471,7 +10539,7 @@
           <a:bodyPr wrap="square" lIns="0" tIns="0" rIns="0" bIns="0" rtlCol="0" anchor="ctr"/>
           <a:lstStyle/>
           <a:p>
-            <a:pPr algn="ctr" indent="0" marL="0">
+            <a:pPr marL="0" indent="0" algn="ctr">
               <a:buNone/>
             </a:pPr>
             <a:r>
@@ -9510,7 +10578,7 @@
           <a:bodyPr wrap="square" lIns="0" tIns="0" rIns="0" bIns="0" rtlCol="0" anchor="ctr"/>
           <a:lstStyle/>
           <a:p>
-            <a:pPr indent="0" marL="0">
+            <a:pPr marL="0" indent="0">
               <a:buNone/>
             </a:pPr>
             <a:r>
@@ -9549,7 +10617,7 @@
           <a:bodyPr wrap="square" lIns="0" tIns="0" rIns="0" bIns="0" rtlCol="0" anchor="ctr"/>
           <a:lstStyle/>
           <a:p>
-            <a:pPr indent="0" marL="0">
+            <a:pPr marL="0" indent="0">
               <a:lnSpc>
                 <a:spcPts val="1600"/>
               </a:lnSpc>
@@ -9616,7 +10684,7 @@
           <a:bodyPr wrap="square" lIns="0" tIns="0" rIns="0" bIns="0" rtlCol="0" anchor="ctr"/>
           <a:lstStyle/>
           <a:p>
-            <a:pPr algn="ctr" indent="0" marL="0">
+            <a:pPr marL="0" indent="0" algn="ctr">
               <a:buNone/>
             </a:pPr>
             <a:r>
@@ -9655,7 +10723,7 @@
           <a:bodyPr wrap="square" lIns="0" tIns="0" rIns="0" bIns="0" rtlCol="0" anchor="ctr"/>
           <a:lstStyle/>
           <a:p>
-            <a:pPr indent="0" marL="0">
+            <a:pPr marL="0" indent="0">
               <a:buNone/>
             </a:pPr>
             <a:r>
@@ -9694,7 +10762,7 @@
           <a:bodyPr wrap="square" lIns="0" tIns="0" rIns="0" bIns="0" rtlCol="0" anchor="ctr"/>
           <a:lstStyle/>
           <a:p>
-            <a:pPr indent="0" marL="0">
+            <a:pPr marL="0" indent="0">
               <a:lnSpc>
                 <a:spcPts val="1600"/>
               </a:lnSpc>
@@ -9761,7 +10829,7 @@
           <a:bodyPr wrap="square" lIns="0" tIns="0" rIns="0" bIns="0" rtlCol="0" anchor="ctr"/>
           <a:lstStyle/>
           <a:p>
-            <a:pPr algn="ctr" indent="0" marL="0">
+            <a:pPr marL="0" indent="0" algn="ctr">
               <a:buNone/>
             </a:pPr>
             <a:r>
@@ -9800,7 +10868,7 @@
           <a:bodyPr wrap="square" lIns="0" tIns="0" rIns="0" bIns="0" rtlCol="0" anchor="ctr"/>
           <a:lstStyle/>
           <a:p>
-            <a:pPr indent="0" marL="0">
+            <a:pPr marL="0" indent="0">
               <a:buNone/>
             </a:pPr>
             <a:r>
@@ -9839,7 +10907,7 @@
           <a:bodyPr wrap="square" lIns="0" tIns="0" rIns="0" bIns="0" rtlCol="0" anchor="ctr"/>
           <a:lstStyle/>
           <a:p>
-            <a:pPr indent="0" marL="0">
+            <a:pPr marL="0" indent="0">
               <a:lnSpc>
                 <a:spcPts val="1600"/>
               </a:lnSpc>
@@ -9906,11 +10974,11 @@
           <a:bodyPr wrap="square" lIns="0" tIns="0" rIns="0" bIns="0" rtlCol="0" anchor="ctr"/>
           <a:lstStyle/>
           <a:p>
-            <a:pPr indent="0" marL="0">
-              <a:buNone/>
-            </a:pPr>
-            <a:r>
-              <a:rPr lang="en-US" sz="1000" b="1" spc="150" kern="0" dirty="0">
+            <a:pPr marL="0" indent="0">
+              <a:buNone/>
+            </a:pPr>
+            <a:r>
+              <a:rPr lang="en-US" sz="1000" b="1" kern="0" spc="150" dirty="0">
                 <a:solidFill>
                   <a:srgbClr val="6E8194"/>
                 </a:solidFill>
@@ -9970,7 +11038,7 @@
           <a:bodyPr wrap="square" lIns="0" tIns="0" rIns="0" bIns="0" rtlCol="0" anchor="ctr"/>
           <a:lstStyle/>
           <a:p>
-            <a:pPr indent="0" marL="0">
+            <a:pPr marL="0" indent="0">
               <a:buNone/>
             </a:pPr>
             <a:r>
@@ -10034,7 +11102,7 @@
           <a:bodyPr wrap="square" lIns="0" tIns="0" rIns="0" bIns="0" rtlCol="0" anchor="ctr"/>
           <a:lstStyle/>
           <a:p>
-            <a:pPr indent="0" marL="0">
+            <a:pPr marL="0" indent="0">
               <a:buNone/>
             </a:pPr>
             <a:r>
@@ -10098,7 +11166,7 @@
           <a:bodyPr wrap="square" lIns="0" tIns="0" rIns="0" bIns="0" rtlCol="0" anchor="ctr"/>
           <a:lstStyle/>
           <a:p>
-            <a:pPr indent="0" marL="0">
+            <a:pPr marL="0" indent="0">
               <a:buNone/>
             </a:pPr>
             <a:r>
@@ -10162,11 +11230,11 @@
           <a:bodyPr wrap="square" lIns="0" tIns="0" rIns="0" bIns="0" rtlCol="0" anchor="ctr"/>
           <a:lstStyle/>
           <a:p>
-            <a:pPr indent="0" marL="0">
-              <a:buNone/>
-            </a:pPr>
-            <a:r>
-              <a:rPr lang="en-US" sz="1000" b="1" spc="150" kern="0" dirty="0">
+            <a:pPr marL="0" indent="0">
+              <a:buNone/>
+            </a:pPr>
+            <a:r>
+              <a:rPr lang="en-US" sz="1000" b="1" kern="0" spc="150" dirty="0">
                 <a:solidFill>
                   <a:srgbClr val="6E8194"/>
                 </a:solidFill>
@@ -10226,7 +11294,7 @@
           <a:bodyPr wrap="square" lIns="0" tIns="0" rIns="0" bIns="0" rtlCol="0" anchor="ctr"/>
           <a:lstStyle/>
           <a:p>
-            <a:pPr indent="0" marL="0">
+            <a:pPr marL="0" indent="0">
               <a:buNone/>
             </a:pPr>
             <a:r>
@@ -10290,7 +11358,7 @@
           <a:bodyPr wrap="square" lIns="0" tIns="0" rIns="0" bIns="0" rtlCol="0" anchor="ctr"/>
           <a:lstStyle/>
           <a:p>
-            <a:pPr indent="0" marL="0">
+            <a:pPr marL="0" indent="0">
               <a:buNone/>
             </a:pPr>
             <a:r>
@@ -10354,7 +11422,7 @@
           <a:bodyPr wrap="square" lIns="0" tIns="0" rIns="0" bIns="0" rtlCol="0" anchor="ctr"/>
           <a:lstStyle/>
           <a:p>
-            <a:pPr indent="0" marL="0">
+            <a:pPr marL="0" indent="0">
               <a:buNone/>
             </a:pPr>
             <a:r>
@@ -10380,8 +11448,222 @@
         </p:nvSpPr>
         <p:spPr>
           <a:xfrm>
-            <a:off x="640080" y="5596128"/>
-            <a:ext cx="10911535" cy="804672"/>
+            <a:off x="640080" y="5413248"/>
+            <a:ext cx="5318608" cy="987552"/>
+          </a:xfrm>
+          <a:prstGeom prst="rect">
+            <a:avLst/>
+          </a:prstGeom>
+          <a:solidFill>
+            <a:srgbClr val="FFFFFF"/>
+          </a:solidFill>
+          <a:ln w="15875">
+            <a:solidFill>
+              <a:srgbClr val="9FAFBE"/>
+            </a:solidFill>
+            <a:prstDash val="solid"/>
+          </a:ln>
+        </p:spPr>
+      </p:sp>
+      <p:sp>
+        <p:nvSpPr>
+          <p:cNvPr id="38" name="Text 36"/>
+          <p:cNvSpPr txBox="1"/>
+          <p:nvPr/>
+        </p:nvSpPr>
+        <p:spPr>
+          <a:xfrm>
+            <a:off x="877824" y="5541264"/>
+            <a:ext cx="4843120" cy="201168"/>
+          </a:xfrm>
+          <a:prstGeom prst="rect">
+            <a:avLst/>
+          </a:prstGeom>
+          <a:noFill/>
+          <a:ln/>
+        </p:spPr>
+        <p:txBody>
+          <a:bodyPr wrap="square" lIns="0" tIns="0" rIns="0" bIns="0" rtlCol="0" anchor="ctr"/>
+          <a:lstStyle/>
+          <a:p>
+            <a:pPr marL="0" indent="0">
+              <a:buNone/>
+            </a:pPr>
+            <a:r>
+              <a:rPr lang="en-US" sz="950" b="1" kern="0" spc="150" dirty="0">
+                <a:solidFill>
+                  <a:srgbClr val="6E8194"/>
+                </a:solidFill>
+                <a:latin typeface="Calibri" pitchFamily="34" charset="0"/>
+                <a:ea typeface="Calibri" pitchFamily="34" charset="-122"/>
+                <a:cs typeface="Calibri" pitchFamily="34" charset="-120"/>
+              </a:rPr>
+              <a:t>FLOOD RISK MODEL</a:t>
+            </a:r>
+            <a:endParaRPr lang="en-US" sz="950" dirty="0"/>
+          </a:p>
+        </p:txBody>
+      </p:sp>
+      <p:sp>
+        <p:nvSpPr>
+          <p:cNvPr id="39" name="Text 37"/>
+          <p:cNvSpPr txBox="1"/>
+          <p:nvPr/>
+        </p:nvSpPr>
+        <p:spPr>
+          <a:xfrm>
+            <a:off x="877824" y="5742432"/>
+            <a:ext cx="4843120" cy="201168"/>
+          </a:xfrm>
+          <a:prstGeom prst="rect">
+            <a:avLst/>
+          </a:prstGeom>
+          <a:noFill/>
+          <a:ln/>
+        </p:spPr>
+        <p:txBody>
+          <a:bodyPr wrap="square" lIns="0" tIns="0" rIns="0" bIns="0" rtlCol="0" anchor="ctr"/>
+          <a:lstStyle/>
+          <a:p>
+            <a:pPr marL="0" indent="0">
+              <a:buNone/>
+            </a:pPr>
+            <a:r>
+              <a:rPr lang="en-US" sz="950" b="1" dirty="0">
+                <a:solidFill>
+                  <a:srgbClr val="11253C"/>
+                </a:solidFill>
+                <a:latin typeface="Calibri" pitchFamily="34" charset="0"/>
+                <a:ea typeface="Calibri" pitchFamily="34" charset="-122"/>
+                <a:cs typeface="Calibri" pitchFamily="34" charset="-120"/>
+              </a:rPr>
+              <a:t>Inputs   </a:t>
+            </a:r>
+            <a:r>
+              <a:rPr lang="en-US" sz="950" dirty="0">
+                <a:solidFill>
+                  <a:srgbClr val="3D5468"/>
+                </a:solidFill>
+                <a:latin typeface="Calibri" pitchFamily="34" charset="0"/>
+                <a:ea typeface="Calibri" pitchFamily="34" charset="-122"/>
+                <a:cs typeface="Calibri" pitchFamily="34" charset="-120"/>
+              </a:rPr>
+              <a:t>rainfall, elevation, drainage, reservoir discharge, flood history, land cover</a:t>
+            </a:r>
+            <a:endParaRPr lang="en-US" sz="950" dirty="0"/>
+          </a:p>
+        </p:txBody>
+      </p:sp>
+      <p:sp>
+        <p:nvSpPr>
+          <p:cNvPr id="40" name="Text 38"/>
+          <p:cNvSpPr txBox="1"/>
+          <p:nvPr/>
+        </p:nvSpPr>
+        <p:spPr>
+          <a:xfrm>
+            <a:off x="877824" y="5952744"/>
+            <a:ext cx="4843120" cy="201168"/>
+          </a:xfrm>
+          <a:prstGeom prst="rect">
+            <a:avLst/>
+          </a:prstGeom>
+          <a:noFill/>
+          <a:ln/>
+        </p:spPr>
+        <p:txBody>
+          <a:bodyPr wrap="square" lIns="0" tIns="0" rIns="0" bIns="0" rtlCol="0" anchor="ctr"/>
+          <a:lstStyle/>
+          <a:p>
+            <a:pPr marL="0" indent="0">
+              <a:buNone/>
+            </a:pPr>
+            <a:r>
+              <a:rPr lang="en-US" sz="950" b="1" dirty="0">
+                <a:solidFill>
+                  <a:srgbClr val="11253C"/>
+                </a:solidFill>
+                <a:latin typeface="Calibri" pitchFamily="34" charset="0"/>
+                <a:ea typeface="Calibri" pitchFamily="34" charset="-122"/>
+                <a:cs typeface="Calibri" pitchFamily="34" charset="-120"/>
+              </a:rPr>
+              <a:t>Model   </a:t>
+            </a:r>
+            <a:r>
+              <a:rPr lang="en-US" sz="950" dirty="0">
+                <a:solidFill>
+                  <a:srgbClr val="3D5468"/>
+                </a:solidFill>
+                <a:latin typeface="Calibri" pitchFamily="34" charset="0"/>
+                <a:ea typeface="Calibri" pitchFamily="34" charset="-122"/>
+                <a:cs typeface="Calibri" pitchFamily="34" charset="-120"/>
+              </a:rPr>
+              <a:t>gradient-boosted trees over a 250 m grid, per hazard adapter</a:t>
+            </a:r>
+            <a:endParaRPr lang="en-US" sz="950" dirty="0"/>
+          </a:p>
+        </p:txBody>
+      </p:sp>
+      <p:sp>
+        <p:nvSpPr>
+          <p:cNvPr id="41" name="Text 39"/>
+          <p:cNvSpPr txBox="1"/>
+          <p:nvPr/>
+        </p:nvSpPr>
+        <p:spPr>
+          <a:xfrm>
+            <a:off x="877824" y="6163056"/>
+            <a:ext cx="4843120" cy="201168"/>
+          </a:xfrm>
+          <a:prstGeom prst="rect">
+            <a:avLst/>
+          </a:prstGeom>
+          <a:noFill/>
+          <a:ln/>
+        </p:spPr>
+        <p:txBody>
+          <a:bodyPr wrap="square" lIns="0" tIns="0" rIns="0" bIns="0" rtlCol="0" anchor="ctr"/>
+          <a:lstStyle/>
+          <a:p>
+            <a:pPr marL="0" indent="0">
+              <a:buNone/>
+            </a:pPr>
+            <a:r>
+              <a:rPr lang="en-US" sz="950" b="1" dirty="0">
+                <a:solidFill>
+                  <a:srgbClr val="11253C"/>
+                </a:solidFill>
+                <a:latin typeface="Calibri" pitchFamily="34" charset="0"/>
+                <a:ea typeface="Calibri" pitchFamily="34" charset="-122"/>
+                <a:cs typeface="Calibri" pitchFamily="34" charset="-120"/>
+              </a:rPr>
+              <a:t>Validation   </a:t>
+            </a:r>
+            <a:r>
+              <a:rPr lang="en-US" sz="950" dirty="0">
+                <a:solidFill>
+                  <a:srgbClr val="3D5468"/>
+                </a:solidFill>
+                <a:latin typeface="Calibri" pitchFamily="34" charset="0"/>
+                <a:ea typeface="Calibri" pitchFamily="34" charset="-122"/>
+                <a:cs typeface="Calibri" pitchFamily="34" charset="-120"/>
+              </a:rPr>
+              <a:t>backtested on the July 2024 Pune event; metrics reported post-evaluation</a:t>
+            </a:r>
+            <a:endParaRPr lang="en-US" sz="950" dirty="0"/>
+          </a:p>
+        </p:txBody>
+      </p:sp>
+      <p:sp>
+        <p:nvSpPr>
+          <p:cNvPr id="42" name="Shape 40"/>
+          <p:cNvSpPr/>
+          <p:nvPr/>
+        </p:nvSpPr>
+        <p:spPr>
+          <a:xfrm>
+            <a:off x="6233008" y="5413248"/>
+            <a:ext cx="5318608" cy="987552"/>
           </a:xfrm>
           <a:prstGeom prst="rect">
             <a:avLst/>
@@ -10399,30 +11681,30 @@
       </p:sp>
       <p:sp>
         <p:nvSpPr>
-          <p:cNvPr id="38" name="Text 36"/>
-          <p:cNvSpPr txBox="1"/>
-          <p:nvPr/>
-        </p:nvSpPr>
-        <p:spPr>
-          <a:xfrm>
-            <a:off x="914400" y="5742432"/>
-            <a:ext cx="2194560" cy="201168"/>
-          </a:xfrm>
-          <a:prstGeom prst="rect">
-            <a:avLst/>
-          </a:prstGeom>
-          <a:noFill/>
-          <a:ln/>
-        </p:spPr>
-        <p:txBody>
-          <a:bodyPr wrap="square" lIns="0" tIns="0" rIns="0" bIns="0" rtlCol="0" anchor="ctr"/>
-          <a:lstStyle/>
-          <a:p>
-            <a:pPr indent="0" marL="0">
-              <a:buNone/>
-            </a:pPr>
-            <a:r>
-              <a:rPr lang="en-US" sz="950" b="1" spc="150" kern="0" dirty="0">
+          <p:cNvPr id="43" name="Text 41"/>
+          <p:cNvSpPr txBox="1"/>
+          <p:nvPr/>
+        </p:nvSpPr>
+        <p:spPr>
+          <a:xfrm>
+            <a:off x="6470752" y="5541264"/>
+            <a:ext cx="4843120" cy="201168"/>
+          </a:xfrm>
+          <a:prstGeom prst="rect">
+            <a:avLst/>
+          </a:prstGeom>
+          <a:noFill/>
+          <a:ln/>
+        </p:spPr>
+        <p:txBody>
+          <a:bodyPr wrap="square" lIns="0" tIns="0" rIns="0" bIns="0" rtlCol="0" anchor="ctr"/>
+          <a:lstStyle/>
+          <a:p>
+            <a:pPr marL="0" indent="0">
+              <a:buNone/>
+            </a:pPr>
+            <a:r>
+              <a:rPr lang="en-US" sz="950" b="1" kern="0" spc="150" dirty="0">
                 <a:solidFill>
                   <a:srgbClr val="6E8194"/>
                 </a:solidFill>
@@ -10438,33 +11720,33 @@
       </p:sp>
       <p:sp>
         <p:nvSpPr>
-          <p:cNvPr id="39" name="Text 37"/>
-          <p:cNvSpPr txBox="1"/>
-          <p:nvPr/>
-        </p:nvSpPr>
-        <p:spPr>
-          <a:xfrm>
-            <a:off x="914400" y="5961888"/>
-            <a:ext cx="10362895" cy="384048"/>
-          </a:xfrm>
-          <a:prstGeom prst="rect">
-            <a:avLst/>
-          </a:prstGeom>
-          <a:noFill/>
-          <a:ln/>
-        </p:spPr>
-        <p:txBody>
-          <a:bodyPr wrap="square" lIns="0" tIns="0" rIns="0" bIns="0" rtlCol="0" anchor="ctr"/>
-          <a:lstStyle/>
-          <a:p>
-            <a:pPr indent="0" marL="0">
+          <p:cNvPr id="44" name="Text 42"/>
+          <p:cNvSpPr txBox="1"/>
+          <p:nvPr/>
+        </p:nvSpPr>
+        <p:spPr>
+          <a:xfrm>
+            <a:off x="6470752" y="5760720"/>
+            <a:ext cx="4843120" cy="566928"/>
+          </a:xfrm>
+          <a:prstGeom prst="rect">
+            <a:avLst/>
+          </a:prstGeom>
+          <a:noFill/>
+          <a:ln/>
+        </p:spPr>
+        <p:txBody>
+          <a:bodyPr wrap="square" lIns="0" tIns="0" rIns="0" bIns="0" rtlCol="0" anchor="ctr"/>
+          <a:lstStyle/>
+          <a:p>
+            <a:pPr marL="0" indent="0">
               <a:lnSpc>
-                <a:spcPts val="1600"/>
+                <a:spcPts val="1400"/>
               </a:lnSpc>
               <a:buNone/>
             </a:pPr>
             <a:r>
-              <a:rPr lang="en-US" sz="1150" dirty="0">
+              <a:rPr lang="en-US" sz="1000" dirty="0">
                 <a:solidFill>
                   <a:srgbClr val="3D5468"/>
                 </a:solidFill>
@@ -10474,7 +11756,7 @@
               </a:rPr>
               <a:t>A new city needs three inputs — ward geometry, a terrain model and an exposure layer. Everything above that is shared. Because every live hazard feed is an open, keyless or free-tier API, onboarding the next municipality is a configuration task, not a procurement cycle.</a:t>
             </a:r>
-            <a:endParaRPr lang="en-US" sz="1150" dirty="0"/>
+            <a:endParaRPr lang="en-US" sz="1000" dirty="0"/>
           </a:p>
         </p:txBody>
       </p:sp>
@@ -10524,11 +11806,11 @@
           <a:bodyPr wrap="square" lIns="0" tIns="0" rIns="0" bIns="0" rtlCol="0" anchor="ctr"/>
           <a:lstStyle/>
           <a:p>
-            <a:pPr algn="l" indent="0" marL="0">
-              <a:buNone/>
-            </a:pPr>
-            <a:r>
-              <a:rPr lang="en-US" sz="1050" b="1" spc="220" kern="0" dirty="0">
+            <a:pPr marL="0" indent="0" algn="l">
+              <a:buNone/>
+            </a:pPr>
+            <a:r>
+              <a:rPr lang="en-US" sz="1050" b="1" kern="0" spc="220" dirty="0">
                 <a:solidFill>
                   <a:srgbClr val="6E8194"/>
                 </a:solidFill>
@@ -10563,7 +11845,7 @@
           <a:bodyPr wrap="square" lIns="0" tIns="0" rIns="0" bIns="0" rtlCol="0" anchor="ctr"/>
           <a:lstStyle/>
           <a:p>
-            <a:pPr algn="l" indent="0" marL="0">
+            <a:pPr marL="0" indent="0" algn="l">
               <a:buNone/>
             </a:pPr>
             <a:r>
@@ -10589,27 +11871,66 @@
         </p:nvSpPr>
         <p:spPr>
           <a:xfrm>
-            <a:off x="640080" y="1572768"/>
-            <a:ext cx="8595360" cy="1280160"/>
-          </a:xfrm>
-          <a:prstGeom prst="rect">
-            <a:avLst/>
-          </a:prstGeom>
-          <a:noFill/>
-          <a:ln/>
-        </p:spPr>
-        <p:txBody>
-          <a:bodyPr wrap="square" lIns="0" tIns="0" rIns="0" bIns="0" rtlCol="0" anchor="ctr"/>
-          <a:lstStyle/>
-          <a:p>
-            <a:pPr indent="0" marL="0">
+            <a:off x="640080" y="1554480"/>
+            <a:ext cx="8595360" cy="950976"/>
+          </a:xfrm>
+          <a:prstGeom prst="rect">
+            <a:avLst/>
+          </a:prstGeom>
+          <a:noFill/>
+          <a:ln/>
+        </p:spPr>
+        <p:txBody>
+          <a:bodyPr wrap="square" lIns="0" tIns="0" rIns="0" bIns="0" rtlCol="0" anchor="ctr"/>
+          <a:lstStyle/>
+          <a:p>
+            <a:pPr marL="0" indent="0">
               <a:lnSpc>
-                <a:spcPts val="2900"/>
+                <a:spcPts val="2400"/>
               </a:lnSpc>
               <a:buNone/>
             </a:pPr>
             <a:r>
-              <a:rPr lang="en-US" sz="1850" dirty="0">
+              <a:rPr lang="en-US" sz="1500" dirty="0">
+                <a:solidFill>
+                  <a:srgbClr val="3D5468"/>
+                </a:solidFill>
+                <a:latin typeface="Calibri" pitchFamily="34" charset="0"/>
+                <a:ea typeface="Calibri" pitchFamily="34" charset="-122"/>
+                <a:cs typeface="Calibri" pitchFamily="34" charset="-120"/>
+              </a:rPr>
+              <a:t>India's forecasting is not the weak link. The gap is everything that happens after the forecast — who acts, where, and by when. Indradhanu is that layer, and it works the same way for a flood tonight as for a heatwave, a fire or a quake.</a:t>
+            </a:r>
+            <a:endParaRPr lang="en-US" sz="1500" dirty="0"/>
+          </a:p>
+        </p:txBody>
+      </p:sp>
+      <p:sp>
+        <p:nvSpPr>
+          <p:cNvPr id="5" name="Text 3"/>
+          <p:cNvSpPr txBox="1"/>
+          <p:nvPr/>
+        </p:nvSpPr>
+        <p:spPr>
+          <a:xfrm>
+            <a:off x="640080" y="2670048"/>
+            <a:ext cx="10911535" cy="566928"/>
+          </a:xfrm>
+          <a:prstGeom prst="rect">
+            <a:avLst/>
+          </a:prstGeom>
+          <a:noFill/>
+          <a:ln/>
+        </p:spPr>
+        <p:txBody>
+          <a:bodyPr wrap="square" lIns="0" tIns="0" rIns="0" bIns="0" rtlCol="0" anchor="ctr"/>
+          <a:lstStyle/>
+          <a:p>
+            <a:pPr marL="0" indent="0">
+              <a:buNone/>
+            </a:pPr>
+            <a:r>
+              <a:rPr lang="en-US" sz="3400" b="1" dirty="0">
                 <a:solidFill>
                   <a:srgbClr val="11253C"/>
                 </a:solidFill>
@@ -10617,21 +11938,60 @@
                 <a:ea typeface="Cambria" pitchFamily="34" charset="-122"/>
                 <a:cs typeface="Cambria" pitchFamily="34" charset="-120"/>
               </a:rPr>
-              <a:t>Indradhanu is the operational layer India's climate data is missing. It takes any disaster signal — flood today, heat, fire and seismic on the same architecture — and turns it into a ward-level impact map, a deployment order an officer can approve under a cited clause, and a plain-language instruction a resident can act on.</a:t>
-            </a:r>
-            <a:endParaRPr lang="en-US" sz="1850" dirty="0"/>
-          </a:p>
-        </p:txBody>
-      </p:sp>
-      <p:sp>
-        <p:nvSpPr>
-          <p:cNvPr id="5" name="Shape 3"/>
+              <a:t>Predict.  Decide.  Dispatch.  Protect.</a:t>
+            </a:r>
+            <a:endParaRPr lang="en-US" sz="3400" dirty="0"/>
+          </a:p>
+        </p:txBody>
+      </p:sp>
+      <p:sp>
+        <p:nvSpPr>
+          <p:cNvPr id="6" name="Text 4"/>
+          <p:cNvSpPr txBox="1"/>
+          <p:nvPr/>
+        </p:nvSpPr>
+        <p:spPr>
+          <a:xfrm>
+            <a:off x="640080" y="3255264"/>
+            <a:ext cx="10911535" cy="274320"/>
+          </a:xfrm>
+          <a:prstGeom prst="rect">
+            <a:avLst/>
+          </a:prstGeom>
+          <a:noFill/>
+          <a:ln/>
+        </p:spPr>
+        <p:txBody>
+          <a:bodyPr wrap="square" lIns="0" tIns="0" rIns="0" bIns="0" rtlCol="0" anchor="ctr"/>
+          <a:lstStyle/>
+          <a:p>
+            <a:pPr marL="0" indent="0">
+              <a:buNone/>
+            </a:pPr>
+            <a:r>
+              <a:rPr lang="en-US" sz="1400" dirty="0">
+                <a:solidFill>
+                  <a:srgbClr val="B23A24"/>
+                </a:solidFill>
+                <a:latin typeface="Calibri" pitchFamily="34" charset="0"/>
+                <a:ea typeface="Calibri" pitchFamily="34" charset="-122"/>
+                <a:cs typeface="Calibri" pitchFamily="34" charset="-120"/>
+              </a:rPr>
+              <a:t>From forecast to action — before the disaster becomes a crisis.</a:t>
+            </a:r>
+            <a:endParaRPr lang="en-US" sz="1400" dirty="0"/>
+          </a:p>
+        </p:txBody>
+      </p:sp>
+      <p:sp>
+        <p:nvSpPr>
+          <p:cNvPr id="7" name="Shape 5"/>
           <p:cNvSpPr/>
           <p:nvPr/>
         </p:nvSpPr>
         <p:spPr>
           <a:xfrm>
-            <a:off x="640080" y="3108960"/>
+            <a:off x="640080" y="3712464"/>
             <a:ext cx="10911535" cy="0"/>
           </a:xfrm>
           <a:prstGeom prst="line">
@@ -10648,13 +12008,13 @@
       </p:sp>
       <p:sp>
         <p:nvSpPr>
-          <p:cNvPr id="6" name="Text 4"/>
-          <p:cNvSpPr txBox="1"/>
-          <p:nvPr/>
-        </p:nvSpPr>
-        <p:spPr>
-          <a:xfrm>
-            <a:off x="640080" y="3328416"/>
+          <p:cNvPr id="8" name="Text 6"/>
+          <p:cNvSpPr txBox="1"/>
+          <p:nvPr/>
+        </p:nvSpPr>
+        <p:spPr>
+          <a:xfrm>
+            <a:off x="640080" y="3913632"/>
             <a:ext cx="5486400" cy="219456"/>
           </a:xfrm>
           <a:prstGeom prst="rect">
@@ -10667,11 +12027,11 @@
           <a:bodyPr wrap="square" lIns="0" tIns="0" rIns="0" bIns="0" rtlCol="0" anchor="ctr"/>
           <a:lstStyle/>
           <a:p>
-            <a:pPr indent="0" marL="0">
-              <a:buNone/>
-            </a:pPr>
-            <a:r>
-              <a:rPr lang="en-US" sz="1000" b="1" spc="180" kern="0" dirty="0">
+            <a:pPr marL="0" indent="0">
+              <a:buNone/>
+            </a:pPr>
+            <a:r>
+              <a:rPr lang="en-US" sz="1000" b="1" kern="0" spc="180" dirty="0">
                 <a:solidFill>
                   <a:srgbClr val="6E8194"/>
                 </a:solidFill>
@@ -10687,14 +12047,14 @@
       </p:sp>
       <p:sp>
         <p:nvSpPr>
-          <p:cNvPr id="7" name="Shape 5"/>
+          <p:cNvPr id="9" name="Shape 7"/>
           <p:cNvSpPr/>
           <p:nvPr/>
         </p:nvSpPr>
         <p:spPr>
           <a:xfrm>
-            <a:off x="640080" y="3639312"/>
-            <a:ext cx="3454298" cy="2121408"/>
+            <a:off x="640080" y="4206240"/>
+            <a:ext cx="3454298" cy="1627632"/>
           </a:xfrm>
           <a:prstGeom prst="rect">
             <a:avLst/>
@@ -10712,97 +12072,33 @@
       </p:sp>
       <p:sp>
         <p:nvSpPr>
-          <p:cNvPr id="8" name="Shape 6"/>
-          <p:cNvSpPr/>
-          <p:nvPr/>
-        </p:nvSpPr>
-        <p:spPr>
-          <a:xfrm>
-            <a:off x="877824" y="3840480"/>
-            <a:ext cx="347472" cy="347472"/>
-          </a:xfrm>
-          <a:prstGeom prst="ellipse">
-            <a:avLst/>
-          </a:prstGeom>
-          <a:solidFill>
-            <a:srgbClr val="11253C"/>
-          </a:solidFill>
-          <a:ln w="12700">
-            <a:solidFill>
-              <a:srgbClr val="11253C"/>
-            </a:solidFill>
-            <a:prstDash val="solid"/>
-          </a:ln>
-        </p:spPr>
-      </p:sp>
-      <p:sp>
-        <p:nvSpPr>
-          <p:cNvPr id="9" name="Text 7"/>
-          <p:cNvSpPr txBox="1"/>
-          <p:nvPr/>
-        </p:nvSpPr>
-        <p:spPr>
-          <a:xfrm>
-            <a:off x="877824" y="3840480"/>
-            <a:ext cx="347472" cy="347472"/>
-          </a:xfrm>
-          <a:prstGeom prst="rect">
-            <a:avLst/>
-          </a:prstGeom>
-          <a:noFill/>
-          <a:ln/>
-        </p:spPr>
-        <p:txBody>
-          <a:bodyPr wrap="square" lIns="0" tIns="0" rIns="0" bIns="0" rtlCol="0" anchor="ctr"/>
-          <a:lstStyle/>
-          <a:p>
-            <a:pPr algn="ctr" indent="0" marL="0">
-              <a:buNone/>
-            </a:pPr>
-            <a:r>
-              <a:rPr lang="en-US" sz="1200" b="1" dirty="0">
-                <a:solidFill>
-                  <a:srgbClr val="FFFFFF"/>
-                </a:solidFill>
-                <a:latin typeface="Calibri" pitchFamily="34" charset="0"/>
-                <a:ea typeface="Calibri" pitchFamily="34" charset="-122"/>
-                <a:cs typeface="Calibri" pitchFamily="34" charset="-120"/>
-              </a:rPr>
-              <a:t>1</a:t>
-            </a:r>
-            <a:endParaRPr lang="en-US" sz="1200" dirty="0"/>
-          </a:p>
-        </p:txBody>
-      </p:sp>
-      <p:sp>
-        <p:nvSpPr>
           <p:cNvPr id="10" name="Text 8"/>
           <p:cNvSpPr txBox="1"/>
           <p:nvPr/>
         </p:nvSpPr>
         <p:spPr>
           <a:xfrm>
-            <a:off x="877824" y="4315968"/>
-            <a:ext cx="2978810" cy="512064"/>
-          </a:xfrm>
-          <a:prstGeom prst="rect">
-            <a:avLst/>
-          </a:prstGeom>
-          <a:noFill/>
-          <a:ln/>
-        </p:spPr>
-        <p:txBody>
-          <a:bodyPr wrap="square" lIns="0" tIns="0" rIns="0" bIns="0" rtlCol="0" anchor="ctr"/>
-          <a:lstStyle/>
-          <a:p>
-            <a:pPr indent="0" marL="0">
+            <a:off x="877824" y="4389120"/>
+            <a:ext cx="2978810" cy="475488"/>
+          </a:xfrm>
+          <a:prstGeom prst="rect">
+            <a:avLst/>
+          </a:prstGeom>
+          <a:noFill/>
+          <a:ln/>
+        </p:spPr>
+        <p:txBody>
+          <a:bodyPr wrap="square" lIns="0" tIns="0" rIns="0" bIns="0" rtlCol="0" anchor="ctr"/>
+          <a:lstStyle/>
+          <a:p>
+            <a:pPr marL="0" indent="0">
               <a:lnSpc>
-                <a:spcPts val="2000"/>
+                <a:spcPts val="1900"/>
               </a:lnSpc>
               <a:buNone/>
             </a:pPr>
             <a:r>
-              <a:rPr lang="en-US" sz="1500" b="1" dirty="0">
+              <a:rPr lang="en-US" sz="1400" b="1" dirty="0">
                 <a:solidFill>
                   <a:srgbClr val="11253C"/>
                 </a:solidFill>
@@ -10812,7 +12108,7 @@
               </a:rPr>
               <a:t>It solves the gap, not the headline</a:t>
             </a:r>
-            <a:endParaRPr lang="en-US" sz="1500" dirty="0"/>
+            <a:endParaRPr lang="en-US" sz="1400" dirty="0"/>
           </a:p>
         </p:txBody>
       </p:sp>
@@ -10824,7 +12120,7 @@
         </p:nvSpPr>
         <p:spPr>
           <a:xfrm>
-            <a:off x="877824" y="4846320"/>
+            <a:off x="877824" y="4901184"/>
             <a:ext cx="2978810" cy="822960"/>
           </a:xfrm>
           <a:prstGeom prst="rect">
@@ -10837,14 +12133,14 @@
           <a:bodyPr wrap="square" lIns="0" tIns="0" rIns="0" bIns="0" rtlCol="0" anchor="ctr"/>
           <a:lstStyle/>
           <a:p>
-            <a:pPr indent="0" marL="0">
+            <a:pPr marL="0" indent="0">
               <a:lnSpc>
-                <a:spcPts val="1600"/>
+                <a:spcPts val="1500"/>
               </a:lnSpc>
               <a:buNone/>
             </a:pPr>
             <a:r>
-              <a:rPr lang="en-US" sz="1150" dirty="0">
+              <a:rPr lang="en-US" sz="1100" dirty="0">
                 <a:solidFill>
                   <a:srgbClr val="3D5468"/>
                 </a:solidFill>
@@ -10852,9 +12148,9 @@
                 <a:ea typeface="Calibri" pitchFamily="34" charset="-122"/>
                 <a:cs typeface="Calibri" pitchFamily="34" charset="-120"/>
               </a:rPr>
-              <a:t>Prediction is already well served in India. The unserved problem is converting a forecast into an accountable decision — and that is exactly what we build.</a:t>
-            </a:r>
-            <a:endParaRPr lang="en-US" sz="1150" dirty="0"/>
+              <a:t>Prediction is already well served in India. Converting a forecast into an accountable decision is not — and that is the part we build.</a:t>
+            </a:r>
+            <a:endParaRPr lang="en-US" sz="1100" dirty="0"/>
           </a:p>
         </p:txBody>
       </p:sp>
@@ -10866,8 +12162,8 @@
         </p:nvSpPr>
         <p:spPr>
           <a:xfrm>
-            <a:off x="4368698" y="3639312"/>
-            <a:ext cx="3454298" cy="2121408"/>
+            <a:off x="4368698" y="4206240"/>
+            <a:ext cx="3454298" cy="1627632"/>
           </a:xfrm>
           <a:prstGeom prst="rect">
             <a:avLst/>
@@ -10885,162 +12181,98 @@
       </p:sp>
       <p:sp>
         <p:nvSpPr>
-          <p:cNvPr id="13" name="Shape 11"/>
+          <p:cNvPr id="13" name="Text 11"/>
+          <p:cNvSpPr txBox="1"/>
+          <p:nvPr/>
+        </p:nvSpPr>
+        <p:spPr>
+          <a:xfrm>
+            <a:off x="4606442" y="4389120"/>
+            <a:ext cx="2978810" cy="475488"/>
+          </a:xfrm>
+          <a:prstGeom prst="rect">
+            <a:avLst/>
+          </a:prstGeom>
+          <a:noFill/>
+          <a:ln/>
+        </p:spPr>
+        <p:txBody>
+          <a:bodyPr wrap="square" lIns="0" tIns="0" rIns="0" bIns="0" rtlCol="0" anchor="ctr"/>
+          <a:lstStyle/>
+          <a:p>
+            <a:pPr marL="0" indent="0">
+              <a:lnSpc>
+                <a:spcPts val="1900"/>
+              </a:lnSpc>
+              <a:buNone/>
+            </a:pPr>
+            <a:r>
+              <a:rPr lang="en-US" sz="1400" b="1" dirty="0">
+                <a:solidFill>
+                  <a:srgbClr val="11253C"/>
+                </a:solidFill>
+                <a:latin typeface="Calibri" pitchFamily="34" charset="0"/>
+                <a:ea typeface="Calibri" pitchFamily="34" charset="-122"/>
+                <a:cs typeface="Calibri" pitchFamily="34" charset="-120"/>
+              </a:rPr>
+              <a:t>It is buildable, and provable out of season</a:t>
+            </a:r>
+            <a:endParaRPr lang="en-US" sz="1400" dirty="0"/>
+          </a:p>
+        </p:txBody>
+      </p:sp>
+      <p:sp>
+        <p:nvSpPr>
+          <p:cNvPr id="14" name="Text 12"/>
+          <p:cNvSpPr txBox="1"/>
+          <p:nvPr/>
+        </p:nvSpPr>
+        <p:spPr>
+          <a:xfrm>
+            <a:off x="4606442" y="4901184"/>
+            <a:ext cx="2978810" cy="822960"/>
+          </a:xfrm>
+          <a:prstGeom prst="rect">
+            <a:avLst/>
+          </a:prstGeom>
+          <a:noFill/>
+          <a:ln/>
+        </p:spPr>
+        <p:txBody>
+          <a:bodyPr wrap="square" lIns="0" tIns="0" rIns="0" bIns="0" rtlCol="0" anchor="ctr"/>
+          <a:lstStyle/>
+          <a:p>
+            <a:pPr marL="0" indent="0">
+              <a:lnSpc>
+                <a:spcPts val="1500"/>
+              </a:lnSpc>
+              <a:buNone/>
+            </a:pPr>
+            <a:r>
+              <a:rPr lang="en-US" sz="1100" dirty="0">
+                <a:solidFill>
+                  <a:srgbClr val="3D5468"/>
+                </a:solidFill>
+                <a:latin typeface="Calibri" pitchFamily="34" charset="0"/>
+                <a:ea typeface="Calibri" pitchFamily="34" charset="-122"/>
+                <a:cs typeface="Calibri" pitchFamily="34" charset="-120"/>
+              </a:rPr>
+              <a:t>Every live hazard feed is an open API available today, and Replay Mode validates the system against an actual 2024 flood in any month.</a:t>
+            </a:r>
+            <a:endParaRPr lang="en-US" sz="1100" dirty="0"/>
+          </a:p>
+        </p:txBody>
+      </p:sp>
+      <p:sp>
+        <p:nvSpPr>
+          <p:cNvPr id="15" name="Shape 13"/>
           <p:cNvSpPr/>
           <p:nvPr/>
         </p:nvSpPr>
         <p:spPr>
           <a:xfrm>
-            <a:off x="4606442" y="3840480"/>
-            <a:ext cx="347472" cy="347472"/>
-          </a:xfrm>
-          <a:prstGeom prst="ellipse">
-            <a:avLst/>
-          </a:prstGeom>
-          <a:solidFill>
-            <a:srgbClr val="11253C"/>
-          </a:solidFill>
-          <a:ln w="12700">
-            <a:solidFill>
-              <a:srgbClr val="11253C"/>
-            </a:solidFill>
-            <a:prstDash val="solid"/>
-          </a:ln>
-        </p:spPr>
-      </p:sp>
-      <p:sp>
-        <p:nvSpPr>
-          <p:cNvPr id="14" name="Text 12"/>
-          <p:cNvSpPr txBox="1"/>
-          <p:nvPr/>
-        </p:nvSpPr>
-        <p:spPr>
-          <a:xfrm>
-            <a:off x="4606442" y="3840480"/>
-            <a:ext cx="347472" cy="347472"/>
-          </a:xfrm>
-          <a:prstGeom prst="rect">
-            <a:avLst/>
-          </a:prstGeom>
-          <a:noFill/>
-          <a:ln/>
-        </p:spPr>
-        <p:txBody>
-          <a:bodyPr wrap="square" lIns="0" tIns="0" rIns="0" bIns="0" rtlCol="0" anchor="ctr"/>
-          <a:lstStyle/>
-          <a:p>
-            <a:pPr algn="ctr" indent="0" marL="0">
-              <a:buNone/>
-            </a:pPr>
-            <a:r>
-              <a:rPr lang="en-US" sz="1200" b="1" dirty="0">
-                <a:solidFill>
-                  <a:srgbClr val="FFFFFF"/>
-                </a:solidFill>
-                <a:latin typeface="Calibri" pitchFamily="34" charset="0"/>
-                <a:ea typeface="Calibri" pitchFamily="34" charset="-122"/>
-                <a:cs typeface="Calibri" pitchFamily="34" charset="-120"/>
-              </a:rPr>
-              <a:t>2</a:t>
-            </a:r>
-            <a:endParaRPr lang="en-US" sz="1200" dirty="0"/>
-          </a:p>
-        </p:txBody>
-      </p:sp>
-      <p:sp>
-        <p:nvSpPr>
-          <p:cNvPr id="15" name="Text 13"/>
-          <p:cNvSpPr txBox="1"/>
-          <p:nvPr/>
-        </p:nvSpPr>
-        <p:spPr>
-          <a:xfrm>
-            <a:off x="4606442" y="4315968"/>
-            <a:ext cx="2978810" cy="512064"/>
-          </a:xfrm>
-          <a:prstGeom prst="rect">
-            <a:avLst/>
-          </a:prstGeom>
-          <a:noFill/>
-          <a:ln/>
-        </p:spPr>
-        <p:txBody>
-          <a:bodyPr wrap="square" lIns="0" tIns="0" rIns="0" bIns="0" rtlCol="0" anchor="ctr"/>
-          <a:lstStyle/>
-          <a:p>
-            <a:pPr indent="0" marL="0">
-              <a:lnSpc>
-                <a:spcPts val="2000"/>
-              </a:lnSpc>
-              <a:buNone/>
-            </a:pPr>
-            <a:r>
-              <a:rPr lang="en-US" sz="1500" b="1" dirty="0">
-                <a:solidFill>
-                  <a:srgbClr val="11253C"/>
-                </a:solidFill>
-                <a:latin typeface="Calibri" pitchFamily="34" charset="0"/>
-                <a:ea typeface="Calibri" pitchFamily="34" charset="-122"/>
-                <a:cs typeface="Calibri" pitchFamily="34" charset="-120"/>
-              </a:rPr>
-              <a:t>It is buildable and provably real</a:t>
-            </a:r>
-            <a:endParaRPr lang="en-US" sz="1500" dirty="0"/>
-          </a:p>
-        </p:txBody>
-      </p:sp>
-      <p:sp>
-        <p:nvSpPr>
-          <p:cNvPr id="16" name="Text 14"/>
-          <p:cNvSpPr txBox="1"/>
-          <p:nvPr/>
-        </p:nvSpPr>
-        <p:spPr>
-          <a:xfrm>
-            <a:off x="4606442" y="4846320"/>
-            <a:ext cx="2978810" cy="822960"/>
-          </a:xfrm>
-          <a:prstGeom prst="rect">
-            <a:avLst/>
-          </a:prstGeom>
-          <a:noFill/>
-          <a:ln/>
-        </p:spPr>
-        <p:txBody>
-          <a:bodyPr wrap="square" lIns="0" tIns="0" rIns="0" bIns="0" rtlCol="0" anchor="ctr"/>
-          <a:lstStyle/>
-          <a:p>
-            <a:pPr indent="0" marL="0">
-              <a:lnSpc>
-                <a:spcPts val="1600"/>
-              </a:lnSpc>
-              <a:buNone/>
-            </a:pPr>
-            <a:r>
-              <a:rPr lang="en-US" sz="1150" dirty="0">
-                <a:solidFill>
-                  <a:srgbClr val="3D5468"/>
-                </a:solidFill>
-                <a:latin typeface="Calibri" pitchFamily="34" charset="0"/>
-                <a:ea typeface="Calibri" pitchFamily="34" charset="-122"/>
-                <a:cs typeface="Calibri" pitchFamily="34" charset="-120"/>
-              </a:rPr>
-              <a:t>Every live hazard feed is an open API available today, and Replay Mode lets us validate against an actual 2024 flood in any season.</a:t>
-            </a:r>
-            <a:endParaRPr lang="en-US" sz="1150" dirty="0"/>
-          </a:p>
-        </p:txBody>
-      </p:sp>
-      <p:sp>
-        <p:nvSpPr>
-          <p:cNvPr id="17" name="Shape 15"/>
-          <p:cNvSpPr/>
-          <p:nvPr/>
-        </p:nvSpPr>
-        <p:spPr>
-          <a:xfrm>
-            <a:off x="8097317" y="3639312"/>
-            <a:ext cx="3454298" cy="2121408"/>
+            <a:off x="8097317" y="4206240"/>
+            <a:ext cx="3454298" cy="1627632"/>
           </a:xfrm>
           <a:prstGeom prst="rect">
             <a:avLst/>
@@ -11058,155 +12290,91 @@
       </p:sp>
       <p:sp>
         <p:nvSpPr>
+          <p:cNvPr id="16" name="Text 14"/>
+          <p:cNvSpPr txBox="1"/>
+          <p:nvPr/>
+        </p:nvSpPr>
+        <p:spPr>
+          <a:xfrm>
+            <a:off x="8335061" y="4389120"/>
+            <a:ext cx="2978810" cy="475488"/>
+          </a:xfrm>
+          <a:prstGeom prst="rect">
+            <a:avLst/>
+          </a:prstGeom>
+          <a:noFill/>
+          <a:ln/>
+        </p:spPr>
+        <p:txBody>
+          <a:bodyPr wrap="square" lIns="0" tIns="0" rIns="0" bIns="0" rtlCol="0" anchor="ctr"/>
+          <a:lstStyle/>
+          <a:p>
+            <a:pPr marL="0" indent="0">
+              <a:lnSpc>
+                <a:spcPts val="1900"/>
+              </a:lnSpc>
+              <a:buNone/>
+            </a:pPr>
+            <a:r>
+              <a:rPr lang="en-US" sz="1400" b="1" dirty="0">
+                <a:solidFill>
+                  <a:srgbClr val="11253C"/>
+                </a:solidFill>
+                <a:latin typeface="Calibri" pitchFamily="34" charset="0"/>
+                <a:ea typeface="Calibri" pitchFamily="34" charset="-122"/>
+                <a:cs typeface="Calibri" pitchFamily="34" charset="-120"/>
+              </a:rPr>
+              <a:t>One architecture, every disaster</a:t>
+            </a:r>
+            <a:endParaRPr lang="en-US" sz="1400" dirty="0"/>
+          </a:p>
+        </p:txBody>
+      </p:sp>
+      <p:sp>
+        <p:nvSpPr>
+          <p:cNvPr id="17" name="Text 15"/>
+          <p:cNvSpPr txBox="1"/>
+          <p:nvPr/>
+        </p:nvSpPr>
+        <p:spPr>
+          <a:xfrm>
+            <a:off x="8335061" y="4901184"/>
+            <a:ext cx="2978810" cy="822960"/>
+          </a:xfrm>
+          <a:prstGeom prst="rect">
+            <a:avLst/>
+          </a:prstGeom>
+          <a:noFill/>
+          <a:ln/>
+        </p:spPr>
+        <p:txBody>
+          <a:bodyPr wrap="square" lIns="0" tIns="0" rIns="0" bIns="0" rtlCol="0" anchor="ctr"/>
+          <a:lstStyle/>
+          <a:p>
+            <a:pPr marL="0" indent="0">
+              <a:lnSpc>
+                <a:spcPts val="1500"/>
+              </a:lnSpc>
+              <a:buNone/>
+            </a:pPr>
+            <a:r>
+              <a:rPr lang="en-US" sz="1100" dirty="0">
+                <a:solidFill>
+                  <a:srgbClr val="3D5468"/>
+                </a:solidFill>
+                <a:latin typeface="Calibri" pitchFamily="34" charset="0"/>
+                <a:ea typeface="Calibri" pitchFamily="34" charset="-122"/>
+                <a:cs typeface="Calibri" pitchFamily="34" charset="-120"/>
+              </a:rPr>
+              <a:t>Flood and heat run live; fire, air quality and seismic are registered against the same adapter contract. That is infrastructure, not a project.</a:t>
+            </a:r>
+            <a:endParaRPr lang="en-US" sz="1100" dirty="0"/>
+          </a:p>
+        </p:txBody>
+      </p:sp>
+      <p:sp>
+        <p:nvSpPr>
           <p:cNvPr id="18" name="Shape 16"/>
-          <p:cNvSpPr/>
-          <p:nvPr/>
-        </p:nvSpPr>
-        <p:spPr>
-          <a:xfrm>
-            <a:off x="8335061" y="3840480"/>
-            <a:ext cx="347472" cy="347472"/>
-          </a:xfrm>
-          <a:prstGeom prst="ellipse">
-            <a:avLst/>
-          </a:prstGeom>
-          <a:solidFill>
-            <a:srgbClr val="11253C"/>
-          </a:solidFill>
-          <a:ln w="12700">
-            <a:solidFill>
-              <a:srgbClr val="11253C"/>
-            </a:solidFill>
-            <a:prstDash val="solid"/>
-          </a:ln>
-        </p:spPr>
-      </p:sp>
-      <p:sp>
-        <p:nvSpPr>
-          <p:cNvPr id="19" name="Text 17"/>
-          <p:cNvSpPr txBox="1"/>
-          <p:nvPr/>
-        </p:nvSpPr>
-        <p:spPr>
-          <a:xfrm>
-            <a:off x="8335061" y="3840480"/>
-            <a:ext cx="347472" cy="347472"/>
-          </a:xfrm>
-          <a:prstGeom prst="rect">
-            <a:avLst/>
-          </a:prstGeom>
-          <a:noFill/>
-          <a:ln/>
-        </p:spPr>
-        <p:txBody>
-          <a:bodyPr wrap="square" lIns="0" tIns="0" rIns="0" bIns="0" rtlCol="0" anchor="ctr"/>
-          <a:lstStyle/>
-          <a:p>
-            <a:pPr algn="ctr" indent="0" marL="0">
-              <a:buNone/>
-            </a:pPr>
-            <a:r>
-              <a:rPr lang="en-US" sz="1200" b="1" dirty="0">
-                <a:solidFill>
-                  <a:srgbClr val="FFFFFF"/>
-                </a:solidFill>
-                <a:latin typeface="Calibri" pitchFamily="34" charset="0"/>
-                <a:ea typeface="Calibri" pitchFamily="34" charset="-122"/>
-                <a:cs typeface="Calibri" pitchFamily="34" charset="-120"/>
-              </a:rPr>
-              <a:t>3</a:t>
-            </a:r>
-            <a:endParaRPr lang="en-US" sz="1200" dirty="0"/>
-          </a:p>
-        </p:txBody>
-      </p:sp>
-      <p:sp>
-        <p:nvSpPr>
-          <p:cNvPr id="20" name="Text 18"/>
-          <p:cNvSpPr txBox="1"/>
-          <p:nvPr/>
-        </p:nvSpPr>
-        <p:spPr>
-          <a:xfrm>
-            <a:off x="8335061" y="4315968"/>
-            <a:ext cx="2978810" cy="512064"/>
-          </a:xfrm>
-          <a:prstGeom prst="rect">
-            <a:avLst/>
-          </a:prstGeom>
-          <a:noFill/>
-          <a:ln/>
-        </p:spPr>
-        <p:txBody>
-          <a:bodyPr wrap="square" lIns="0" tIns="0" rIns="0" bIns="0" rtlCol="0" anchor="ctr"/>
-          <a:lstStyle/>
-          <a:p>
-            <a:pPr indent="0" marL="0">
-              <a:lnSpc>
-                <a:spcPts val="2000"/>
-              </a:lnSpc>
-              <a:buNone/>
-            </a:pPr>
-            <a:r>
-              <a:rPr lang="en-US" sz="1500" b="1" dirty="0">
-                <a:solidFill>
-                  <a:srgbClr val="11253C"/>
-                </a:solidFill>
-                <a:latin typeface="Calibri" pitchFamily="34" charset="0"/>
-                <a:ea typeface="Calibri" pitchFamily="34" charset="-122"/>
-                <a:cs typeface="Calibri" pitchFamily="34" charset="-120"/>
-              </a:rPr>
-              <a:t>It does not stop at one disaster</a:t>
-            </a:r>
-            <a:endParaRPr lang="en-US" sz="1500" dirty="0"/>
-          </a:p>
-        </p:txBody>
-      </p:sp>
-      <p:sp>
-        <p:nvSpPr>
-          <p:cNvPr id="21" name="Text 19"/>
-          <p:cNvSpPr txBox="1"/>
-          <p:nvPr/>
-        </p:nvSpPr>
-        <p:spPr>
-          <a:xfrm>
-            <a:off x="8335061" y="4846320"/>
-            <a:ext cx="2978810" cy="822960"/>
-          </a:xfrm>
-          <a:prstGeom prst="rect">
-            <a:avLst/>
-          </a:prstGeom>
-          <a:noFill/>
-          <a:ln/>
-        </p:spPr>
-        <p:txBody>
-          <a:bodyPr wrap="square" lIns="0" tIns="0" rIns="0" bIns="0" rtlCol="0" anchor="ctr"/>
-          <a:lstStyle/>
-          <a:p>
-            <a:pPr indent="0" marL="0">
-              <a:lnSpc>
-                <a:spcPts val="1600"/>
-              </a:lnSpc>
-              <a:buNone/>
-            </a:pPr>
-            <a:r>
-              <a:rPr lang="en-US" sz="1150" dirty="0">
-                <a:solidFill>
-                  <a:srgbClr val="3D5468"/>
-                </a:solidFill>
-                <a:latin typeface="Calibri" pitchFamily="34" charset="0"/>
-                <a:ea typeface="Calibri" pitchFamily="34" charset="-122"/>
-                <a:cs typeface="Calibri" pitchFamily="34" charset="-120"/>
-              </a:rPr>
-              <a:t>One adapter contract serves flood, heat, fire, air quality and seismic events — which makes it infrastructure rather than a project.</a:t>
-            </a:r>
-            <a:endParaRPr lang="en-US" sz="1150" dirty="0"/>
-          </a:p>
-        </p:txBody>
-      </p:sp>
-      <p:sp>
-        <p:nvSpPr>
-          <p:cNvPr id="22" name="Shape 20"/>
           <p:cNvSpPr/>
           <p:nvPr/>
         </p:nvSpPr>
@@ -11231,7 +12399,7 @@
       </p:sp>
       <p:sp>
         <p:nvSpPr>
-          <p:cNvPr id="23" name="Text 21"/>
+          <p:cNvPr id="19" name="Text 17"/>
           <p:cNvSpPr txBox="1"/>
           <p:nvPr/>
         </p:nvSpPr>
@@ -11250,7 +12418,7 @@
           <a:bodyPr wrap="square" lIns="0" tIns="0" rIns="0" bIns="0" rtlCol="0" anchor="ctr"/>
           <a:lstStyle/>
           <a:p>
-            <a:pPr indent="0" marL="0">
+            <a:pPr marL="0" indent="0">
               <a:buNone/>
             </a:pPr>
             <a:r>
@@ -11270,7 +12438,7 @@
       </p:sp>
       <p:sp>
         <p:nvSpPr>
-          <p:cNvPr id="24" name="Shape 22"/>
+          <p:cNvPr id="20" name="Shape 18"/>
           <p:cNvSpPr/>
           <p:nvPr/>
         </p:nvSpPr>
@@ -11295,7 +12463,7 @@
       </p:sp>
       <p:sp>
         <p:nvSpPr>
-          <p:cNvPr id="25" name="Text 23"/>
+          <p:cNvPr id="21" name="Text 19"/>
           <p:cNvSpPr txBox="1"/>
           <p:nvPr/>
         </p:nvSpPr>
@@ -11314,7 +12482,7 @@
           <a:bodyPr wrap="square" lIns="0" tIns="0" rIns="0" bIns="0" rtlCol="0" anchor="ctr"/>
           <a:lstStyle/>
           <a:p>
-            <a:pPr indent="0" marL="0">
+            <a:pPr marL="0" indent="0">
               <a:buNone/>
             </a:pPr>
             <a:r>
@@ -11334,7 +12502,7 @@
       </p:sp>
       <p:sp>
         <p:nvSpPr>
-          <p:cNvPr id="26" name="Shape 24"/>
+          <p:cNvPr id="22" name="Shape 20"/>
           <p:cNvSpPr/>
           <p:nvPr/>
         </p:nvSpPr>
@@ -11359,7 +12527,7 @@
       </p:sp>
       <p:sp>
         <p:nvSpPr>
-          <p:cNvPr id="27" name="Text 25"/>
+          <p:cNvPr id="23" name="Text 21"/>
           <p:cNvSpPr txBox="1"/>
           <p:nvPr/>
         </p:nvSpPr>
@@ -11378,7 +12546,7 @@
           <a:bodyPr wrap="square" lIns="0" tIns="0" rIns="0" bIns="0" rtlCol="0" anchor="ctr"/>
           <a:lstStyle/>
           <a:p>
-            <a:pPr indent="0" marL="0">
+            <a:pPr marL="0" indent="0">
               <a:buNone/>
             </a:pPr>
             <a:r>
@@ -11398,7 +12566,7 @@
       </p:sp>
       <p:sp>
         <p:nvSpPr>
-          <p:cNvPr id="28" name="Shape 26"/>
+          <p:cNvPr id="24" name="Shape 22"/>
           <p:cNvSpPr/>
           <p:nvPr/>
         </p:nvSpPr>
@@ -11423,7 +12591,7 @@
       </p:sp>
       <p:sp>
         <p:nvSpPr>
-          <p:cNvPr id="29" name="Text 27"/>
+          <p:cNvPr id="25" name="Text 23"/>
           <p:cNvSpPr txBox="1"/>
           <p:nvPr/>
         </p:nvSpPr>
@@ -11442,7 +12610,7 @@
           <a:bodyPr wrap="square" lIns="0" tIns="0" rIns="0" bIns="0" rtlCol="0" anchor="ctr"/>
           <a:lstStyle/>
           <a:p>
-            <a:pPr indent="0" marL="0">
+            <a:pPr marL="0" indent="0">
               <a:buNone/>
             </a:pPr>
             <a:r>
@@ -11462,7 +12630,7 @@
       </p:sp>
       <p:sp>
         <p:nvSpPr>
-          <p:cNvPr id="30" name="Shape 28"/>
+          <p:cNvPr id="26" name="Shape 24"/>
           <p:cNvSpPr/>
           <p:nvPr/>
         </p:nvSpPr>
@@ -11487,7 +12655,7 @@
       </p:sp>
       <p:sp>
         <p:nvSpPr>
-          <p:cNvPr id="31" name="Text 29"/>
+          <p:cNvPr id="27" name="Text 25"/>
           <p:cNvSpPr txBox="1"/>
           <p:nvPr/>
         </p:nvSpPr>
@@ -11506,7 +12674,7 @@
           <a:bodyPr wrap="square" lIns="0" tIns="0" rIns="0" bIns="0" rtlCol="0" anchor="ctr"/>
           <a:lstStyle/>
           <a:p>
-            <a:pPr indent="0" marL="0">
+            <a:pPr marL="0" indent="0">
               <a:buNone/>
             </a:pPr>
             <a:r>
@@ -11526,7 +12694,7 @@
       </p:sp>
       <p:sp>
         <p:nvSpPr>
-          <p:cNvPr id="32" name="Text 30"/>
+          <p:cNvPr id="28" name="Text 26"/>
           <p:cNvSpPr txBox="1"/>
           <p:nvPr/>
         </p:nvSpPr>
@@ -11545,7 +12713,7 @@
           <a:bodyPr wrap="square" lIns="0" tIns="0" rIns="0" bIns="0" rtlCol="0" anchor="ctr"/>
           <a:lstStyle/>
           <a:p>
-            <a:pPr algn="r" indent="0" marL="0">
+            <a:pPr marL="0" indent="0" algn="r">
               <a:buNone/>
             </a:pPr>
             <a:r>
@@ -11864,4 +13032,299 @@
     </a:ext>
   </a:extLst>
 </a:theme>
+</file>
+
+<file path=ppt/theme/theme2.xml><?xml version="1.0" encoding="utf-8"?>
+<a:theme xmlns:a="http://schemas.openxmlformats.org/drawingml/2006/main" name="Office Theme">
+  <a:themeElements>
+    <a:clrScheme name="Office">
+      <a:dk1>
+        <a:sysClr val="windowText" lastClr="000000"/>
+      </a:dk1>
+      <a:lt1>
+        <a:sysClr val="window" lastClr="FFFFFF"/>
+      </a:lt1>
+      <a:dk2>
+        <a:srgbClr val="44546A"/>
+      </a:dk2>
+      <a:lt2>
+        <a:srgbClr val="E7E6E6"/>
+      </a:lt2>
+      <a:accent1>
+        <a:srgbClr val="4472C4"/>
+      </a:accent1>
+      <a:accent2>
+        <a:srgbClr val="ED7D31"/>
+      </a:accent2>
+      <a:accent3>
+        <a:srgbClr val="A5A5A5"/>
+      </a:accent3>
+      <a:accent4>
+        <a:srgbClr val="FFC000"/>
+      </a:accent4>
+      <a:accent5>
+        <a:srgbClr val="5B9BD5"/>
+      </a:accent5>
+      <a:accent6>
+        <a:srgbClr val="70AD47"/>
+      </a:accent6>
+      <a:hlink>
+        <a:srgbClr val="0563C1"/>
+      </a:hlink>
+      <a:folHlink>
+        <a:srgbClr val="954F72"/>
+      </a:folHlink>
+    </a:clrScheme>
+    <a:fontScheme name="Office">
+      <a:majorFont>
+        <a:latin typeface="Calibri Light" panose="020F0302020204030204"/>
+        <a:ea typeface=""/>
+        <a:cs typeface=""/>
+        <a:font script="Jpan" typeface="游ゴシック Light"/>
+        <a:font script="Hang" typeface="맑은 고딕"/>
+        <a:font script="Hans" typeface="等线 Light"/>
+        <a:font script="Hant" typeface="新細明體"/>
+        <a:font script="Arab" typeface="Times New Roman"/>
+        <a:font script="Hebr" typeface="Times New Roman"/>
+        <a:font script="Thai" typeface="Angsana New"/>
+        <a:font script="Ethi" typeface="Nyala"/>
+        <a:font script="Beng" typeface="Vrinda"/>
+        <a:font script="Gujr" typeface="Shruti"/>
+        <a:font script="Khmr" typeface="MoolBoran"/>
+        <a:font script="Knda" typeface="Tunga"/>
+        <a:font script="Guru" typeface="Raavi"/>
+        <a:font script="Cans" typeface="Euphemia"/>
+        <a:font script="Cher" typeface="Plantagenet Cherokee"/>
+        <a:font script="Yiii" typeface="Microsoft Yi Baiti"/>
+        <a:font script="Tibt" typeface="Microsoft Himalaya"/>
+        <a:font script="Thaa" typeface="MV Boli"/>
+        <a:font script="Deva" typeface="Mangal"/>
+        <a:font script="Telu" typeface="Gautami"/>
+        <a:font script="Taml" typeface="Latha"/>
+        <a:font script="Syrc" typeface="Estrangelo Edessa"/>
+        <a:font script="Orya" typeface="Kalinga"/>
+        <a:font script="Mlym" typeface="Kartika"/>
+        <a:font script="Laoo" typeface="DokChampa"/>
+        <a:font script="Sinh" typeface="Iskoola Pota"/>
+        <a:font script="Mong" typeface="Mongolian Baiti"/>
+        <a:font script="Viet" typeface="Times New Roman"/>
+        <a:font script="Uigh" typeface="Microsoft Uighur"/>
+        <a:font script="Geor" typeface="Sylfaen"/>
+        <a:font script="Armn" typeface="Arial"/>
+        <a:font script="Bugi" typeface="Leelawadee UI"/>
+        <a:font script="Bopo" typeface="Microsoft JhengHei"/>
+        <a:font script="Java" typeface="Javanese Text"/>
+        <a:font script="Lisu" typeface="Segoe UI"/>
+        <a:font script="Mymr" typeface="Myanmar Text"/>
+        <a:font script="Nkoo" typeface="Ebrima"/>
+        <a:font script="Olck" typeface="Nirmala UI"/>
+        <a:font script="Osma" typeface="Ebrima"/>
+        <a:font script="Phag" typeface="Phagspa"/>
+        <a:font script="Syrn" typeface="Estrangelo Edessa"/>
+        <a:font script="Syrj" typeface="Estrangelo Edessa"/>
+        <a:font script="Syre" typeface="Estrangelo Edessa"/>
+        <a:font script="Sora" typeface="Nirmala UI"/>
+        <a:font script="Tale" typeface="Microsoft Tai Le"/>
+        <a:font script="Talu" typeface="Microsoft New Tai Lue"/>
+        <a:font script="Tfng" typeface="Ebrima"/>
+      </a:majorFont>
+      <a:minorFont>
+        <a:latin typeface="Calibri" panose="020F0502020204030204"/>
+        <a:ea typeface=""/>
+        <a:cs typeface=""/>
+        <a:font script="Jpan" typeface="游ゴシック"/>
+        <a:font script="Hang" typeface="맑은 고딕"/>
+        <a:font script="Hans" typeface="等线"/>
+        <a:font script="Hant" typeface="新細明體"/>
+        <a:font script="Arab" typeface="Arial"/>
+        <a:font script="Hebr" typeface="Arial"/>
+        <a:font script="Thai" typeface="Cordia New"/>
+        <a:font script="Ethi" typeface="Nyala"/>
+        <a:font script="Beng" typeface="Vrinda"/>
+        <a:font script="Gujr" typeface="Shruti"/>
+        <a:font script="Khmr" typeface="DaunPenh"/>
+        <a:font script="Knda" typeface="Tunga"/>
+        <a:font script="Guru" typeface="Raavi"/>
+        <a:font script="Cans" typeface="Euphemia"/>
+        <a:font script="Cher" typeface="Plantagenet Cherokee"/>
+        <a:font script="Yiii" typeface="Microsoft Yi Baiti"/>
+        <a:font script="Tibt" typeface="Microsoft Himalaya"/>
+        <a:font script="Thaa" typeface="MV Boli"/>
+        <a:font script="Deva" typeface="Mangal"/>
+        <a:font script="Telu" typeface="Gautami"/>
+        <a:font script="Taml" typeface="Latha"/>
+        <a:font script="Syrc" typeface="Estrangelo Edessa"/>
+        <a:font script="Orya" typeface="Kalinga"/>
+        <a:font script="Mlym" typeface="Kartika"/>
+        <a:font script="Laoo" typeface="DokChampa"/>
+        <a:font script="Sinh" typeface="Iskoola Pota"/>
+        <a:font script="Mong" typeface="Mongolian Baiti"/>
+        <a:font script="Viet" typeface="Arial"/>
+        <a:font script="Uigh" typeface="Microsoft Uighur"/>
+        <a:font script="Geor" typeface="Sylfaen"/>
+        <a:font script="Armn" typeface="Arial"/>
+        <a:font script="Bugi" typeface="Leelawadee UI"/>
+        <a:font script="Bopo" typeface="Microsoft JhengHei"/>
+        <a:font script="Java" typeface="Javanese Text"/>
+        <a:font script="Lisu" typeface="Segoe UI"/>
+        <a:font script="Mymr" typeface="Myanmar Text"/>
+        <a:font script="Nkoo" typeface="Ebrima"/>
+        <a:font script="Olck" typeface="Nirmala UI"/>
+        <a:font script="Osma" typeface="Ebrima"/>
+        <a:font script="Phag" typeface="Phagspa"/>
+        <a:font script="Syrn" typeface="Estrangelo Edessa"/>
+        <a:font script="Syrj" typeface="Estrangelo Edessa"/>
+        <a:font script="Syre" typeface="Estrangelo Edessa"/>
+        <a:font script="Sora" typeface="Nirmala UI"/>
+        <a:font script="Tale" typeface="Microsoft Tai Le"/>
+        <a:font script="Talu" typeface="Microsoft New Tai Lue"/>
+        <a:font script="Tfng" typeface="Ebrima"/>
+      </a:minorFont>
+    </a:fontScheme>
+    <a:fmtScheme name="Office">
+      <a:fillStyleLst>
+        <a:solidFill>
+          <a:schemeClr val="phClr"/>
+        </a:solidFill>
+        <a:gradFill rotWithShape="1">
+          <a:gsLst>
+            <a:gs pos="0">
+              <a:schemeClr val="phClr">
+                <a:lumMod val="110000"/>
+                <a:satMod val="105000"/>
+                <a:tint val="67000"/>
+              </a:schemeClr>
+            </a:gs>
+            <a:gs pos="50000">
+              <a:schemeClr val="phClr">
+                <a:lumMod val="105000"/>
+                <a:satMod val="103000"/>
+                <a:tint val="73000"/>
+              </a:schemeClr>
+            </a:gs>
+            <a:gs pos="100000">
+              <a:schemeClr val="phClr">
+                <a:lumMod val="105000"/>
+                <a:satMod val="109000"/>
+                <a:tint val="81000"/>
+              </a:schemeClr>
+            </a:gs>
+          </a:gsLst>
+          <a:lin ang="5400000" scaled="0"/>
+        </a:gradFill>
+        <a:gradFill rotWithShape="1">
+          <a:gsLst>
+            <a:gs pos="0">
+              <a:schemeClr val="phClr">
+                <a:satMod val="103000"/>
+                <a:lumMod val="102000"/>
+                <a:tint val="94000"/>
+              </a:schemeClr>
+            </a:gs>
+            <a:gs pos="50000">
+              <a:schemeClr val="phClr">
+                <a:satMod val="110000"/>
+                <a:lumMod val="100000"/>
+                <a:shade val="100000"/>
+              </a:schemeClr>
+            </a:gs>
+            <a:gs pos="100000">
+              <a:schemeClr val="phClr">
+                <a:lumMod val="99000"/>
+                <a:satMod val="120000"/>
+                <a:shade val="78000"/>
+              </a:schemeClr>
+            </a:gs>
+          </a:gsLst>
+          <a:lin ang="5400000" scaled="0"/>
+        </a:gradFill>
+      </a:fillStyleLst>
+      <a:lnStyleLst>
+        <a:ln w="6350" cap="flat" cmpd="sng" algn="ctr">
+          <a:solidFill>
+            <a:schemeClr val="phClr"/>
+          </a:solidFill>
+          <a:prstDash val="solid"/>
+          <a:miter lim="800000"/>
+        </a:ln>
+        <a:ln w="12700" cap="flat" cmpd="sng" algn="ctr">
+          <a:solidFill>
+            <a:schemeClr val="phClr"/>
+          </a:solidFill>
+          <a:prstDash val="solid"/>
+          <a:miter lim="800000"/>
+        </a:ln>
+        <a:ln w="19050" cap="flat" cmpd="sng" algn="ctr">
+          <a:solidFill>
+            <a:schemeClr val="phClr"/>
+          </a:solidFill>
+          <a:prstDash val="solid"/>
+          <a:miter lim="800000"/>
+        </a:ln>
+      </a:lnStyleLst>
+      <a:effectStyleLst>
+        <a:effectStyle>
+          <a:effectLst/>
+        </a:effectStyle>
+        <a:effectStyle>
+          <a:effectLst/>
+        </a:effectStyle>
+        <a:effectStyle>
+          <a:effectLst>
+            <a:outerShdw blurRad="57150" dist="19050" dir="5400000" algn="ctr" rotWithShape="0">
+              <a:srgbClr val="000000">
+                <a:alpha val="63000"/>
+              </a:srgbClr>
+            </a:outerShdw>
+          </a:effectLst>
+        </a:effectStyle>
+      </a:effectStyleLst>
+      <a:bgFillStyleLst>
+        <a:solidFill>
+          <a:schemeClr val="phClr"/>
+        </a:solidFill>
+        <a:solidFill>
+          <a:schemeClr val="phClr">
+            <a:tint val="95000"/>
+            <a:satMod val="170000"/>
+          </a:schemeClr>
+        </a:solidFill>
+        <a:gradFill rotWithShape="1">
+          <a:gsLst>
+            <a:gs pos="0">
+              <a:schemeClr val="phClr">
+                <a:tint val="93000"/>
+                <a:satMod val="150000"/>
+                <a:shade val="98000"/>
+                <a:lumMod val="102000"/>
+              </a:schemeClr>
+            </a:gs>
+            <a:gs pos="50000">
+              <a:schemeClr val="phClr">
+                <a:tint val="98000"/>
+                <a:satMod val="130000"/>
+                <a:shade val="90000"/>
+                <a:lumMod val="103000"/>
+              </a:schemeClr>
+            </a:gs>
+            <a:gs pos="100000">
+              <a:schemeClr val="phClr">
+                <a:shade val="63000"/>
+                <a:satMod val="120000"/>
+              </a:schemeClr>
+            </a:gs>
+          </a:gsLst>
+          <a:lin ang="5400000" scaled="0"/>
+        </a:gradFill>
+      </a:bgFillStyleLst>
+    </a:fmtScheme>
+  </a:themeElements>
+  <a:objectDefaults/>
+  <a:extraClrSchemeLst/>
+  <a:extLst>
+    <a:ext uri="{05A4C25C-085E-4340-85A3-A5531E510DB2}">
+      <thm15:themeFamily xmlns:thm15="http://schemas.microsoft.com/office/thememl/2012/main" name="Office Theme" id="{62F939B6-93AF-4DB8-9C6B-D6C7DFDC589F}" vid="{4A3C46E8-61CC-4603-A589-7422A47A8E4A}"/>
+    </a:ext>
+  </a:extLst>
+</a:theme>
 </file>
--- a/Indradhanu - PCCOE Grand Challenge 2026.pptx
+++ b/Indradhanu - PCCOE Grand Challenge 2026.pptx
@@ -12728,6 +12728,61 @@
               <a:t>Indradhanu  ·  PCCOE International Grand Challenge 2026  ·  Pune, India</a:t>
             </a:r>
             <a:endParaRPr lang="en-US" sz="1100" dirty="0"/>
+          </a:p>
+        </p:txBody>
+      </p:sp>
+      <p:sp>
+        <p:nvSpPr>
+          <p:cNvPr id="29" name="Text 4">
+            <a:extLst>
+              <a:ext uri="{FF2B5EF4-FFF2-40B4-BE49-F238E27FC236}">
+                <a16:creationId xmlns:a16="http://schemas.microsoft.com/office/drawing/2014/main" id="{F396ED69-E5DD-F19B-D5F6-B548F12D09AC}"/>
+              </a:ext>
+            </a:extLst>
+          </p:cNvPr>
+          <p:cNvSpPr txBox="1"/>
+          <p:nvPr/>
+        </p:nvSpPr>
+        <p:spPr>
+          <a:xfrm>
+            <a:off x="5532431" y="3371470"/>
+            <a:ext cx="10911535" cy="274320"/>
+          </a:xfrm>
+          <a:prstGeom prst="rect">
+            <a:avLst/>
+          </a:prstGeom>
+          <a:noFill/>
+          <a:ln/>
+        </p:spPr>
+        <p:txBody>
+          <a:bodyPr wrap="square" lIns="0" tIns="0" rIns="0" bIns="0" rtlCol="0" anchor="ctr"/>
+          <a:lstStyle/>
+          <a:p>
+            <a:r>
+              <a:rPr lang="en-US" dirty="0">
+                <a:latin typeface="Calibri" pitchFamily="34" charset="0"/>
+                <a:ea typeface="Calibri" pitchFamily="34" charset="-122"/>
+                <a:cs typeface="Calibri" pitchFamily="34" charset="-120"/>
+              </a:rPr>
+              <a:t>DEMO: </a:t>
+            </a:r>
+            <a:r>
+              <a:rPr lang="en-US" dirty="0">
+                <a:latin typeface="Calibri" pitchFamily="34" charset="0"/>
+                <a:ea typeface="Calibri" pitchFamily="34" charset="-122"/>
+                <a:cs typeface="Calibri" pitchFamily="34" charset="-120"/>
+                <a:hlinkClick r:id="rId3"/>
+              </a:rPr>
+              <a:t>https://indradhanu-fr.vercel.app</a:t>
+            </a:r>
+            <a:endParaRPr lang="en-US" dirty="0">
+              <a:latin typeface="Calibri" pitchFamily="34" charset="0"/>
+              <a:ea typeface="Calibri" pitchFamily="34" charset="-122"/>
+              <a:cs typeface="Calibri" pitchFamily="34" charset="-120"/>
+            </a:endParaRPr>
+          </a:p>
+          <a:p>
+            <a:endParaRPr lang="en-US" dirty="0"/>
           </a:p>
         </p:txBody>
       </p:sp>
